--- a/presentations/hr-driven-identity-interview/HR_Driven_Identity_Exec_AnyAgency.pptx
+++ b/presentations/hr-driven-identity-interview/HR_Driven_Identity_Exec_AnyAgency.pptx
@@ -131,7 +131,7 @@
   <p:extLst>
     <p:ext uri="{521415D9-36F7-43E2-AB2F-B90AF26B5E84}">
       <p14:sectionLst xmlns:p14="http://schemas.microsoft.com/office/powerpoint/2010/main">
-        <p14:section name="The decision" id="{61dadbbe-95b2-a09f-2f4d-65ebd12449a6}">
+        <p14:section name="The decision" id="{29bba6ff-a62a-c4b0-a92e-d5f7ecddcaca}">
           <p14:sldIdLst>
             <p14:sldId id="256"/>
             <p14:sldId id="257"/>
@@ -139,7 +139,7 @@
             <p14:sldId id="259"/>
           </p14:sldIdLst>
         </p14:section>
-        <p14:section name="Making it real" id="{f92649ba-1e8d-f9c5-69df-039c4af00c85}">
+        <p14:section name="Making it real" id="{afc7e07d-70eb-9310-c51f-44bcfe26f8ef}">
           <p14:sldIdLst>
             <p14:sldId id="260"/>
             <p14:sldId id="261"/>
@@ -148,7 +148,7 @@
             <p14:sldId id="264"/>
           </p14:sldIdLst>
         </p14:section>
-        <p14:section name="Backup" id="{8d6e474e-3ff0-e0a2-3e44-9a92834cbc0a}">
+        <p14:section name="Backup" id="{c5283a63-1717-e035-2612-de50c1d3caba}">
           <p14:sldIdLst>
             <p14:sldId id="265"/>
             <p14:sldId id="266"/>
@@ -573,7 +573,7 @@
             <a:r>
               <a:rPr lang="en-US" dirty="0"/>
               <a:t>[0:00–0:50]  Good morning, and thank you.
-Digital identity has two faces: the public who sign in to an agency's services, and the workforce who serve them. Both rest on the same data discipline: one person, one key the agency controls, and every fact owned by one authoritative source. I'll show that discipline through the workforce face, because Federal HR 2.0 puts it on every agency's calendar.
+Digital identity has two faces: the public who sign in to an agency's services, and the workforce who serve them. Both rest on the same data discipline: one person, one key the agency controls, and every fact owned by one authoritative source. I'll show that discipline through the workforce face, because Federal HR 2.0 puts it on participating agencies' calendars.
 I have one proposal, and I'll take it through four questions, the way I'd take it to leadership: why it matters, what we should do, who has to be involved, and how we'd carry it out and know it's working.
 Workbook: HR-Driven Identity, Chapter 00 — Overview and Applicability.</a:t>
             </a:r>
@@ -1576,7 +1576,7 @@
               <a:rPr lang="en-US" dirty="0"/>
               <a:t>[0:50–2:40]  Why. Based on current visibility, many agencies do not operate a comprehensive enterprise HR-driven identity lifecycle. In the processes I have observed, many workforce identity changes remain dependent on tickets or manual coordination, and that costs three ways.
 Access outlives the job: when someone leaves or changes roles, removal can wait for a ticket, and a stale account is a security violation that can enable a breach of the public's records. Federal standards require revoking a separated person's credentials, and a ticket-dependent process struggles to meet that. Records we can't trust: in the processes I have observed, the phone book is wrong until someone files a ticket, and every change of manager means the organization, the manager and tool access are updated by hand. Approvals route through that same data. And cost and delay: many joiners, movers and leavers become help-desk work.
-But the bigger why is where the mission is heading. Take an illustrative shared-service scenario: a cross-agency contact center, one front door for two agencies' customers. It's an example, not an approved program. The hard part of an idea like that isn't the phones: cloud contact centers make the front end easy. It's the back end. Who is this agent? Which agency's records may they see? And does their access end the day they leave, in both agencies? A standardized, HR-driven identity answers those questions by rule, the same way everywhere.
+But the bigger why is where the mission is heading. Take an illustrative shared-service scenario: a cross-agency contact center, one front door for two agencies' customers. It's an example, not an approved program. The hard part of an idea like that isn't the phones: cloud contact centers make the front end easy. It's the back end. Who is this agent? Which agency's records may they see? And does their access end the day they leave, in both agencies? A standardized, HR-driven identity supplies the trusted facts needed to answer those questions consistently.
 And if we do nothing, HR moves to Core HCM, identity moves to Entra ID, and we rebuild the same manual process twice, on new platforms.
 Workbook: HR-Driven Identity, Chapter 01 — Why the agency needs HR-driven ICAM now.</a:t>
             </a:r>
@@ -2221,7 +2221,7 @@
               <a:rPr lang="en-US" dirty="0"/>
               <a:t>[2:40–4:30]  What should we do? I've weighed four realistic options against what leadership actually has to balance: the mission and the public we serve, security, cost and resilience. Compliance matters, but on its own it isn't a reason to invest.
 A, keep ticket-driven identity: no new investment, but the risk and the manual work stay where they are. That's the cost of doing nothing.
-B, automate inside the directories with scripts and exports: quick and cheap, but it automates a source that isn't authoritative, so it spreads bad data faster, and it's rebuilt when HR changes platforms.
+B, automate inside the directories with scripts and exports: quick and cheap. It can automate selected changes, but without a governed authority model and complete lifecycle events, it risks propagating inconsistent data and being rebuilt when the source changes.
 C, wait for HR 2.0 and integrate afterward: defensible, and less work this year. But program material describes interconnections occurring during the onboarding period, so waiting means retrofitting after go-live.
 D, start now: HR as the source of truth, in OPM's standard personnel data, designed into both the HR onboarding and the Entra ID migration. It costs design effort up front and needs shared governance, which is why it's only partial on cost.
 The judgment call: if HR 2.0 slipped a long way, C becomes reasonable. But D's first step — data standards, ownership and the person key — is no-regret either way, and it can start now from the HR data the agency already has, subject to data profiling, with the source switched to Core HCM when it arrives.
@@ -2314,12 +2314,12 @@
             <a:r>
               <a:rPr lang="en-US" dirty="0"/>
               <a:t>[4:30–6:40]  I propose option D, phased, starting with the no-regret steps. Four reasons.
-Mission and the public: access to the public's records should end when a person's role ends, automatically, the same day; the people who serve the public should have the right access on day one; and shared services like the illustrative contact center become possible, because every agency describes its people the same way.
+Mission and the public: access to the public's records should end when a person's role ends, automatically, the same day; the people who serve the public should have the right access on day one; and shared services like the illustrative contact center become possible, because participating agencies would describe their people the same way.
 Cost: we build it once, while both platforms are being rebuilt anyway, and retire ticket work for routine joiners, movers and leavers.
 Security: modern access decisions, Zero Trust, increasingly depend on authoritative identity, device and contextual attributes, and the identity attributes, organization, position, status and supervisor, come from HR. So the accuracy of HR data drives the accuracy of access. The federal mandates point the same way, but they're the floor, not the reason. And it gives the inspector general's perennial question — how do you know every account belongs to a current person? — a standing answer.
-Resilience: by building on OPM's standard data rather than one vendor's fields, and on a person key the agency controls, the design survives the next platform change. I propose an existing enterprise ID, such as a Mainframe PIN, as the candidate, subject to validating its uniqueness, persistence, non-reassignment, population coverage, privacy constraints and historical behavior.
+Resilience: by building on OPM's standard data rather than one vendor's fields, and on a person key the agency controls, the design survives the next platform change. I propose an existing enterprise ID, such as a Mainframe PIN, as the candidate, subject to formal identifier validation.
 Two honest limits. HR 2.0 covers federal employees only, so a contractor authority decision is required: I propose evaluating suitability records, PIV sponsorship and Core HCM's contingent-worker records as candidate sources. And we should build only what HR is authoritative for.
-The upside: every agency is moving to the same HR platform on the same standards, so one identity standard can serve them all, and the services they share.
+The upside: participating civilian agencies are moving toward a common Core HCM platform and federal personnel standards, so a reusable identity model could reduce reinvention across agencies and shared services.
 Workbook: HR-Driven Identity, Chapter 01 — Why the agency needs HR-driven ICAM now; Chapter 03 — Attribute Authority; Chapter 05 — Contractors and vendors.</a:t>
             </a:r>
             <a:endParaRPr lang="en-US" dirty="0"/>
@@ -2411,7 +2411,7 @@
               <a:t>[6:40–8:20]  Who has to be involved. This is an organizational change as much as a technical one, so it matters who owns what.
 HR owns the personnel data and its quality, at the source. When the data is wrong, it gets fixed in HR, not patched in the directory. And the OPM HR 2.0 program owns the platform, the standards and the interconnection.
 The CIO's identity team uses that data to run Entra ID, Active Directory and access. Security sets the Zero Trust policy and owns the leaver path. And the help desk moves from routine tickets to handling the exceptions.
-Then the guards and partners. The privacy office is in from the start, because using HR data for identity is a disclosure that needs a routine use and minimization. Contractor sponsors and the PIV office are the source for people HR doesn't cover. And partner agencies need the same standard if we're going to share services.
+Then the guards and partners. The privacy office is in from the start, because using HR data for identity is a disclosure that needs a routine use and minimization. For people HR doesn't cover, contractor sponsors, credentialing, acquisition, suitability and HR systems each may hold part of the record; the authority decision identifies which source owns each required fact. And partner agencies need the same standard if we're going to share services.
 My role, as an enterprise data architect, is to own the data standards, the logical model and the person key: every attribute gets one name, one definition and one accountable owner. I'd chair the data working group for the effort, review the HR 2.0 integrator's design artifacts against those standards, and carry the standard to the interagency committees and working groups where it gets adopted. The person model and its attributes also become a governed piece of the agency's data and metadata inventory, which auditors increasingly ask for.
 Workbook: HR-Driven Identity, Chapter 03 — Attribute Authority; Appendix B — Security and Privacy Assessment.</a:t>
             </a:r>
@@ -2593,10 +2593,10 @@
             <a:r>
               <a:rPr lang="en-US" dirty="0"/>
               <a:t>[10:00–12:20]  Here is how I propose we carry it out.
-Data. One governed crosswalk maps OPM's standard data elements into that person model, so when HR changes platforms only the crosswalk's source side changes. Personnel actions then drive the identity events — joiner, mover, leaver — by code, using a proposed classification that the data owners validate first. Contractors come into the same model once the contractor authority decision is made.
-Security. The leaver path blocks access first, within hours, and cleans up afterward. The integration runs with least privilege and no stored secrets. And anything that fails goes to a quarantine with an owner; nothing resolves itself silently.
+Data. One governed crosswalk maps OPM's standard data elements into that person model, so when HR changes platforms only the crosswalk's source side changes. Validated personnel-action mappings then initiate the identity events — joiner, mover, leaver — using a proposed classification that the data owners validate first. Contractors come into the same model once the contractor authority decision is made.
+Security. The leaver path blocks access first, within the approved threshold, and then reconciles every downstream action. The integration runs with least privilege, using managed identities and secretless authentication wherever supported. And anything that fails goes to a quarantine with an owner; nothing resolves itself silently.
 Operations. We start now, from the HR data the agency already has, subject to data profiling, and switch the source to Core HCM when it arrives. We run in shadow mode first, comparing what HR says with what the directories hold, and fixing the gaps. We cut over one population at a time. And we close the ticket path for a population only when the data proves HR is the sole source.
-The technology is the example, not the point. Here it's Oracle Core HCM feeding Microsoft's HR-driven provisioning into Entra ID and Active Directory, with access packages, lifecycle workflows and PIV downstream. If the vendors change, the design holds.
+The products on the slide are one realization; the agency-owned model remains stable if they change.
 Workbook: HR-Driven Identity, Chapter 04 — Logical architecture and Microsoft realization; Chapter 05 — The standard-attribute layer; Chapter 07 — The canonical leaver sequence; Chapter 10 — Execution Plan.</a:t>
             </a:r>
             <a:endParaRPr lang="en-US" dirty="0"/>
@@ -2687,7 +2687,7 @@
               <a:rPr lang="en-US" dirty="0"/>
               <a:t>[12:20–14:40]  How we'll know it's working, and what I'd need.
 Six measures, each baselined in the first phase, and each one a business measure leadership can read: time from separation to blocked access, in hours, against an agency-approved threshold; credential and access revocation, reconciled to verified completion, where one credential-specific constraint is the federal requirement to terminate a PIV card that can't be collected within eighteen hours; accounts tied to a person, with orphaned accounts trending to zero; joiner and mover tickets going down, with access ready on day one; the manager and organization in the directory matching HR; and every exception with an owner and an age. As a byproduct, the same data is evidence for the controls auditors ask about.
-What I'd need from leadership is one decision: start HR-driven identity now, as a design requirement of the HR 2.0 onboarding and the Entra ID migration. And to act on it: a sponsor across HR, the CIO's identity team and privacy; identity named as a consumer in the HR 2.0 interconnection plan; data owners designated, and the enterprise person key confirmed; a small team for the pre-onboarding data work; and the planning assumptions validated, with authoritative owners designated, before implementation.
+I'm asking leadership to make three decisions: name identity as an HR 2.0 data consumer, authorize the cross-functional data-governance work, and require assumptions to be validated by accountable owners before implementation. That lets the agency modernize the platforms and the lifecycle together, rather than carrying the ticket process forward.
 Thank you. I look forward to your questions.
 Workbook: HR-Driven Identity, Chapter 09 — Drift, Metrics and Evidence; Chapter 10 — Execution Plan.</a:t>
             </a:r>
@@ -18427,7 +18427,7 @@
                   <a:srgbClr val="0F766E"/>
                 </a:solidFill>
               </a:rPr>
-              <a:t>A standardized, HR-driven identity answers all three by rule.</a:t>
+              <a:t>A standardized, HR-driven identity supplies the trusted facts to answer all three consistently.</a:t>
             </a:r>
             <a:endParaRPr lang="en-US" sz="1450" dirty="0"/>
           </a:p>
@@ -26057,7 +26057,7 @@
                           <a:ea typeface="Calibri" pitchFamily="34" charset="-122"/>
                           <a:cs typeface="Calibri" pitchFamily="34" charset="-120"/>
                         </a:rPr>
-                        <a:t>Scripts and exports, no HR authority</a:t>
+                        <a:t>Scripts and exports, without a governed authority model</a:t>
                       </a:r>
                       <a:endParaRPr lang="en-US" sz="1400" dirty="0">
                         <a:latin typeface="Calibri" charset="0"/>
@@ -26397,7 +26397,7 @@
                           <a:ea typeface="Calibri" pitchFamily="34" charset="-122"/>
                           <a:cs typeface="Calibri" pitchFamily="34" charset="-120"/>
                         </a:rPr>
-                        <a:t>Automates a source that isn’t authoritative</a:t>
+                        <a:t>Automation without governed authority</a:t>
                       </a:r>
                       <a:endParaRPr lang="en-US" sz="1400" dirty="0">
                         <a:latin typeface="Calibri" charset="0"/>
@@ -28343,7 +28343,7 @@
                   <a:schemeClr val="tx2"/>
                 </a:solidFill>
               </a:rPr>
-              <a:t>every agency is moving to the same HR platform on the same standards — one identity standard can serve them all, and the services they share.</a:t>
+              <a:t>participating civilian agencies are moving toward a common Core HCM platform and federal personnel standards; a reusable identity model could reduce reinvention across agencies and shared services.</a:t>
             </a:r>
             <a:endParaRPr lang="en-US" sz="1400" dirty="0"/>
           </a:p>
@@ -29187,7 +29187,7 @@
                   <a:schemeClr val="tx2"/>
                 </a:solidFill>
               </a:rPr>
-              <a:t>The source for non-employees</a:t>
+              <a:t>Inputs to the non-employee authority decision</a:t>
             </a:r>
             <a:endParaRPr lang="en-US" sz="1450" dirty="0"/>
           </a:p>
@@ -31686,7 +31686,7 @@
                   <a:schemeClr val="tx2"/>
                 </a:solidFill>
               </a:rPr>
-              <a:t>Personnel actions drive joiner, mover, leaver by code</a:t>
+              <a:t>Validated personnel-action mappings initiate lifecycle events</a:t>
             </a:r>
             <a:endParaRPr lang="en-US" sz="1400" dirty="0"/>
           </a:p>
@@ -31866,7 +31866,7 @@
                   <a:schemeClr val="tx2"/>
                 </a:solidFill>
               </a:rPr>
-              <a:t>Leavers: block access first, within hours, then clean up</a:t>
+              <a:t>Leavers: block first, within the approved threshold; then reconcile downstream</a:t>
             </a:r>
             <a:endParaRPr lang="en-US" sz="1400" dirty="0"/>
           </a:p>
@@ -31884,7 +31884,7 @@
                   <a:schemeClr val="tx2"/>
                 </a:solidFill>
               </a:rPr>
-              <a:t>Least privilege; no stored secrets</a:t>
+              <a:t>Least privilege; managed identities, secretless where supported</a:t>
             </a:r>
             <a:endParaRPr lang="en-US" sz="1400" dirty="0"/>
           </a:p>
@@ -33675,21 +33675,7 @@
                   <a:srgbClr val="1F2A44"/>
                 </a:solidFill>
               </a:rPr>
-              <a:t>One decision: </a:t>
-            </a:r>
-            <a:pPr indent="0" marL="0">
-              <a:spcAft>
-                <a:spcPts val="500"/>
-              </a:spcAft>
-              <a:buNone/>
-            </a:pPr>
-            <a:r>
-              <a:rPr lang="en-US" sz="1450" dirty="0">
-                <a:solidFill>
-                  <a:schemeClr val="tx2"/>
-                </a:solidFill>
-              </a:rPr>
-              <a:t>start HR-driven identity now, as a design requirement of the HR 2.0 onboarding and the Entra ID migration.</a:t>
+              <a:t>Three decisions:</a:t>
             </a:r>
             <a:endParaRPr lang="en-US" sz="1450" dirty="0"/>
           </a:p>
@@ -33702,12 +33688,12 @@
               <a:buChar char="•"/>
             </a:pPr>
             <a:r>
-              <a:rPr lang="en-US" sz="1400" dirty="0">
+              <a:rPr lang="en-US" sz="1450" dirty="0">
                 <a:solidFill>
                   <a:schemeClr val="tx2"/>
                 </a:solidFill>
               </a:rPr>
-              <a:t>A sponsor across HR, the CIO’s identity team and privacy</a:t>
+              <a:t>Name identity as an HR 2.0 data consumer</a:t>
             </a:r>
             <a:endParaRPr lang="en-US" sz="1450" dirty="0"/>
           </a:p>
@@ -33720,12 +33706,12 @@
               <a:buChar char="•"/>
             </a:pPr>
             <a:r>
-              <a:rPr lang="en-US" sz="1400" dirty="0">
+              <a:rPr lang="en-US" sz="1450" dirty="0">
                 <a:solidFill>
                   <a:schemeClr val="tx2"/>
                 </a:solidFill>
               </a:rPr>
-              <a:t>Identity named as a consumer in the HR 2.0 interconnection plan</a:t>
+              <a:t>Authorize the cross-functional data-governance work: a sponsor across HR, the CIO’s identity team and privacy; data owners; a small pre-onboarding team</a:t>
             </a:r>
             <a:endParaRPr lang="en-US" sz="1450" dirty="0"/>
           </a:p>
@@ -33738,48 +33724,35 @@
               <a:buChar char="•"/>
             </a:pPr>
             <a:r>
-              <a:rPr lang="en-US" sz="1400" dirty="0">
+              <a:rPr lang="en-US" sz="1450" dirty="0">
                 <a:solidFill>
                   <a:schemeClr val="tx2"/>
                 </a:solidFill>
               </a:rPr>
-              <a:t>Data owners designated; the enterprise person key confirmed</a:t>
-            </a:r>
-            <a:endParaRPr lang="en-US" sz="1450" dirty="0"/>
-          </a:p>
-          <a:p>
-            <a:pPr marL="342900" indent="-342900">
+              <a:t>Require assumptions, including the enterprise person key, to be validated by accountable owners before implementation</a:t>
+            </a:r>
+            <a:pPr indent="0" marL="0">
               <a:spcAft>
                 <a:spcPts val="500"/>
               </a:spcAft>
-              <a:buSzPct val="100000"/>
-              <a:buChar char="•"/>
-            </a:pPr>
-            <a:r>
-              <a:rPr lang="en-US" sz="1400" dirty="0">
-                <a:solidFill>
-                  <a:schemeClr val="tx2"/>
-                </a:solidFill>
-              </a:rPr>
-              <a:t>A small team for the pre-onboarding data work</a:t>
-            </a:r>
+              <a:buNone/>
+            </a:pPr>
             <a:endParaRPr lang="en-US" sz="1450" dirty="0"/>
           </a:p>
           <a:p>
-            <a:pPr marL="342900" indent="-342900">
+            <a:pPr indent="0" marL="0">
               <a:spcAft>
                 <a:spcPts val="500"/>
               </a:spcAft>
-              <a:buSzPct val="100000"/>
-              <a:buChar char="•"/>
-            </a:pPr>
-            <a:r>
-              <a:rPr lang="en-US" sz="1400" dirty="0">
-                <a:solidFill>
-                  <a:schemeClr val="tx2"/>
+              <a:buNone/>
+            </a:pPr>
+            <a:r>
+              <a:rPr lang="en-US" sz="1350" i="1" dirty="0">
+                <a:solidFill>
+                  <a:srgbClr val="64748B"/>
                 </a:solidFill>
               </a:rPr>
-              <a:t>Validate planning assumptions and designate authoritative owners before implementation</a:t>
+              <a:t>Modernize the platforms and the lifecycle together, rather than carrying the ticket process forward.</a:t>
             </a:r>
             <a:endParaRPr lang="en-US" sz="1450" dirty="0"/>
           </a:p>

--- a/presentations/hr-driven-identity-interview/HR_Driven_Identity_Exec_AnyAgency.pptx
+++ b/presentations/hr-driven-identity-interview/HR_Driven_Identity_Exec_AnyAgency.pptx
@@ -131,7 +131,7 @@
   <p:extLst>
     <p:ext uri="{521415D9-36F7-43E2-AB2F-B90AF26B5E84}">
       <p14:sectionLst xmlns:p14="http://schemas.microsoft.com/office/powerpoint/2010/main">
-        <p14:section name="The decision" id="{29bba6ff-a62a-c4b0-a92e-d5f7ecddcaca}">
+        <p14:section name="The decision" id="{2b648c62-65b3-63f8-56be-0027093bae9d}">
           <p14:sldIdLst>
             <p14:sldId id="256"/>
             <p14:sldId id="257"/>
@@ -139,7 +139,7 @@
             <p14:sldId id="259"/>
           </p14:sldIdLst>
         </p14:section>
-        <p14:section name="Making it real" id="{afc7e07d-70eb-9310-c51f-44bcfe26f8ef}">
+        <p14:section name="Making it real" id="{581579af-6f35-dace-52cf-4265c9a0e2f5}">
           <p14:sldIdLst>
             <p14:sldId id="260"/>
             <p14:sldId id="261"/>
@@ -148,7 +148,7 @@
             <p14:sldId id="264"/>
           </p14:sldIdLst>
         </p14:section>
-        <p14:section name="Backup" id="{c5283a63-1717-e035-2612-de50c1d3caba}">
+        <p14:section name="Backup" id="{4c68dae4-5df4-5f26-9ec5-e200248d9fb9}">
           <p14:sldIdLst>
             <p14:sldId id="265"/>
             <p14:sldId id="266"/>
@@ -933,7 +933,7 @@
             <a:r>
               <a:rPr lang="en-US" dirty="0"/>
               <a:t>[Backup — for questions]  Why we need HR-driven ICAM at all — and why now.
-Zero Trust is federal strategy — OMB M-22-09, with NIST SP 800-207 as the architecture and CISA's maturity model as the yardstick. SASE is how it's delivered: security enforced at a cloud edge close to the user, which TIC 3.0 opens up for agencies, instead of at our network perimeter. And SASE's decisions are driven by ICAM: the user presents a token from a PIV card or phishing-resistant MFA, and Entra ID decides access through Conditional Access and dynamic groups that read the user's attributes.
+Zero Trust is federal strategy — OMB M-22-09, with NIST SP 800-207 as the architecture and CISA's maturity model as the yardstick. SASE is one way these controls can be delivered near users and cloud resources, which TIC 3.0 opens up for agencies, instead of only at our network perimeter. Reliable ICAM supplies critical identity signals to those decisions: the user presents a token from a PIV card or phishing-resistant MFA, and Entra ID decides access through Conditional Access and dynamic groups that read the user's attributes.
 In the perimeter era, a wrong department meant a wrong phone-book entry. Now it means the wrong groups, and so the wrong access — and a stale status is worse than ever. In the perimeter era an orphaned account was already a standing security violation that could enable a breach. Now it's a valid token for someone who has left, usable from anywhere, because there is no perimeter left to stop it. When access decisions depend on attributes, the accuracy of employee data drives the accuracy of access.
 Workbook: HR-Driven Identity, Chapter 01 — Why the agency needs HR-driven ICAM now; Chapter 08 — The derivation chain.</a:t>
             </a:r>
@@ -1209,7 +1209,7 @@
               <a:rPr lang="en-US" dirty="0"/>
               <a:t>[Backup — for questions]  This is the heart of the proposal, and it's the programmatic data knowledge.
 OPM already defines the personnel data every agency records. Agency and subelement give the legal employer and component. Duty station is the location of record. Series, pay plan and grade give a position category for role-based access. Supervisory status tells us who can approve and review. Tenure and appointment type drive the worker type. And the nature-of-action code, with its effective date, tells us what just happened — next slide.
-Why build on OPM's standard rather than on Oracle's field names? Because OPM defines these elements and their codes the same way for every agency. We map them to Entra ID and AD once, for every employee population — and if the HR vendor ever changes, the mapping still holds.
+Why build on OPM's standard rather than on Oracle's field names? Because OPM standards provide a common federal vocabulary that agencies can map into a shared canonical model. We map them to Entra ID and AD once, for every employee population — and if the HR vendor ever changes, the mapping still holds.
 One honest limit: HRIT covers federal employees only. In the processes I have observed, contractors and vendors are tracked in COR spreadsheets. A contractor authority decision is required, and I propose evaluating three candidate sources: Core HCM's Contingent Worker type — a person record, an assignment and a lifecycle much like an employee's, though with no vendor-management layer; PIV sponsorship; and a contractor suitability register, which ties each contractor to an agency contract with a suitability decision. That's a decision to put in front of the program early.
 (Confirm element names against OPM's current data standards.)
 Workbook: HR-Driven Identity, Chapter 05 — The standard-attribute layer; Contractors and vendors.</a:t>
@@ -1300,7 +1300,7 @@
           <a:p>
             <a:r>
               <a:rPr lang="en-US" dirty="0"/>
-              <a:t>[Backup — for questions]  Personnel actions drive the lifecycle.
+              <a:t>[Backup — for questions]  Personnel actions can initiate the lifecycle, after their identity interpretations and exceptions are approved.
 For federal employees, every personnel action carries a nature-of-action code, and I propose mapping the families to identity events: the 100 series are joiners, the 700 series movers, the 500 series conversions, the 300 series separations. Contractors have no SF-50; their events come from contract start and end dates.
 Two families matter more than people expect. The 400 series — furlough, leave without pay, suspension — is not a leaver; the person is still employed and policy restricts the account. The 200 series, return to duty, lifts those restrictions. Getting this wrong either locks out people on leave or leaves access open for people who've left.
 The codes also settle precedence — a separation wins — and rescinded offers. HR, security, labor-relations, privacy, and personnel-policy owners would validate the mappings, exceptions, precedence rules, and actions before automation.
@@ -1760,7 +1760,7 @@
               <a:t>[Backup — for questions]  ICAM — beyond accounts.
 Credentials: the joiner event schedules PIV enrollment. The leaver event blocks sign-in and revokes sessions first — Microsoft's documented order, and the step that closes certificate sign-in immediately rather than at the next revocation-list refresh — then revokes PIV, derived credentials and device certificates in parallel, reconciled to completion.
 Assurance: record each person's proofing level and authenticator assurance as governed attributes, treat missing proofing evidence as a finding, and enforce phishing-resistant MFA under M-22-09.
-Access: baseline access derived by rule from the standard attributes; privileged eligibility by position, through PIM, never standing; and any activity from a separated person is an alert.
+Access: baseline access derived by rule from the standard attributes; position attributes scoping candidates for privileged eligibility, with explicit approval and PIM still required; and any activity from a separated person is an alert.
 The result: every entitlement has a "because" — a rule, an attribute, and the personnel action that set it.
 Workbook: HR-Driven Identity, Chapter 07 — The canonical leaver sequence; Assurance as data; Chapter 08 — Where dynamic membership stops.</a:t>
             </a:r>
@@ -2035,8 +2035,8 @@
             <a:r>
               <a:rPr lang="en-US" dirty="0"/>
               <a:t>[Backup — for questions]  One standard, shared across agencies.
-Every agency is moving to the same Core HCM on the same OPM data standards. If one agency defines HR-driven ICAM as a standard — crosswalk, canonical model, identifiers and evidence — other agencies can reuse it instead of building their own. And attributes that mean the same thing everywhere make details, transfers, shared services and cross-agency access easier.
-That's the work an enterprise data architect does: working the issues with other agencies and industry, developing options and predicting their impact, and serving as the data expert on interagency committees and working groups. The goal: present this model to our fellow agencies, and adopt it together.
+Participating civilian agencies are moving toward shared Core HCM capabilities and common federal personnel standards. If one agency defines HR-driven ICAM as a standard — crosswalk, canonical model, identifiers and evidence — other agencies can reuse it instead of building their own. And attributes that mean the same thing everywhere make details, transfers, shared services and cross-agency access easier.
+That's the work an enterprise data architect does: working the issues with other agencies and industry, developing options and predicting their impact, and serving as the data expert on interagency committees and working groups. The goal: offer the model for interagency evaluation and reuse.
 Workbook: HR-Driven Identity, Chapter 02 — Federal HR 2.0; Chapter 05 — The standard-attribute layer.</a:t>
             </a:r>
             <a:endParaRPr lang="en-US" dirty="0"/>
@@ -4473,7 +4473,7 @@
                 <a:ea typeface="Cambria" pitchFamily="34" charset="-122"/>
                 <a:cs typeface="Cambria" pitchFamily="34" charset="-120"/>
               </a:rPr>
-              <a:t>HRIT is coming — build identity into it</a:t>
+              <a:t>Use the onboarding window to design HR-driven identity</a:t>
             </a:r>
             <a:endParaRPr lang="en-US" sz="3000" dirty="0"/>
           </a:p>
@@ -4671,7 +4671,7 @@
                   <a:schemeClr val="tx2"/>
                 </a:solidFill>
               </a:rPr>
-              <a:t>Today: no HR-driven identity; accounts come from tickets</a:t>
+              <a:t>Today: lifecycle substantially manual; many changes ticket-dependent</a:t>
             </a:r>
             <a:endParaRPr lang="en-US" sz="1550" dirty="0"/>
           </a:p>
@@ -5442,7 +5442,7 @@
                   <a:srgbClr val="1F2A44"/>
                 </a:solidFill>
               </a:rPr>
-              <a:t>THE DELIVERY</a:t>
+              <a:t>ONE DELIVERY MODEL</a:t>
             </a:r>
             <a:endParaRPr lang="en-US" sz="1400" dirty="0"/>
           </a:p>
@@ -5479,7 +5479,7 @@
                   <a:schemeClr val="tx2"/>
                 </a:solidFill>
               </a:rPr>
-              <a:t>Each request enforced at the cloud edge (TIC 3.0)</a:t>
+              <a:t>Zero Trust controls enforced near users and cloud resources (TIC 3.0)</a:t>
             </a:r>
             <a:endParaRPr lang="en-US" sz="1400" dirty="0"/>
           </a:p>
@@ -5947,7 +5947,7 @@
                           <a:ea typeface="Calibri" pitchFamily="34" charset="-122"/>
                           <a:cs typeface="Calibri" pitchFamily="34" charset="-120"/>
                         </a:rPr>
-                        <a:t>Zero Trust, delivered through SASE</a:t>
+                        <a:t>Zero Trust (for example, through SASE)</a:t>
                       </a:r>
                       <a:endParaRPr lang="en-US" sz="1400" dirty="0">
                         <a:latin typeface="Calibri" charset="0"/>
@@ -6949,7 +6949,7 @@
                   <a:schemeClr val="tx2"/>
                 </a:solidFill>
               </a:rPr>
-              <a:t>Active Directory feeds the agency phone book, but nothing feeds Active Directory from HR. Titles, offices, phone numbers and managers stay wrong until someone files a ticket.</a:t>
+              <a:t>In many agencies, HR changes are not automatically reflected in Active Directory, which feeds the phone book. Titles, offices, phone numbers and managers stay wrong until someone files a ticket.</a:t>
             </a:r>
             <a:endParaRPr lang="en-US" sz="1400" dirty="0"/>
           </a:p>
@@ -9943,7 +9943,7 @@
                   <a:schemeClr val="tx2"/>
                 </a:solidFill>
               </a:rPr>
-              <a:t>OPM defines these elements and codes the same way for every agency. Map them to Entra ID and AD once, and the mapping still works if the HR vendor changes.</a:t>
+              <a:t>OPM standards give a common federal vocabulary that agencies map into a shared canonical model; the mapping holds if the HR vendor changes.</a:t>
             </a:r>
             <a:endParaRPr lang="en-US" sz="1350" dirty="0"/>
           </a:p>
@@ -14794,9 +14794,45 @@
                 <a:ea typeface="Cambria" pitchFamily="34" charset="-122"/>
                 <a:cs typeface="Cambria" pitchFamily="34" charset="-120"/>
               </a:rPr>
-              <a:t>HR → canonical model → Entra ID and AD → ICAM</a:t>
+              <a:t>Proposed physical mapping: HR to Entra ID and AD</a:t>
             </a:r>
             <a:endParaRPr lang="en-US" sz="3000" dirty="0"/>
+          </a:p>
+        </p:txBody>
+      </p:sp>
+      <p:sp>
+        <p:nvSpPr>
+          <p:cNvPr id="3" name="Mapping caveat"/>
+          <p:cNvSpPr txBox="1"/>
+          <p:nvPr/>
+        </p:nvSpPr>
+        <p:spPr>
+          <a:xfrm>
+            <a:off x="548640" y="6144768"/>
+            <a:ext cx="11064240" cy="228600"/>
+          </a:xfrm>
+          <a:prstGeom prst="rect">
+            <a:avLst/>
+          </a:prstGeom>
+          <a:noFill/>
+          <a:ln/>
+        </p:spPr>
+        <p:txBody>
+          <a:bodyPr wrap="square" lIns="0" tIns="0" rIns="0" bIns="0" rtlCol="0" anchor="t"/>
+          <a:lstStyle/>
+          <a:p>
+            <a:pPr indent="0" marL="0">
+              <a:buNone/>
+            </a:pPr>
+            <a:r>
+              <a:rPr lang="en-US" sz="1050" i="1" dirty="0">
+                <a:solidFill>
+                  <a:srgbClr val="64748B"/>
+                </a:solidFill>
+              </a:rPr>
+              <a:t>Target attributes are implementation proposals subject to existing-use inventory, security review and tenant validation.</a:t>
+            </a:r>
+            <a:endParaRPr lang="en-US" sz="1050" dirty="0"/>
           </a:p>
         </p:txBody>
       </p:sp>
@@ -17229,7 +17265,7 @@
       </p:graphicFrame>
       <p:sp>
         <p:nvSpPr>
-          <p:cNvPr id="4" name="Model rule 1"/>
+          <p:cNvPr id="5" name="Model rule 1"/>
           <p:cNvSpPr/>
           <p:nvPr/>
         </p:nvSpPr>
@@ -17263,7 +17299,7 @@
       </p:sp>
       <p:sp>
         <p:nvSpPr>
-          <p:cNvPr id="5" name="Icon FaCubes"/>
+          <p:cNvPr id="6" name="Icon FaCubes"/>
           <p:cNvSpPr/>
           <p:nvPr/>
         </p:nvSpPr>
@@ -17288,7 +17324,7 @@
       </p:sp>
       <p:pic>
         <p:nvPicPr>
-          <p:cNvPr id="6" name="Image 0" descr="C:\Users\whale\git\uiao\inbox\SSA-Interview\build\icons\FaCubes.png">    </p:cNvPr>
+          <p:cNvPr id="7" name="Image 0" descr="C:\Users\whale\git\uiao\inbox\SSA-Interview\build\icons\FaCubes.png">    </p:cNvPr>
           <p:cNvPicPr>
             <a:picLocks noChangeAspect="1"/>
           </p:cNvPicPr>
@@ -17312,7 +17348,7 @@
       </p:pic>
       <p:sp>
         <p:nvSpPr>
-          <p:cNvPr id="7" name="Model rule 1 text"/>
+          <p:cNvPr id="8" name="Model rule 1 text"/>
           <p:cNvSpPr txBox="1"/>
           <p:nvPr/>
         </p:nvSpPr>
@@ -17362,7 +17398,7 @@
       </p:sp>
       <p:sp>
         <p:nvSpPr>
-          <p:cNvPr id="8" name="Model rule 2"/>
+          <p:cNvPr id="9" name="Model rule 2"/>
           <p:cNvSpPr/>
           <p:nvPr/>
         </p:nvSpPr>
@@ -17396,7 +17432,7 @@
       </p:sp>
       <p:sp>
         <p:nvSpPr>
-          <p:cNvPr id="9" name="Icon FaHashtag"/>
+          <p:cNvPr id="10" name="Icon FaHashtag"/>
           <p:cNvSpPr/>
           <p:nvPr/>
         </p:nvSpPr>
@@ -17421,7 +17457,7 @@
       </p:sp>
       <p:pic>
         <p:nvPicPr>
-          <p:cNvPr id="10" name="Image 1" descr="C:\Users\whale\git\uiao\inbox\SSA-Interview\build\icons\FaHashtag.png">    </p:cNvPr>
+          <p:cNvPr id="11" name="Image 1" descr="C:\Users\whale\git\uiao\inbox\SSA-Interview\build\icons\FaHashtag.png">    </p:cNvPr>
           <p:cNvPicPr>
             <a:picLocks noChangeAspect="1"/>
           </p:cNvPicPr>
@@ -17445,7 +17481,7 @@
       </p:pic>
       <p:sp>
         <p:nvSpPr>
-          <p:cNvPr id="11" name="Model rule 2 text"/>
+          <p:cNvPr id="12" name="Model rule 2 text"/>
           <p:cNvSpPr txBox="1"/>
           <p:nvPr/>
         </p:nvSpPr>
@@ -17495,7 +17531,7 @@
       </p:sp>
       <p:sp>
         <p:nvSpPr>
-          <p:cNvPr id="12" name="Model rule 3"/>
+          <p:cNvPr id="13" name="Model rule 3"/>
           <p:cNvSpPr/>
           <p:nvPr/>
         </p:nvSpPr>
@@ -17529,7 +17565,7 @@
       </p:sp>
       <p:sp>
         <p:nvSpPr>
-          <p:cNvPr id="13" name="Icon FaTableList"/>
+          <p:cNvPr id="14" name="Icon FaTableList"/>
           <p:cNvSpPr/>
           <p:nvPr/>
         </p:nvSpPr>
@@ -17554,7 +17590,7 @@
       </p:sp>
       <p:pic>
         <p:nvPicPr>
-          <p:cNvPr id="14" name="Image 2" descr="C:\Users\whale\git\uiao\inbox\SSA-Interview\build\icons\FaTableList.png">    </p:cNvPr>
+          <p:cNvPr id="15" name="Image 2" descr="C:\Users\whale\git\uiao\inbox\SSA-Interview\build\icons\FaTableList.png">    </p:cNvPr>
           <p:cNvPicPr>
             <a:picLocks noChangeAspect="1"/>
           </p:cNvPicPr>
@@ -17578,7 +17614,7 @@
       </p:pic>
       <p:sp>
         <p:nvSpPr>
-          <p:cNvPr id="15" name="Model rule 3 text"/>
+          <p:cNvPr id="16" name="Model rule 3 text"/>
           <p:cNvSpPr txBox="1"/>
           <p:nvPr/>
         </p:nvSpPr>
@@ -20957,7 +20993,7 @@
                   <a:schemeClr val="tx2"/>
                 </a:solidFill>
               </a:rPr>
-              <a:t>Privileged eligibility by position, through PIM — never standing</a:t>
+              <a:t>Position scopes candidates for privileged eligibility; explicit approval and PIM still required</a:t>
             </a:r>
             <a:endParaRPr lang="en-US" sz="1550" dirty="0"/>
           </a:p>
@@ -23186,7 +23222,7 @@
                 <a:ea typeface="Cambria" pitchFamily="34" charset="-122"/>
                 <a:cs typeface="Cambria" pitchFamily="34" charset="-120"/>
               </a:rPr>
-              <a:t>One standard for HR-driven ICAM, shared across agencies</a:t>
+              <a:t>A reusable HR-driven ICAM model for interagency evaluation</a:t>
             </a:r>
             <a:endParaRPr lang="en-US" sz="3000" dirty="0"/>
           </a:p>
@@ -23344,7 +23380,7 @@
                   <a:srgbClr val="1F2A44"/>
                 </a:solidFill>
               </a:rPr>
-              <a:t>Same platform, same standards</a:t>
+              <a:t>Shared platform, common standards</a:t>
             </a:r>
             <a:endParaRPr lang="en-US" sz="1400" dirty="0"/>
           </a:p>
@@ -23361,7 +23397,7 @@
                   <a:schemeClr val="tx2"/>
                 </a:solidFill>
               </a:rPr>
-              <a:t>Every agency moves to Core HCM on OPM’s data standards — one crosswalk and canonical model, reused rather than rebuilt</a:t>
+              <a:t>Participating civilian agencies move toward shared Core HCM capabilities and OPM’s data standards — a crosswalk and canonical model others can evaluate and reuse</a:t>
             </a:r>
             <a:endParaRPr lang="en-US" sz="1400" dirty="0"/>
           </a:p>
@@ -24037,7 +24073,7 @@
                   <a:schemeClr val="tx2"/>
                 </a:solidFill>
               </a:rPr>
-              <a:t>present this model to our fellow agencies, and adopt one HR-driven ICAM standard together as each agency onboards to HR 2.0.</a:t>
+              <a:t>offer the model for interagency evaluation and reuse as participating agencies onboard to HR 2.0.</a:t>
             </a:r>
             <a:endParaRPr lang="en-US" sz="1700" dirty="0"/>
           </a:p>

--- a/presentations/hr-driven-identity-interview/HR_Driven_Identity_Exec_AnyAgency.pptx
+++ b/presentations/hr-driven-identity-interview/HR_Driven_Identity_Exec_AnyAgency.pptx
@@ -3687,7 +3687,7 @@
                   <a:srgbClr val="1F2A44"/>
                 </a:solidFill>
               </a:rPr>
-              <a:t>Mike Stratton</a:t>
+              <a:t>Michael F. Stratton</a:t>
             </a:r>
             <a:endParaRPr lang="en-US" sz="1600" dirty="0"/>
           </a:p>
@@ -3898,7 +3898,7 @@
         <a:graphic>
           <a:graphicData uri="http://schemas.openxmlformats.org/drawingml/2006/table">
             <a:tbl>
-              <a:tblPr/>
+              <a:tblPr firstRow="1" bandRow="1"/>
               <a:tblGrid>
                 <a:gridCol w="4206240"/>
                 <a:gridCol w="6903720"/>
@@ -4481,7 +4481,13 @@
       </p:sp>
       <p:sp>
         <p:nvSpPr>
-          <p:cNvPr id="3" name="Two migrations, regardless card"/>
+          <p:cNvPr id="3" name="Two migrations, regardless card" descr="">
+            <a:extLst>
+              <a:ext uri="{C183D7F6-B498-43B3-948B-1728B52AA6E4}">
+                <adec:decorative xmlns:adec="http://schemas.microsoft.com/office/drawing/2017/decorative" val="1"/>
+              </a:ext>
+            </a:extLst>
+          </p:cNvPr>
           <p:cNvSpPr/>
           <p:nvPr/>
         </p:nvSpPr>
@@ -4515,7 +4521,13 @@
       </p:sp>
       <p:sp>
         <p:nvSpPr>
-          <p:cNvPr id="4" name="Icon FaArrowsRotate"/>
+          <p:cNvPr id="4" name="Icon FaArrowsRotate" descr="">
+            <a:extLst>
+              <a:ext uri="{C183D7F6-B498-43B3-948B-1728B52AA6E4}">
+                <adec:decorative xmlns:adec="http://schemas.microsoft.com/office/drawing/2017/decorative" val="1"/>
+              </a:ext>
+            </a:extLst>
+          </p:cNvPr>
           <p:cNvSpPr/>
           <p:nvPr/>
         </p:nvSpPr>
@@ -4540,7 +4552,13 @@
       </p:sp>
       <p:pic>
         <p:nvPicPr>
-          <p:cNvPr id="5" name="Image 0" descr="C:\Users\whale\git\uiao\inbox\SSA-Interview\build\icons\FaArrowsRotate.png">    </p:cNvPr>
+          <p:cNvPr id="5" name="Image 0" descr="">
+            <a:extLst>
+              <a:ext uri="{C183D7F6-B498-43B3-948B-1728B52AA6E4}">
+                <adec:decorative xmlns:adec="http://schemas.microsoft.com/office/drawing/2017/decorative" val="1"/>
+              </a:ext>
+            </a:extLst>
+          </p:cNvPr>
           <p:cNvPicPr>
             <a:picLocks noChangeAspect="1"/>
           </p:cNvPicPr>
@@ -4679,7 +4697,13 @@
       </p:sp>
       <p:sp>
         <p:nvSpPr>
-          <p:cNvPr id="8" name="The agency’s call card"/>
+          <p:cNvPr id="8" name="The agency’s call card" descr="">
+            <a:extLst>
+              <a:ext uri="{C183D7F6-B498-43B3-948B-1728B52AA6E4}">
+                <adec:decorative xmlns:adec="http://schemas.microsoft.com/office/drawing/2017/decorative" val="1"/>
+              </a:ext>
+            </a:extLst>
+          </p:cNvPr>
           <p:cNvSpPr/>
           <p:nvPr/>
         </p:nvSpPr>
@@ -4713,7 +4737,13 @@
       </p:sp>
       <p:sp>
         <p:nvSpPr>
-          <p:cNvPr id="9" name="Icon FaLandmark"/>
+          <p:cNvPr id="9" name="Icon FaLandmark" descr="">
+            <a:extLst>
+              <a:ext uri="{C183D7F6-B498-43B3-948B-1728B52AA6E4}">
+                <adec:decorative xmlns:adec="http://schemas.microsoft.com/office/drawing/2017/decorative" val="1"/>
+              </a:ext>
+            </a:extLst>
+          </p:cNvPr>
           <p:cNvSpPr/>
           <p:nvPr/>
         </p:nvSpPr>
@@ -4738,7 +4768,13 @@
       </p:sp>
       <p:pic>
         <p:nvPicPr>
-          <p:cNvPr id="10" name="Image 1" descr="C:\Users\whale\git\uiao\inbox\SSA-Interview\build\icons\FaLandmark.png">    </p:cNvPr>
+          <p:cNvPr id="10" name="Image 1" descr="">
+            <a:extLst>
+              <a:ext uri="{C183D7F6-B498-43B3-948B-1728B52AA6E4}">
+                <adec:decorative xmlns:adec="http://schemas.microsoft.com/office/drawing/2017/decorative" val="1"/>
+              </a:ext>
+            </a:extLst>
+          </p:cNvPr>
           <p:cNvPicPr>
             <a:picLocks noChangeAspect="1"/>
           </p:cNvPicPr>
@@ -4877,7 +4913,13 @@
       </p:sp>
       <p:sp>
         <p:nvSpPr>
-          <p:cNvPr id="13" name="The proposal card"/>
+          <p:cNvPr id="13" name="The proposal card" descr="">
+            <a:extLst>
+              <a:ext uri="{C183D7F6-B498-43B3-948B-1728B52AA6E4}">
+                <adec:decorative xmlns:adec="http://schemas.microsoft.com/office/drawing/2017/decorative" val="1"/>
+              </a:ext>
+            </a:extLst>
+          </p:cNvPr>
           <p:cNvSpPr/>
           <p:nvPr/>
         </p:nvSpPr>
@@ -4911,7 +4953,13 @@
       </p:sp>
       <p:sp>
         <p:nvSpPr>
-          <p:cNvPr id="14" name="Icon FaLightbulb"/>
+          <p:cNvPr id="14" name="Icon FaLightbulb" descr="">
+            <a:extLst>
+              <a:ext uri="{C183D7F6-B498-43B3-948B-1728B52AA6E4}">
+                <adec:decorative xmlns:adec="http://schemas.microsoft.com/office/drawing/2017/decorative" val="1"/>
+              </a:ext>
+            </a:extLst>
+          </p:cNvPr>
           <p:cNvSpPr/>
           <p:nvPr/>
         </p:nvSpPr>
@@ -4936,7 +4984,13 @@
       </p:sp>
       <p:pic>
         <p:nvPicPr>
-          <p:cNvPr id="15" name="Image 2" descr="C:\Users\whale\git\uiao\inbox\SSA-Interview\build\icons\FaLightbulb.png">    </p:cNvPr>
+          <p:cNvPr id="15" name="Image 2" descr="">
+            <a:extLst>
+              <a:ext uri="{C183D7F6-B498-43B3-948B-1728B52AA6E4}">
+                <adec:decorative xmlns:adec="http://schemas.microsoft.com/office/drawing/2017/decorative" val="1"/>
+              </a:ext>
+            </a:extLst>
+          </p:cNvPr>
           <p:cNvPicPr>
             <a:picLocks noChangeAspect="1"/>
           </p:cNvPicPr>
@@ -5075,7 +5129,13 @@
       </p:sp>
       <p:sp>
         <p:nvSpPr>
-          <p:cNvPr id="18" name="Choice"/>
+          <p:cNvPr id="18" name="Choice" descr="">
+            <a:extLst>
+              <a:ext uri="{C183D7F6-B498-43B3-948B-1728B52AA6E4}">
+                <adec:decorative xmlns:adec="http://schemas.microsoft.com/office/drawing/2017/decorative" val="1"/>
+              </a:ext>
+            </a:extLst>
+          </p:cNvPr>
           <p:cNvSpPr/>
           <p:nvPr/>
         </p:nvSpPr>
@@ -5267,7 +5327,13 @@
       </p:sp>
       <p:sp>
         <p:nvSpPr>
-          <p:cNvPr id="3" name="Chain 1"/>
+          <p:cNvPr id="3" name="Chain 1" descr="">
+            <a:extLst>
+              <a:ext uri="{C183D7F6-B498-43B3-948B-1728B52AA6E4}">
+                <adec:decorative xmlns:adec="http://schemas.microsoft.com/office/drawing/2017/decorative" val="1"/>
+              </a:ext>
+            </a:extLst>
+          </p:cNvPr>
           <p:cNvSpPr/>
           <p:nvPr/>
         </p:nvSpPr>
@@ -5377,7 +5443,13 @@
       </p:sp>
       <p:sp>
         <p:nvSpPr>
-          <p:cNvPr id="5" name="Chain 2"/>
+          <p:cNvPr id="5" name="Chain 2" descr="">
+            <a:extLst>
+              <a:ext uri="{C183D7F6-B498-43B3-948B-1728B52AA6E4}">
+                <adec:decorative xmlns:adec="http://schemas.microsoft.com/office/drawing/2017/decorative" val="1"/>
+              </a:ext>
+            </a:extLst>
+          </p:cNvPr>
           <p:cNvSpPr/>
           <p:nvPr/>
         </p:nvSpPr>
@@ -5487,7 +5559,13 @@
       </p:sp>
       <p:sp>
         <p:nvSpPr>
-          <p:cNvPr id="7" name="Chain 3"/>
+          <p:cNvPr id="7" name="Chain 3" descr="">
+            <a:extLst>
+              <a:ext uri="{C183D7F6-B498-43B3-948B-1728B52AA6E4}">
+                <adec:decorative xmlns:adec="http://schemas.microsoft.com/office/drawing/2017/decorative" val="1"/>
+              </a:ext>
+            </a:extLst>
+          </p:cNvPr>
           <p:cNvSpPr/>
           <p:nvPr/>
         </p:nvSpPr>
@@ -5597,7 +5675,13 @@
       </p:sp>
       <p:sp>
         <p:nvSpPr>
-          <p:cNvPr id="9" name="Chain 4"/>
+          <p:cNvPr id="9" name="Chain 4" descr="">
+            <a:extLst>
+              <a:ext uri="{C183D7F6-B498-43B3-948B-1728B52AA6E4}">
+                <adec:decorative xmlns:adec="http://schemas.microsoft.com/office/drawing/2017/decorative" val="1"/>
+              </a:ext>
+            </a:extLst>
+          </p:cNvPr>
           <p:cNvSpPr/>
           <p:nvPr/>
         </p:nvSpPr>
@@ -5707,7 +5791,13 @@
       </p:sp>
       <p:sp>
         <p:nvSpPr>
-          <p:cNvPr id="11" name="Shape 9"/>
+          <p:cNvPr id="11" name="Shape 9" descr="">
+            <a:extLst>
+              <a:ext uri="{C183D7F6-B498-43B3-948B-1728B52AA6E4}">
+                <adec:decorative xmlns:adec="http://schemas.microsoft.com/office/drawing/2017/decorative" val="1"/>
+              </a:ext>
+            </a:extLst>
+          </p:cNvPr>
           <p:cNvSpPr/>
           <p:nvPr/>
         </p:nvSpPr>
@@ -5731,7 +5821,13 @@
       </p:sp>
       <p:sp>
         <p:nvSpPr>
-          <p:cNvPr id="12" name="Shape 10"/>
+          <p:cNvPr id="12" name="Shape 10" descr="">
+            <a:extLst>
+              <a:ext uri="{C183D7F6-B498-43B3-948B-1728B52AA6E4}">
+                <adec:decorative xmlns:adec="http://schemas.microsoft.com/office/drawing/2017/decorative" val="1"/>
+              </a:ext>
+            </a:extLst>
+          </p:cNvPr>
           <p:cNvSpPr/>
           <p:nvPr/>
         </p:nvSpPr>
@@ -5755,7 +5851,13 @@
       </p:sp>
       <p:sp>
         <p:nvSpPr>
-          <p:cNvPr id="13" name="Shape 11"/>
+          <p:cNvPr id="13" name="Shape 11" descr="">
+            <a:extLst>
+              <a:ext uri="{C183D7F6-B498-43B3-948B-1728B52AA6E4}">
+                <adec:decorative xmlns:adec="http://schemas.microsoft.com/office/drawing/2017/decorative" val="1"/>
+              </a:ext>
+            </a:extLst>
+          </p:cNvPr>
           <p:cNvSpPr/>
           <p:nvPr/>
         </p:nvSpPr>
@@ -5798,7 +5900,7 @@
         <a:graphic>
           <a:graphicData uri="http://schemas.openxmlformats.org/drawingml/2006/table">
             <a:tbl>
-              <a:tblPr/>
+              <a:tblPr firstRow="1" bandRow="1"/>
               <a:tblGrid>
                 <a:gridCol w="2377440"/>
                 <a:gridCol w="3840480"/>
@@ -6623,7 +6725,13 @@
       </p:graphicFrame>
       <p:sp>
         <p:nvSpPr>
-          <p:cNvPr id="15" name="Takeaway"/>
+          <p:cNvPr id="15" name="Takeaway" descr="">
+            <a:extLst>
+              <a:ext uri="{C183D7F6-B498-43B3-948B-1728B52AA6E4}">
+                <adec:decorative xmlns:adec="http://schemas.microsoft.com/office/drawing/2017/decorative" val="1"/>
+              </a:ext>
+            </a:extLst>
+          </p:cNvPr>
           <p:cNvSpPr/>
           <p:nvPr/>
         </p:nvSpPr>
@@ -6815,7 +6923,13 @@
       </p:sp>
       <p:sp>
         <p:nvSpPr>
-          <p:cNvPr id="3" name="Story 1"/>
+          <p:cNvPr id="3" name="Story 1" descr="">
+            <a:extLst>
+              <a:ext uri="{C183D7F6-B498-43B3-948B-1728B52AA6E4}">
+                <adec:decorative xmlns:adec="http://schemas.microsoft.com/office/drawing/2017/decorative" val="1"/>
+              </a:ext>
+            </a:extLst>
+          </p:cNvPr>
           <p:cNvSpPr/>
           <p:nvPr/>
         </p:nvSpPr>
@@ -6849,7 +6963,13 @@
       </p:sp>
       <p:sp>
         <p:nvSpPr>
-          <p:cNvPr id="4" name="Icon FaAddressBook"/>
+          <p:cNvPr id="4" name="Icon FaAddressBook" descr="">
+            <a:extLst>
+              <a:ext uri="{C183D7F6-B498-43B3-948B-1728B52AA6E4}">
+                <adec:decorative xmlns:adec="http://schemas.microsoft.com/office/drawing/2017/decorative" val="1"/>
+              </a:ext>
+            </a:extLst>
+          </p:cNvPr>
           <p:cNvSpPr/>
           <p:nvPr/>
         </p:nvSpPr>
@@ -6874,7 +6994,13 @@
       </p:sp>
       <p:pic>
         <p:nvPicPr>
-          <p:cNvPr id="5" name="Image 0" descr="C:\Users\whale\git\uiao\inbox\SSA-Interview\build\icons\FaAddressBook.png">    </p:cNvPr>
+          <p:cNvPr id="5" name="Image 0" descr="">
+            <a:extLst>
+              <a:ext uri="{C183D7F6-B498-43B3-948B-1728B52AA6E4}">
+                <adec:decorative xmlns:adec="http://schemas.microsoft.com/office/drawing/2017/decorative" val="1"/>
+              </a:ext>
+            </a:extLst>
+          </p:cNvPr>
           <p:cNvPicPr>
             <a:picLocks noChangeAspect="1"/>
           </p:cNvPicPr>
@@ -6957,7 +7083,13 @@
       </p:sp>
       <p:sp>
         <p:nvSpPr>
-          <p:cNvPr id="7" name="Story 2"/>
+          <p:cNvPr id="7" name="Story 2" descr="">
+            <a:extLst>
+              <a:ext uri="{C183D7F6-B498-43B3-948B-1728B52AA6E4}">
+                <adec:decorative xmlns:adec="http://schemas.microsoft.com/office/drawing/2017/decorative" val="1"/>
+              </a:ext>
+            </a:extLst>
+          </p:cNvPr>
           <p:cNvSpPr/>
           <p:nvPr/>
         </p:nvSpPr>
@@ -6991,7 +7123,13 @@
       </p:sp>
       <p:sp>
         <p:nvSpPr>
-          <p:cNvPr id="8" name="Icon FaUserTie"/>
+          <p:cNvPr id="8" name="Icon FaUserTie" descr="">
+            <a:extLst>
+              <a:ext uri="{C183D7F6-B498-43B3-948B-1728B52AA6E4}">
+                <adec:decorative xmlns:adec="http://schemas.microsoft.com/office/drawing/2017/decorative" val="1"/>
+              </a:ext>
+            </a:extLst>
+          </p:cNvPr>
           <p:cNvSpPr/>
           <p:nvPr/>
         </p:nvSpPr>
@@ -7016,7 +7154,13 @@
       </p:sp>
       <p:pic>
         <p:nvPicPr>
-          <p:cNvPr id="9" name="Image 1" descr="C:\Users\whale\git\uiao\inbox\SSA-Interview\build\icons\FaUserTie.png">    </p:cNvPr>
+          <p:cNvPr id="9" name="Image 1" descr="">
+            <a:extLst>
+              <a:ext uri="{C183D7F6-B498-43B3-948B-1728B52AA6E4}">
+                <adec:decorative xmlns:adec="http://schemas.microsoft.com/office/drawing/2017/decorative" val="1"/>
+              </a:ext>
+            </a:extLst>
+          </p:cNvPr>
           <p:cNvPicPr>
             <a:picLocks noChangeAspect="1"/>
           </p:cNvPicPr>
@@ -7099,7 +7243,13 @@
       </p:sp>
       <p:sp>
         <p:nvSpPr>
-          <p:cNvPr id="11" name="HR-driven panel"/>
+          <p:cNvPr id="11" name="HR-driven panel" descr="">
+            <a:extLst>
+              <a:ext uri="{C183D7F6-B498-43B3-948B-1728B52AA6E4}">
+                <adec:decorative xmlns:adec="http://schemas.microsoft.com/office/drawing/2017/decorative" val="1"/>
+              </a:ext>
+            </a:extLst>
+          </p:cNvPr>
           <p:cNvSpPr/>
           <p:nvPr/>
         </p:nvSpPr>
@@ -7133,7 +7283,13 @@
       </p:sp>
       <p:sp>
         <p:nvSpPr>
-          <p:cNvPr id="12" name="Icon FaRightLeft"/>
+          <p:cNvPr id="12" name="Icon FaRightLeft" descr="">
+            <a:extLst>
+              <a:ext uri="{C183D7F6-B498-43B3-948B-1728B52AA6E4}">
+                <adec:decorative xmlns:adec="http://schemas.microsoft.com/office/drawing/2017/decorative" val="1"/>
+              </a:ext>
+            </a:extLst>
+          </p:cNvPr>
           <p:cNvSpPr/>
           <p:nvPr/>
         </p:nvSpPr>
@@ -7158,7 +7314,13 @@
       </p:sp>
       <p:pic>
         <p:nvPicPr>
-          <p:cNvPr id="13" name="Image 2" descr="C:\Users\whale\git\uiao\inbox\SSA-Interview\build\icons\FaRightLeft.png">    </p:cNvPr>
+          <p:cNvPr id="13" name="Image 2" descr="">
+            <a:extLst>
+              <a:ext uri="{C183D7F6-B498-43B3-948B-1728B52AA6E4}">
+                <adec:decorative xmlns:adec="http://schemas.microsoft.com/office/drawing/2017/decorative" val="1"/>
+              </a:ext>
+            </a:extLst>
+          </p:cNvPr>
           <p:cNvPicPr>
             <a:picLocks noChangeAspect="1"/>
           </p:cNvPicPr>
@@ -7221,7 +7383,13 @@
       </p:sp>
       <p:sp>
         <p:nvSpPr>
-          <p:cNvPr id="15" name="Step 1 badge"/>
+          <p:cNvPr id="15" name="Step 1 badge" descr="">
+            <a:extLst>
+              <a:ext uri="{C183D7F6-B498-43B3-948B-1728B52AA6E4}">
+                <adec:decorative xmlns:adec="http://schemas.microsoft.com/office/drawing/2017/decorative" val="1"/>
+              </a:ext>
+            </a:extLst>
+          </p:cNvPr>
           <p:cNvSpPr/>
           <p:nvPr/>
         </p:nvSpPr>
@@ -7318,7 +7486,13 @@
       </p:sp>
       <p:sp>
         <p:nvSpPr>
-          <p:cNvPr id="18" name="Shape 13"/>
+          <p:cNvPr id="18" name="Shape 13" descr="">
+            <a:extLst>
+              <a:ext uri="{C183D7F6-B498-43B3-948B-1728B52AA6E4}">
+                <adec:decorative xmlns:adec="http://schemas.microsoft.com/office/drawing/2017/decorative" val="1"/>
+              </a:ext>
+            </a:extLst>
+          </p:cNvPr>
           <p:cNvSpPr/>
           <p:nvPr/>
         </p:nvSpPr>
@@ -7342,7 +7516,13 @@
       </p:sp>
       <p:sp>
         <p:nvSpPr>
-          <p:cNvPr id="19" name="Step 2 badge"/>
+          <p:cNvPr id="19" name="Step 2 badge" descr="">
+            <a:extLst>
+              <a:ext uri="{C183D7F6-B498-43B3-948B-1728B52AA6E4}">
+                <adec:decorative xmlns:adec="http://schemas.microsoft.com/office/drawing/2017/decorative" val="1"/>
+              </a:ext>
+            </a:extLst>
+          </p:cNvPr>
           <p:cNvSpPr/>
           <p:nvPr/>
         </p:nvSpPr>
@@ -7439,7 +7619,13 @@
       </p:sp>
       <p:sp>
         <p:nvSpPr>
-          <p:cNvPr id="22" name="Shape 17"/>
+          <p:cNvPr id="22" name="Shape 17" descr="">
+            <a:extLst>
+              <a:ext uri="{C183D7F6-B498-43B3-948B-1728B52AA6E4}">
+                <adec:decorative xmlns:adec="http://schemas.microsoft.com/office/drawing/2017/decorative" val="1"/>
+              </a:ext>
+            </a:extLst>
+          </p:cNvPr>
           <p:cNvSpPr/>
           <p:nvPr/>
         </p:nvSpPr>
@@ -7463,7 +7649,13 @@
       </p:sp>
       <p:sp>
         <p:nvSpPr>
-          <p:cNvPr id="23" name="Step 3 badge"/>
+          <p:cNvPr id="23" name="Step 3 badge" descr="">
+            <a:extLst>
+              <a:ext uri="{C183D7F6-B498-43B3-948B-1728B52AA6E4}">
+                <adec:decorative xmlns:adec="http://schemas.microsoft.com/office/drawing/2017/decorative" val="1"/>
+              </a:ext>
+            </a:extLst>
+          </p:cNvPr>
           <p:cNvSpPr/>
           <p:nvPr/>
         </p:nvSpPr>
@@ -7671,7 +7863,13 @@
       </p:sp>
       <p:sp>
         <p:nvSpPr>
-          <p:cNvPr id="3" name="Shape 1"/>
+          <p:cNvPr id="3" name="Shape 1" descr="">
+            <a:extLst>
+              <a:ext uri="{C183D7F6-B498-43B3-948B-1728B52AA6E4}">
+                <adec:decorative xmlns:adec="http://schemas.microsoft.com/office/drawing/2017/decorative" val="1"/>
+              </a:ext>
+            </a:extLst>
+          </p:cNvPr>
           <p:cNvSpPr/>
           <p:nvPr/>
         </p:nvSpPr>
@@ -7694,7 +7892,13 @@
       </p:sp>
       <p:sp>
         <p:nvSpPr>
-          <p:cNvPr id="4" name="Milestone dot 1"/>
+          <p:cNvPr id="4" name="Milestone dot 1" descr="">
+            <a:extLst>
+              <a:ext uri="{C183D7F6-B498-43B3-948B-1728B52AA6E4}">
+                <adec:decorative xmlns:adec="http://schemas.microsoft.com/office/drawing/2017/decorative" val="1"/>
+              </a:ext>
+            </a:extLst>
+          </p:cNvPr>
           <p:cNvSpPr/>
           <p:nvPr/>
         </p:nvSpPr>
@@ -7808,7 +8012,13 @@
       </p:sp>
       <p:sp>
         <p:nvSpPr>
-          <p:cNvPr id="7" name="Milestone dot 2"/>
+          <p:cNvPr id="7" name="Milestone dot 2" descr="">
+            <a:extLst>
+              <a:ext uri="{C183D7F6-B498-43B3-948B-1728B52AA6E4}">
+                <adec:decorative xmlns:adec="http://schemas.microsoft.com/office/drawing/2017/decorative" val="1"/>
+              </a:ext>
+            </a:extLst>
+          </p:cNvPr>
           <p:cNvSpPr/>
           <p:nvPr/>
         </p:nvSpPr>
@@ -7922,7 +8132,13 @@
       </p:sp>
       <p:sp>
         <p:nvSpPr>
-          <p:cNvPr id="10" name="Milestone dot 3"/>
+          <p:cNvPr id="10" name="Milestone dot 3" descr="">
+            <a:extLst>
+              <a:ext uri="{C183D7F6-B498-43B3-948B-1728B52AA6E4}">
+                <adec:decorative xmlns:adec="http://schemas.microsoft.com/office/drawing/2017/decorative" val="1"/>
+              </a:ext>
+            </a:extLst>
+          </p:cNvPr>
           <p:cNvSpPr/>
           <p:nvPr/>
         </p:nvSpPr>
@@ -8036,7 +8252,13 @@
       </p:sp>
       <p:sp>
         <p:nvSpPr>
-          <p:cNvPr id="13" name="Milestone dot 4"/>
+          <p:cNvPr id="13" name="Milestone dot 4" descr="">
+            <a:extLst>
+              <a:ext uri="{C183D7F6-B498-43B3-948B-1728B52AA6E4}">
+                <adec:decorative xmlns:adec="http://schemas.microsoft.com/office/drawing/2017/decorative" val="1"/>
+              </a:ext>
+            </a:extLst>
+          </p:cNvPr>
           <p:cNvSpPr/>
           <p:nvPr/>
         </p:nvSpPr>
@@ -8150,7 +8372,13 @@
       </p:sp>
       <p:sp>
         <p:nvSpPr>
-          <p:cNvPr id="16" name="Milestone dot 5"/>
+          <p:cNvPr id="16" name="Milestone dot 5" descr="">
+            <a:extLst>
+              <a:ext uri="{C183D7F6-B498-43B3-948B-1728B52AA6E4}">
+                <adec:decorative xmlns:adec="http://schemas.microsoft.com/office/drawing/2017/decorative" val="1"/>
+              </a:ext>
+            </a:extLst>
+          </p:cNvPr>
           <p:cNvSpPr/>
           <p:nvPr/>
         </p:nvSpPr>
@@ -8264,7 +8492,13 @@
       </p:sp>
       <p:sp>
         <p:nvSpPr>
-          <p:cNvPr id="19" name="Window 1"/>
+          <p:cNvPr id="19" name="Window 1" descr="">
+            <a:extLst>
+              <a:ext uri="{C183D7F6-B498-43B3-948B-1728B52AA6E4}">
+                <adec:decorative xmlns:adec="http://schemas.microsoft.com/office/drawing/2017/decorative" val="1"/>
+              </a:ext>
+            </a:extLst>
+          </p:cNvPr>
           <p:cNvSpPr/>
           <p:nvPr/>
         </p:nvSpPr>
@@ -8298,7 +8532,13 @@
       </p:sp>
       <p:sp>
         <p:nvSpPr>
-          <p:cNvPr id="20" name="Icon FaDoorOpen"/>
+          <p:cNvPr id="20" name="Icon FaDoorOpen" descr="">
+            <a:extLst>
+              <a:ext uri="{C183D7F6-B498-43B3-948B-1728B52AA6E4}">
+                <adec:decorative xmlns:adec="http://schemas.microsoft.com/office/drawing/2017/decorative" val="1"/>
+              </a:ext>
+            </a:extLst>
+          </p:cNvPr>
           <p:cNvSpPr/>
           <p:nvPr/>
         </p:nvSpPr>
@@ -8323,7 +8563,13 @@
       </p:sp>
       <p:pic>
         <p:nvPicPr>
-          <p:cNvPr id="21" name="Image 0" descr="C:\Users\whale\git\uiao\inbox\SSA-Interview\build\icons\FaDoorOpen.png">    </p:cNvPr>
+          <p:cNvPr id="21" name="Image 0" descr="">
+            <a:extLst>
+              <a:ext uri="{C183D7F6-B498-43B3-948B-1728B52AA6E4}">
+                <adec:decorative xmlns:adec="http://schemas.microsoft.com/office/drawing/2017/decorative" val="1"/>
+              </a:ext>
+            </a:extLst>
+          </p:cNvPr>
           <p:cNvPicPr>
             <a:picLocks noChangeAspect="1"/>
           </p:cNvPicPr>
@@ -8406,7 +8652,13 @@
       </p:sp>
       <p:sp>
         <p:nvSpPr>
-          <p:cNvPr id="23" name="Window 2"/>
+          <p:cNvPr id="23" name="Window 2" descr="">
+            <a:extLst>
+              <a:ext uri="{C183D7F6-B498-43B3-948B-1728B52AA6E4}">
+                <adec:decorative xmlns:adec="http://schemas.microsoft.com/office/drawing/2017/decorative" val="1"/>
+              </a:ext>
+            </a:extLst>
+          </p:cNvPr>
           <p:cNvSpPr/>
           <p:nvPr/>
         </p:nvSpPr>
@@ -8440,7 +8692,13 @@
       </p:sp>
       <p:sp>
         <p:nvSpPr>
-          <p:cNvPr id="24" name="Icon FaDoorClosed"/>
+          <p:cNvPr id="24" name="Icon FaDoorClosed" descr="">
+            <a:extLst>
+              <a:ext uri="{C183D7F6-B498-43B3-948B-1728B52AA6E4}">
+                <adec:decorative xmlns:adec="http://schemas.microsoft.com/office/drawing/2017/decorative" val="1"/>
+              </a:ext>
+            </a:extLst>
+          </p:cNvPr>
           <p:cNvSpPr/>
           <p:nvPr/>
         </p:nvSpPr>
@@ -8465,7 +8723,13 @@
       </p:sp>
       <p:pic>
         <p:nvPicPr>
-          <p:cNvPr id="25" name="Image 1" descr="C:\Users\whale\git\uiao\inbox\SSA-Interview\build\icons\FaDoorClosed.png">    </p:cNvPr>
+          <p:cNvPr id="25" name="Image 1" descr="">
+            <a:extLst>
+              <a:ext uri="{C183D7F6-B498-43B3-948B-1728B52AA6E4}">
+                <adec:decorative xmlns:adec="http://schemas.microsoft.com/office/drawing/2017/decorative" val="1"/>
+              </a:ext>
+            </a:extLst>
+          </p:cNvPr>
           <p:cNvPicPr>
             <a:picLocks noChangeAspect="1"/>
           </p:cNvPicPr>
@@ -8678,7 +8942,7 @@
         <a:graphic>
           <a:graphicData uri="http://schemas.openxmlformats.org/drawingml/2006/table">
             <a:tbl>
-              <a:tblPr/>
+              <a:tblPr firstRow="1" bandRow="1"/>
               <a:tblGrid>
                 <a:gridCol w="3566160"/>
                 <a:gridCol w="4206240"/>
@@ -9793,7 +10057,13 @@
       </p:graphicFrame>
       <p:sp>
         <p:nvSpPr>
-          <p:cNvPr id="4" name="Why card"/>
+          <p:cNvPr id="4" name="Why card" descr="">
+            <a:extLst>
+              <a:ext uri="{C183D7F6-B498-43B3-948B-1728B52AA6E4}">
+                <adec:decorative xmlns:adec="http://schemas.microsoft.com/office/drawing/2017/decorative" val="1"/>
+              </a:ext>
+            </a:extLst>
+          </p:cNvPr>
           <p:cNvSpPr/>
           <p:nvPr/>
         </p:nvSpPr>
@@ -9827,7 +10097,13 @@
       </p:sp>
       <p:sp>
         <p:nvSpPr>
-          <p:cNvPr id="5" name="Icon FaBook"/>
+          <p:cNvPr id="5" name="Icon FaBook" descr="">
+            <a:extLst>
+              <a:ext uri="{C183D7F6-B498-43B3-948B-1728B52AA6E4}">
+                <adec:decorative xmlns:adec="http://schemas.microsoft.com/office/drawing/2017/decorative" val="1"/>
+              </a:ext>
+            </a:extLst>
+          </p:cNvPr>
           <p:cNvSpPr/>
           <p:nvPr/>
         </p:nvSpPr>
@@ -9852,7 +10128,13 @@
       </p:sp>
       <p:pic>
         <p:nvPicPr>
-          <p:cNvPr id="6" name="Image 0" descr="C:\Users\whale\git\uiao\inbox\SSA-Interview\build\icons\FaBook.png">    </p:cNvPr>
+          <p:cNvPr id="6" name="Image 0" descr="">
+            <a:extLst>
+              <a:ext uri="{C183D7F6-B498-43B3-948B-1728B52AA6E4}">
+                <adec:decorative xmlns:adec="http://schemas.microsoft.com/office/drawing/2017/decorative" val="1"/>
+              </a:ext>
+            </a:extLst>
+          </p:cNvPr>
           <p:cNvPicPr>
             <a:picLocks noChangeAspect="1"/>
           </p:cNvPicPr>
@@ -9951,7 +10233,13 @@
       </p:sp>
       <p:sp>
         <p:nvSpPr>
-          <p:cNvPr id="9" name="CWK card"/>
+          <p:cNvPr id="9" name="CWK card" descr="">
+            <a:extLst>
+              <a:ext uri="{C183D7F6-B498-43B3-948B-1728B52AA6E4}">
+                <adec:decorative xmlns:adec="http://schemas.microsoft.com/office/drawing/2017/decorative" val="1"/>
+              </a:ext>
+            </a:extLst>
+          </p:cNvPr>
           <p:cNvSpPr/>
           <p:nvPr/>
         </p:nvSpPr>
@@ -9985,7 +10273,13 @@
       </p:sp>
       <p:sp>
         <p:nvSpPr>
-          <p:cNvPr id="10" name="Icon FaPeopleArrows"/>
+          <p:cNvPr id="10" name="Icon FaPeopleArrows" descr="">
+            <a:extLst>
+              <a:ext uri="{C183D7F6-B498-43B3-948B-1728B52AA6E4}">
+                <adec:decorative xmlns:adec="http://schemas.microsoft.com/office/drawing/2017/decorative" val="1"/>
+              </a:ext>
+            </a:extLst>
+          </p:cNvPr>
           <p:cNvSpPr/>
           <p:nvPr/>
         </p:nvSpPr>
@@ -10010,7 +10304,13 @@
       </p:sp>
       <p:pic>
         <p:nvPicPr>
-          <p:cNvPr id="11" name="Image 1" descr="C:\Users\whale\git\uiao\inbox\SSA-Interview\build\icons\FaPeopleArrows.png">    </p:cNvPr>
+          <p:cNvPr id="11" name="Image 1" descr="">
+            <a:extLst>
+              <a:ext uri="{C183D7F6-B498-43B3-948B-1728B52AA6E4}">
+                <adec:decorative xmlns:adec="http://schemas.microsoft.com/office/drawing/2017/decorative" val="1"/>
+              </a:ext>
+            </a:extLst>
+          </p:cNvPr>
           <p:cNvPicPr>
             <a:picLocks noChangeAspect="1"/>
           </p:cNvPicPr>
@@ -10286,7 +10586,7 @@
         <a:graphic>
           <a:graphicData uri="http://schemas.openxmlformats.org/drawingml/2006/table">
             <a:tbl>
-              <a:tblPr/>
+              <a:tblPr firstRow="1" bandRow="1"/>
               <a:tblGrid>
                 <a:gridCol w="2743200"/>
                 <a:gridCol w="1600200"/>
@@ -12217,7 +12517,13 @@
       </p:graphicFrame>
       <p:sp>
         <p:nvSpPr>
-          <p:cNvPr id="4" name="NOA rule 1"/>
+          <p:cNvPr id="4" name="NOA rule 1" descr="">
+            <a:extLst>
+              <a:ext uri="{C183D7F6-B498-43B3-948B-1728B52AA6E4}">
+                <adec:decorative xmlns:adec="http://schemas.microsoft.com/office/drawing/2017/decorative" val="1"/>
+              </a:ext>
+            </a:extLst>
+          </p:cNvPr>
           <p:cNvSpPr/>
           <p:nvPr/>
         </p:nvSpPr>
@@ -12251,7 +12557,13 @@
       </p:sp>
       <p:sp>
         <p:nvSpPr>
-          <p:cNvPr id="5" name="Icon FaUserClock"/>
+          <p:cNvPr id="5" name="Icon FaUserClock" descr="">
+            <a:extLst>
+              <a:ext uri="{C183D7F6-B498-43B3-948B-1728B52AA6E4}">
+                <adec:decorative xmlns:adec="http://schemas.microsoft.com/office/drawing/2017/decorative" val="1"/>
+              </a:ext>
+            </a:extLst>
+          </p:cNvPr>
           <p:cNvSpPr/>
           <p:nvPr/>
         </p:nvSpPr>
@@ -12276,7 +12588,13 @@
       </p:sp>
       <p:pic>
         <p:nvPicPr>
-          <p:cNvPr id="6" name="Image 0" descr="C:\Users\whale\git\uiao\inbox\SSA-Interview\build\icons\FaUserClock.png">    </p:cNvPr>
+          <p:cNvPr id="6" name="Image 0" descr="">
+            <a:extLst>
+              <a:ext uri="{C183D7F6-B498-43B3-948B-1728B52AA6E4}">
+                <adec:decorative xmlns:adec="http://schemas.microsoft.com/office/drawing/2017/decorative" val="1"/>
+              </a:ext>
+            </a:extLst>
+          </p:cNvPr>
           <p:cNvPicPr>
             <a:picLocks noChangeAspect="1"/>
           </p:cNvPicPr>
@@ -12347,7 +12665,13 @@
       </p:sp>
       <p:sp>
         <p:nvSpPr>
-          <p:cNvPr id="8" name="NOA rule 2"/>
+          <p:cNvPr id="8" name="NOA rule 2" descr="">
+            <a:extLst>
+              <a:ext uri="{C183D7F6-B498-43B3-948B-1728B52AA6E4}">
+                <adec:decorative xmlns:adec="http://schemas.microsoft.com/office/drawing/2017/decorative" val="1"/>
+              </a:ext>
+            </a:extLst>
+          </p:cNvPr>
           <p:cNvSpPr/>
           <p:nvPr/>
         </p:nvSpPr>
@@ -12381,7 +12705,13 @@
       </p:sp>
       <p:sp>
         <p:nvSpPr>
-          <p:cNvPr id="9" name="Icon FaArrowDownWideShort"/>
+          <p:cNvPr id="9" name="Icon FaArrowDownWideShort" descr="">
+            <a:extLst>
+              <a:ext uri="{C183D7F6-B498-43B3-948B-1728B52AA6E4}">
+                <adec:decorative xmlns:adec="http://schemas.microsoft.com/office/drawing/2017/decorative" val="1"/>
+              </a:ext>
+            </a:extLst>
+          </p:cNvPr>
           <p:cNvSpPr/>
           <p:nvPr/>
         </p:nvSpPr>
@@ -12406,7 +12736,13 @@
       </p:sp>
       <p:pic>
         <p:nvPicPr>
-          <p:cNvPr id="10" name="Image 1" descr="C:\Users\whale\git\uiao\inbox\SSA-Interview\build\icons\FaArrowDownWideShort.png">    </p:cNvPr>
+          <p:cNvPr id="10" name="Image 1" descr="">
+            <a:extLst>
+              <a:ext uri="{C183D7F6-B498-43B3-948B-1728B52AA6E4}">
+                <adec:decorative xmlns:adec="http://schemas.microsoft.com/office/drawing/2017/decorative" val="1"/>
+              </a:ext>
+            </a:extLst>
+          </p:cNvPr>
           <p:cNvPicPr>
             <a:picLocks noChangeAspect="1"/>
           </p:cNvPicPr>
@@ -12477,7 +12813,13 @@
       </p:sp>
       <p:sp>
         <p:nvSpPr>
-          <p:cNvPr id="12" name="NOA rule 3"/>
+          <p:cNvPr id="12" name="NOA rule 3" descr="">
+            <a:extLst>
+              <a:ext uri="{C183D7F6-B498-43B3-948B-1728B52AA6E4}">
+                <adec:decorative xmlns:adec="http://schemas.microsoft.com/office/drawing/2017/decorative" val="1"/>
+              </a:ext>
+            </a:extLst>
+          </p:cNvPr>
           <p:cNvSpPr/>
           <p:nvPr/>
         </p:nvSpPr>
@@ -12511,7 +12853,13 @@
       </p:sp>
       <p:sp>
         <p:nvSpPr>
-          <p:cNvPr id="13" name="Icon FaUserXmark"/>
+          <p:cNvPr id="13" name="Icon FaUserXmark" descr="">
+            <a:extLst>
+              <a:ext uri="{C183D7F6-B498-43B3-948B-1728B52AA6E4}">
+                <adec:decorative xmlns:adec="http://schemas.microsoft.com/office/drawing/2017/decorative" val="1"/>
+              </a:ext>
+            </a:extLst>
+          </p:cNvPr>
           <p:cNvSpPr/>
           <p:nvPr/>
         </p:nvSpPr>
@@ -12536,7 +12884,13 @@
       </p:sp>
       <p:pic>
         <p:nvPicPr>
-          <p:cNvPr id="14" name="Image 2" descr="C:\Users\whale\git\uiao\inbox\SSA-Interview\build\icons\FaUserXmark.png">    </p:cNvPr>
+          <p:cNvPr id="14" name="Image 2" descr="">
+            <a:extLst>
+              <a:ext uri="{C183D7F6-B498-43B3-948B-1728B52AA6E4}">
+                <adec:decorative xmlns:adec="http://schemas.microsoft.com/office/drawing/2017/decorative" val="1"/>
+              </a:ext>
+            </a:extLst>
+          </p:cNvPr>
           <p:cNvPicPr>
             <a:picLocks noChangeAspect="1"/>
           </p:cNvPicPr>
@@ -12737,7 +13091,7 @@
         <a:graphic>
           <a:graphicData uri="http://schemas.openxmlformats.org/drawingml/2006/table">
             <a:tbl>
-              <a:tblPr/>
+              <a:tblPr firstRow="1" bandRow="1"/>
               <a:tblGrid>
                 <a:gridCol w="1965960"/>
                 <a:gridCol w="2377440"/>
@@ -14394,7 +14748,13 @@
       </p:graphicFrame>
       <p:sp>
         <p:nvSpPr>
-          <p:cNvPr id="4" name="EDA card"/>
+          <p:cNvPr id="4" name="EDA card" descr="">
+            <a:extLst>
+              <a:ext uri="{C183D7F6-B498-43B3-948B-1728B52AA6E4}">
+                <adec:decorative xmlns:adec="http://schemas.microsoft.com/office/drawing/2017/decorative" val="1"/>
+              </a:ext>
+            </a:extLst>
+          </p:cNvPr>
           <p:cNvSpPr/>
           <p:nvPr/>
         </p:nvSpPr>
@@ -14428,7 +14788,13 @@
       </p:sp>
       <p:sp>
         <p:nvSpPr>
-          <p:cNvPr id="5" name="Icon FaSitemap"/>
+          <p:cNvPr id="5" name="Icon FaSitemap" descr="">
+            <a:extLst>
+              <a:ext uri="{C183D7F6-B498-43B3-948B-1728B52AA6E4}">
+                <adec:decorative xmlns:adec="http://schemas.microsoft.com/office/drawing/2017/decorative" val="1"/>
+              </a:ext>
+            </a:extLst>
+          </p:cNvPr>
           <p:cNvSpPr/>
           <p:nvPr/>
         </p:nvSpPr>
@@ -14453,7 +14819,13 @@
       </p:sp>
       <p:pic>
         <p:nvPicPr>
-          <p:cNvPr id="6" name="Image 0" descr="C:\Users\whale\git\uiao\inbox\SSA-Interview\build\icons\FaSitemap.png">    </p:cNvPr>
+          <p:cNvPr id="6" name="Image 0" descr="">
+            <a:extLst>
+              <a:ext uri="{C183D7F6-B498-43B3-948B-1728B52AA6E4}">
+                <adec:decorative xmlns:adec="http://schemas.microsoft.com/office/drawing/2017/decorative" val="1"/>
+              </a:ext>
+            </a:extLst>
+          </p:cNvPr>
           <p:cNvPicPr>
             <a:picLocks noChangeAspect="1"/>
           </p:cNvPicPr>
@@ -14610,7 +14982,13 @@
       </p:sp>
       <p:sp>
         <p:nvSpPr>
-          <p:cNvPr id="9" name="Decision"/>
+          <p:cNvPr id="9" name="Decision" descr="">
+            <a:extLst>
+              <a:ext uri="{C183D7F6-B498-43B3-948B-1728B52AA6E4}">
+                <adec:decorative xmlns:adec="http://schemas.microsoft.com/office/drawing/2017/decorative" val="1"/>
+              </a:ext>
+            </a:extLst>
+          </p:cNvPr>
           <p:cNvSpPr/>
           <p:nvPr/>
         </p:nvSpPr>
@@ -14857,7 +15235,7 @@
         <a:graphic>
           <a:graphicData uri="http://schemas.openxmlformats.org/drawingml/2006/table">
             <a:tbl>
-              <a:tblPr/>
+              <a:tblPr firstRow="1" bandRow="1"/>
               <a:tblGrid>
                 <a:gridCol w="2057400"/>
                 <a:gridCol w="1828800"/>
@@ -17265,7 +17643,13 @@
       </p:graphicFrame>
       <p:sp>
         <p:nvSpPr>
-          <p:cNvPr id="5" name="Model rule 1"/>
+          <p:cNvPr id="5" name="Model rule 1" descr="">
+            <a:extLst>
+              <a:ext uri="{C183D7F6-B498-43B3-948B-1728B52AA6E4}">
+                <adec:decorative xmlns:adec="http://schemas.microsoft.com/office/drawing/2017/decorative" val="1"/>
+              </a:ext>
+            </a:extLst>
+          </p:cNvPr>
           <p:cNvSpPr/>
           <p:nvPr/>
         </p:nvSpPr>
@@ -17299,7 +17683,13 @@
       </p:sp>
       <p:sp>
         <p:nvSpPr>
-          <p:cNvPr id="6" name="Icon FaCubes"/>
+          <p:cNvPr id="6" name="Icon FaCubes" descr="">
+            <a:extLst>
+              <a:ext uri="{C183D7F6-B498-43B3-948B-1728B52AA6E4}">
+                <adec:decorative xmlns:adec="http://schemas.microsoft.com/office/drawing/2017/decorative" val="1"/>
+              </a:ext>
+            </a:extLst>
+          </p:cNvPr>
           <p:cNvSpPr/>
           <p:nvPr/>
         </p:nvSpPr>
@@ -17324,7 +17714,13 @@
       </p:sp>
       <p:pic>
         <p:nvPicPr>
-          <p:cNvPr id="7" name="Image 0" descr="C:\Users\whale\git\uiao\inbox\SSA-Interview\build\icons\FaCubes.png">    </p:cNvPr>
+          <p:cNvPr id="7" name="Image 0" descr="">
+            <a:extLst>
+              <a:ext uri="{C183D7F6-B498-43B3-948B-1728B52AA6E4}">
+                <adec:decorative xmlns:adec="http://schemas.microsoft.com/office/drawing/2017/decorative" val="1"/>
+              </a:ext>
+            </a:extLst>
+          </p:cNvPr>
           <p:cNvPicPr>
             <a:picLocks noChangeAspect="1"/>
           </p:cNvPicPr>
@@ -17398,7 +17794,13 @@
       </p:sp>
       <p:sp>
         <p:nvSpPr>
-          <p:cNvPr id="9" name="Model rule 2"/>
+          <p:cNvPr id="9" name="Model rule 2" descr="">
+            <a:extLst>
+              <a:ext uri="{C183D7F6-B498-43B3-948B-1728B52AA6E4}">
+                <adec:decorative xmlns:adec="http://schemas.microsoft.com/office/drawing/2017/decorative" val="1"/>
+              </a:ext>
+            </a:extLst>
+          </p:cNvPr>
           <p:cNvSpPr/>
           <p:nvPr/>
         </p:nvSpPr>
@@ -17432,7 +17834,13 @@
       </p:sp>
       <p:sp>
         <p:nvSpPr>
-          <p:cNvPr id="10" name="Icon FaHashtag"/>
+          <p:cNvPr id="10" name="Icon FaHashtag" descr="">
+            <a:extLst>
+              <a:ext uri="{C183D7F6-B498-43B3-948B-1728B52AA6E4}">
+                <adec:decorative xmlns:adec="http://schemas.microsoft.com/office/drawing/2017/decorative" val="1"/>
+              </a:ext>
+            </a:extLst>
+          </p:cNvPr>
           <p:cNvSpPr/>
           <p:nvPr/>
         </p:nvSpPr>
@@ -17457,7 +17865,13 @@
       </p:sp>
       <p:pic>
         <p:nvPicPr>
-          <p:cNvPr id="11" name="Image 1" descr="C:\Users\whale\git\uiao\inbox\SSA-Interview\build\icons\FaHashtag.png">    </p:cNvPr>
+          <p:cNvPr id="11" name="Image 1" descr="">
+            <a:extLst>
+              <a:ext uri="{C183D7F6-B498-43B3-948B-1728B52AA6E4}">
+                <adec:decorative xmlns:adec="http://schemas.microsoft.com/office/drawing/2017/decorative" val="1"/>
+              </a:ext>
+            </a:extLst>
+          </p:cNvPr>
           <p:cNvPicPr>
             <a:picLocks noChangeAspect="1"/>
           </p:cNvPicPr>
@@ -17531,7 +17945,13 @@
       </p:sp>
       <p:sp>
         <p:nvSpPr>
-          <p:cNvPr id="13" name="Model rule 3"/>
+          <p:cNvPr id="13" name="Model rule 3" descr="">
+            <a:extLst>
+              <a:ext uri="{C183D7F6-B498-43B3-948B-1728B52AA6E4}">
+                <adec:decorative xmlns:adec="http://schemas.microsoft.com/office/drawing/2017/decorative" val="1"/>
+              </a:ext>
+            </a:extLst>
+          </p:cNvPr>
           <p:cNvSpPr/>
           <p:nvPr/>
         </p:nvSpPr>
@@ -17565,7 +17985,13 @@
       </p:sp>
       <p:sp>
         <p:nvSpPr>
-          <p:cNvPr id="14" name="Icon FaTableList"/>
+          <p:cNvPr id="14" name="Icon FaTableList" descr="">
+            <a:extLst>
+              <a:ext uri="{C183D7F6-B498-43B3-948B-1728B52AA6E4}">
+                <adec:decorative xmlns:adec="http://schemas.microsoft.com/office/drawing/2017/decorative" val="1"/>
+              </a:ext>
+            </a:extLst>
+          </p:cNvPr>
           <p:cNvSpPr/>
           <p:nvPr/>
         </p:nvSpPr>
@@ -17590,7 +18016,13 @@
       </p:sp>
       <p:pic>
         <p:nvPicPr>
-          <p:cNvPr id="15" name="Image 2" descr="C:\Users\whale\git\uiao\inbox\SSA-Interview\build\icons\FaTableList.png">    </p:cNvPr>
+          <p:cNvPr id="15" name="Image 2" descr="">
+            <a:extLst>
+              <a:ext uri="{C183D7F6-B498-43B3-948B-1728B52AA6E4}">
+                <adec:decorative xmlns:adec="http://schemas.microsoft.com/office/drawing/2017/decorative" val="1"/>
+              </a:ext>
+            </a:extLst>
+          </p:cNvPr>
           <p:cNvPicPr>
             <a:picLocks noChangeAspect="1"/>
           </p:cNvPicPr>
@@ -17775,7 +18207,13 @@
       </p:sp>
       <p:sp>
         <p:nvSpPr>
-          <p:cNvPr id="3" name="Tag Why"/>
+          <p:cNvPr id="3" name="Tag Why" descr="">
+            <a:extLst>
+              <a:ext uri="{C183D7F6-B498-43B3-948B-1728B52AA6E4}">
+                <adec:decorative xmlns:adec="http://schemas.microsoft.com/office/drawing/2017/decorative" val="1"/>
+              </a:ext>
+            </a:extLst>
+          </p:cNvPr>
           <p:cNvSpPr/>
           <p:nvPr/>
         </p:nvSpPr>
@@ -17874,7 +18312,13 @@
       </p:sp>
       <p:sp>
         <p:nvSpPr>
-          <p:cNvPr id="6" name="Icon FaUserXmark"/>
+          <p:cNvPr id="6" name="Icon FaUserXmark" descr="">
+            <a:extLst>
+              <a:ext uri="{C183D7F6-B498-43B3-948B-1728B52AA6E4}">
+                <adec:decorative xmlns:adec="http://schemas.microsoft.com/office/drawing/2017/decorative" val="1"/>
+              </a:ext>
+            </a:extLst>
+          </p:cNvPr>
           <p:cNvSpPr/>
           <p:nvPr/>
         </p:nvSpPr>
@@ -17899,7 +18343,13 @@
       </p:sp>
       <p:pic>
         <p:nvPicPr>
-          <p:cNvPr id="7" name="Image 0" descr="C:\Users\whale\git\uiao\inbox\SSA-Interview\build\icons\FaUserXmark.png">    </p:cNvPr>
+          <p:cNvPr id="7" name="Image 0" descr="">
+            <a:extLst>
+              <a:ext uri="{C183D7F6-B498-43B3-948B-1728B52AA6E4}">
+                <adec:decorative xmlns:adec="http://schemas.microsoft.com/office/drawing/2017/decorative" val="1"/>
+              </a:ext>
+            </a:extLst>
+          </p:cNvPr>
           <p:cNvPicPr>
             <a:picLocks noChangeAspect="1"/>
           </p:cNvPicPr>
@@ -17979,7 +18429,13 @@
       </p:sp>
       <p:sp>
         <p:nvSpPr>
-          <p:cNvPr id="9" name="Icon FaAddressBook"/>
+          <p:cNvPr id="9" name="Icon FaAddressBook" descr="">
+            <a:extLst>
+              <a:ext uri="{C183D7F6-B498-43B3-948B-1728B52AA6E4}">
+                <adec:decorative xmlns:adec="http://schemas.microsoft.com/office/drawing/2017/decorative" val="1"/>
+              </a:ext>
+            </a:extLst>
+          </p:cNvPr>
           <p:cNvSpPr/>
           <p:nvPr/>
         </p:nvSpPr>
@@ -18004,7 +18460,13 @@
       </p:sp>
       <p:pic>
         <p:nvPicPr>
-          <p:cNvPr id="10" name="Image 1" descr="C:\Users\whale\git\uiao\inbox\SSA-Interview\build\icons\FaAddressBook.png">    </p:cNvPr>
+          <p:cNvPr id="10" name="Image 1" descr="">
+            <a:extLst>
+              <a:ext uri="{C183D7F6-B498-43B3-948B-1728B52AA6E4}">
+                <adec:decorative xmlns:adec="http://schemas.microsoft.com/office/drawing/2017/decorative" val="1"/>
+              </a:ext>
+            </a:extLst>
+          </p:cNvPr>
           <p:cNvPicPr>
             <a:picLocks noChangeAspect="1"/>
           </p:cNvPicPr>
@@ -18084,7 +18546,13 @@
       </p:sp>
       <p:sp>
         <p:nvSpPr>
-          <p:cNvPr id="12" name="Icon FaUserClock"/>
+          <p:cNvPr id="12" name="Icon FaUserClock" descr="">
+            <a:extLst>
+              <a:ext uri="{C183D7F6-B498-43B3-948B-1728B52AA6E4}">
+                <adec:decorative xmlns:adec="http://schemas.microsoft.com/office/drawing/2017/decorative" val="1"/>
+              </a:ext>
+            </a:extLst>
+          </p:cNvPr>
           <p:cNvSpPr/>
           <p:nvPr/>
         </p:nvSpPr>
@@ -18109,7 +18577,13 @@
       </p:sp>
       <p:pic>
         <p:nvPicPr>
-          <p:cNvPr id="13" name="Image 2" descr="C:\Users\whale\git\uiao\inbox\SSA-Interview\build\icons\FaUserClock.png">    </p:cNvPr>
+          <p:cNvPr id="13" name="Image 2" descr="">
+            <a:extLst>
+              <a:ext uri="{C183D7F6-B498-43B3-948B-1728B52AA6E4}">
+                <adec:decorative xmlns:adec="http://schemas.microsoft.com/office/drawing/2017/decorative" val="1"/>
+              </a:ext>
+            </a:extLst>
+          </p:cNvPr>
           <p:cNvPicPr>
             <a:picLocks noChangeAspect="1"/>
           </p:cNvPicPr>
@@ -18189,7 +18663,13 @@
       </p:sp>
       <p:sp>
         <p:nvSpPr>
-          <p:cNvPr id="15" name="Mission box"/>
+          <p:cNvPr id="15" name="Mission box" descr="">
+            <a:extLst>
+              <a:ext uri="{C183D7F6-B498-43B3-948B-1728B52AA6E4}">
+                <adec:decorative xmlns:adec="http://schemas.microsoft.com/office/drawing/2017/decorative" val="1"/>
+              </a:ext>
+            </a:extLst>
+          </p:cNvPr>
           <p:cNvSpPr/>
           <p:nvPr/>
         </p:nvSpPr>
@@ -18223,7 +18703,13 @@
       </p:sp>
       <p:sp>
         <p:nvSpPr>
-          <p:cNvPr id="16" name="Icon FaPeopleArrows"/>
+          <p:cNvPr id="16" name="Icon FaPeopleArrows" descr="">
+            <a:extLst>
+              <a:ext uri="{C183D7F6-B498-43B3-948B-1728B52AA6E4}">
+                <adec:decorative xmlns:adec="http://schemas.microsoft.com/office/drawing/2017/decorative" val="1"/>
+              </a:ext>
+            </a:extLst>
+          </p:cNvPr>
           <p:cNvSpPr/>
           <p:nvPr/>
         </p:nvSpPr>
@@ -18248,7 +18734,13 @@
       </p:sp>
       <p:pic>
         <p:nvPicPr>
-          <p:cNvPr id="17" name="Image 3" descr="C:\Users\whale\git\uiao\inbox\SSA-Interview\build\icons\FaPeopleArrows.png">    </p:cNvPr>
+          <p:cNvPr id="17" name="Image 3" descr="">
+            <a:extLst>
+              <a:ext uri="{C183D7F6-B498-43B3-948B-1728B52AA6E4}">
+                <adec:decorative xmlns:adec="http://schemas.microsoft.com/office/drawing/2017/decorative" val="1"/>
+              </a:ext>
+            </a:extLst>
+          </p:cNvPr>
           <p:cNvPicPr>
             <a:picLocks noChangeAspect="1"/>
           </p:cNvPicPr>
@@ -18471,7 +18963,13 @@
       </p:sp>
       <p:sp>
         <p:nvSpPr>
-          <p:cNvPr id="21" name="Do nothing"/>
+          <p:cNvPr id="21" name="Do nothing" descr="">
+            <a:extLst>
+              <a:ext uri="{C183D7F6-B498-43B3-948B-1728B52AA6E4}">
+                <adec:decorative xmlns:adec="http://schemas.microsoft.com/office/drawing/2017/decorative" val="1"/>
+              </a:ext>
+            </a:extLst>
+          </p:cNvPr>
           <p:cNvSpPr/>
           <p:nvPr/>
         </p:nvSpPr>
@@ -18505,7 +19003,13 @@
       </p:sp>
       <p:sp>
         <p:nvSpPr>
-          <p:cNvPr id="22" name="Icon FaTriangleExclamation"/>
+          <p:cNvPr id="22" name="Icon FaTriangleExclamation" descr="">
+            <a:extLst>
+              <a:ext uri="{C183D7F6-B498-43B3-948B-1728B52AA6E4}">
+                <adec:decorative xmlns:adec="http://schemas.microsoft.com/office/drawing/2017/decorative" val="1"/>
+              </a:ext>
+            </a:extLst>
+          </p:cNvPr>
           <p:cNvSpPr/>
           <p:nvPr/>
         </p:nvSpPr>
@@ -18530,7 +19034,13 @@
       </p:sp>
       <p:pic>
         <p:nvPicPr>
-          <p:cNvPr id="23" name="Image 4" descr="C:\Users\whale\git\uiao\inbox\SSA-Interview\build\icons\FaTriangleExclamation.png">    </p:cNvPr>
+          <p:cNvPr id="23" name="Image 4" descr="">
+            <a:extLst>
+              <a:ext uri="{C183D7F6-B498-43B3-948B-1728B52AA6E4}">
+                <adec:decorative xmlns:adec="http://schemas.microsoft.com/office/drawing/2017/decorative" val="1"/>
+              </a:ext>
+            </a:extLst>
+          </p:cNvPr>
           <p:cNvPicPr>
             <a:picLocks noChangeAspect="1"/>
           </p:cNvPicPr>
@@ -18748,7 +19258,13 @@
       </p:sp>
       <p:sp>
         <p:nvSpPr>
-          <p:cNvPr id="4" name="LM 1.1"/>
+          <p:cNvPr id="4" name="LM 1.1" descr="">
+            <a:extLst>
+              <a:ext uri="{C183D7F6-B498-43B3-948B-1728B52AA6E4}">
+                <adec:decorative xmlns:adec="http://schemas.microsoft.com/office/drawing/2017/decorative" val="1"/>
+              </a:ext>
+            </a:extLst>
+          </p:cNvPr>
           <p:cNvSpPr/>
           <p:nvPr/>
         </p:nvSpPr>
@@ -18818,7 +19334,13 @@
       </p:sp>
       <p:sp>
         <p:nvSpPr>
-          <p:cNvPr id="6" name="Shape 4"/>
+          <p:cNvPr id="6" name="Shape 4" descr="">
+            <a:extLst>
+              <a:ext uri="{C183D7F6-B498-43B3-948B-1728B52AA6E4}">
+                <adec:decorative xmlns:adec="http://schemas.microsoft.com/office/drawing/2017/decorative" val="1"/>
+              </a:ext>
+            </a:extLst>
+          </p:cNvPr>
           <p:cNvSpPr/>
           <p:nvPr/>
         </p:nvSpPr>
@@ -18842,7 +19364,13 @@
       </p:sp>
       <p:sp>
         <p:nvSpPr>
-          <p:cNvPr id="7" name="LM 1.2"/>
+          <p:cNvPr id="7" name="LM 1.2" descr="">
+            <a:extLst>
+              <a:ext uri="{C183D7F6-B498-43B3-948B-1728B52AA6E4}">
+                <adec:decorative xmlns:adec="http://schemas.microsoft.com/office/drawing/2017/decorative" val="1"/>
+              </a:ext>
+            </a:extLst>
+          </p:cNvPr>
           <p:cNvSpPr/>
           <p:nvPr/>
         </p:nvSpPr>
@@ -18912,7 +19440,13 @@
       </p:sp>
       <p:sp>
         <p:nvSpPr>
-          <p:cNvPr id="9" name="Shape 7"/>
+          <p:cNvPr id="9" name="Shape 7" descr="">
+            <a:extLst>
+              <a:ext uri="{C183D7F6-B498-43B3-948B-1728B52AA6E4}">
+                <adec:decorative xmlns:adec="http://schemas.microsoft.com/office/drawing/2017/decorative" val="1"/>
+              </a:ext>
+            </a:extLst>
+          </p:cNvPr>
           <p:cNvSpPr/>
           <p:nvPr/>
         </p:nvSpPr>
@@ -18936,7 +19470,13 @@
       </p:sp>
       <p:sp>
         <p:nvSpPr>
-          <p:cNvPr id="10" name="LM 1.3"/>
+          <p:cNvPr id="10" name="LM 1.3" descr="">
+            <a:extLst>
+              <a:ext uri="{C183D7F6-B498-43B3-948B-1728B52AA6E4}">
+                <adec:decorative xmlns:adec="http://schemas.microsoft.com/office/drawing/2017/decorative" val="1"/>
+              </a:ext>
+            </a:extLst>
+          </p:cNvPr>
           <p:cNvSpPr/>
           <p:nvPr/>
         </p:nvSpPr>
@@ -19006,7 +19546,13 @@
       </p:sp>
       <p:sp>
         <p:nvSpPr>
-          <p:cNvPr id="12" name="Shape 10"/>
+          <p:cNvPr id="12" name="Shape 10" descr="">
+            <a:extLst>
+              <a:ext uri="{C183D7F6-B498-43B3-948B-1728B52AA6E4}">
+                <adec:decorative xmlns:adec="http://schemas.microsoft.com/office/drawing/2017/decorative" val="1"/>
+              </a:ext>
+            </a:extLst>
+          </p:cNvPr>
           <p:cNvSpPr/>
           <p:nvPr/>
         </p:nvSpPr>
@@ -19030,7 +19576,13 @@
       </p:sp>
       <p:sp>
         <p:nvSpPr>
-          <p:cNvPr id="13" name="LM 1.4"/>
+          <p:cNvPr id="13" name="LM 1.4" descr="">
+            <a:extLst>
+              <a:ext uri="{C183D7F6-B498-43B3-948B-1728B52AA6E4}">
+                <adec:decorative xmlns:adec="http://schemas.microsoft.com/office/drawing/2017/decorative" val="1"/>
+              </a:ext>
+            </a:extLst>
+          </p:cNvPr>
           <p:cNvSpPr/>
           <p:nvPr/>
         </p:nvSpPr>
@@ -19100,7 +19652,13 @@
       </p:sp>
       <p:sp>
         <p:nvSpPr>
-          <p:cNvPr id="15" name="Shape 13"/>
+          <p:cNvPr id="15" name="Shape 13" descr="">
+            <a:extLst>
+              <a:ext uri="{C183D7F6-B498-43B3-948B-1728B52AA6E4}">
+                <adec:decorative xmlns:adec="http://schemas.microsoft.com/office/drawing/2017/decorative" val="1"/>
+              </a:ext>
+            </a:extLst>
+          </p:cNvPr>
           <p:cNvSpPr/>
           <p:nvPr/>
         </p:nvSpPr>
@@ -19124,7 +19682,13 @@
       </p:sp>
       <p:sp>
         <p:nvSpPr>
-          <p:cNvPr id="16" name="LM 1.5"/>
+          <p:cNvPr id="16" name="LM 1.5" descr="">
+            <a:extLst>
+              <a:ext uri="{C183D7F6-B498-43B3-948B-1728B52AA6E4}">
+                <adec:decorative xmlns:adec="http://schemas.microsoft.com/office/drawing/2017/decorative" val="1"/>
+              </a:ext>
+            </a:extLst>
+          </p:cNvPr>
           <p:cNvSpPr/>
           <p:nvPr/>
         </p:nvSpPr>
@@ -19230,7 +19794,13 @@
       </p:sp>
       <p:sp>
         <p:nvSpPr>
-          <p:cNvPr id="19" name="LM 2.1"/>
+          <p:cNvPr id="19" name="LM 2.1" descr="">
+            <a:extLst>
+              <a:ext uri="{C183D7F6-B498-43B3-948B-1728B52AA6E4}">
+                <adec:decorative xmlns:adec="http://schemas.microsoft.com/office/drawing/2017/decorative" val="1"/>
+              </a:ext>
+            </a:extLst>
+          </p:cNvPr>
           <p:cNvSpPr/>
           <p:nvPr/>
         </p:nvSpPr>
@@ -19300,7 +19870,13 @@
       </p:sp>
       <p:sp>
         <p:nvSpPr>
-          <p:cNvPr id="21" name="Shape 19"/>
+          <p:cNvPr id="21" name="Shape 19" descr="">
+            <a:extLst>
+              <a:ext uri="{C183D7F6-B498-43B3-948B-1728B52AA6E4}">
+                <adec:decorative xmlns:adec="http://schemas.microsoft.com/office/drawing/2017/decorative" val="1"/>
+              </a:ext>
+            </a:extLst>
+          </p:cNvPr>
           <p:cNvSpPr/>
           <p:nvPr/>
         </p:nvSpPr>
@@ -19324,7 +19900,13 @@
       </p:sp>
       <p:sp>
         <p:nvSpPr>
-          <p:cNvPr id="22" name="LM 2.2"/>
+          <p:cNvPr id="22" name="LM 2.2" descr="">
+            <a:extLst>
+              <a:ext uri="{C183D7F6-B498-43B3-948B-1728B52AA6E4}">
+                <adec:decorative xmlns:adec="http://schemas.microsoft.com/office/drawing/2017/decorative" val="1"/>
+              </a:ext>
+            </a:extLst>
+          </p:cNvPr>
           <p:cNvSpPr/>
           <p:nvPr/>
         </p:nvSpPr>
@@ -19394,7 +19976,13 @@
       </p:sp>
       <p:sp>
         <p:nvSpPr>
-          <p:cNvPr id="24" name="Shape 22"/>
+          <p:cNvPr id="24" name="Shape 22" descr="">
+            <a:extLst>
+              <a:ext uri="{C183D7F6-B498-43B3-948B-1728B52AA6E4}">
+                <adec:decorative xmlns:adec="http://schemas.microsoft.com/office/drawing/2017/decorative" val="1"/>
+              </a:ext>
+            </a:extLst>
+          </p:cNvPr>
           <p:cNvSpPr/>
           <p:nvPr/>
         </p:nvSpPr>
@@ -19418,7 +20006,13 @@
       </p:sp>
       <p:sp>
         <p:nvSpPr>
-          <p:cNvPr id="25" name="LM 2.3"/>
+          <p:cNvPr id="25" name="LM 2.3" descr="">
+            <a:extLst>
+              <a:ext uri="{C183D7F6-B498-43B3-948B-1728B52AA6E4}">
+                <adec:decorative xmlns:adec="http://schemas.microsoft.com/office/drawing/2017/decorative" val="1"/>
+              </a:ext>
+            </a:extLst>
+          </p:cNvPr>
           <p:cNvSpPr/>
           <p:nvPr/>
         </p:nvSpPr>
@@ -19488,7 +20082,13 @@
       </p:sp>
       <p:sp>
         <p:nvSpPr>
-          <p:cNvPr id="27" name="Shape 25"/>
+          <p:cNvPr id="27" name="Shape 25" descr="">
+            <a:extLst>
+              <a:ext uri="{C183D7F6-B498-43B3-948B-1728B52AA6E4}">
+                <adec:decorative xmlns:adec="http://schemas.microsoft.com/office/drawing/2017/decorative" val="1"/>
+              </a:ext>
+            </a:extLst>
+          </p:cNvPr>
           <p:cNvSpPr/>
           <p:nvPr/>
         </p:nvSpPr>
@@ -19512,7 +20112,13 @@
       </p:sp>
       <p:sp>
         <p:nvSpPr>
-          <p:cNvPr id="28" name="LM 2.4"/>
+          <p:cNvPr id="28" name="LM 2.4" descr="">
+            <a:extLst>
+              <a:ext uri="{C183D7F6-B498-43B3-948B-1728B52AA6E4}">
+                <adec:decorative xmlns:adec="http://schemas.microsoft.com/office/drawing/2017/decorative" val="1"/>
+              </a:ext>
+            </a:extLst>
+          </p:cNvPr>
           <p:cNvSpPr/>
           <p:nvPr/>
         </p:nvSpPr>
@@ -19582,7 +20188,13 @@
       </p:sp>
       <p:sp>
         <p:nvSpPr>
-          <p:cNvPr id="30" name="Shape 28"/>
+          <p:cNvPr id="30" name="Shape 28" descr="">
+            <a:extLst>
+              <a:ext uri="{C183D7F6-B498-43B3-948B-1728B52AA6E4}">
+                <adec:decorative xmlns:adec="http://schemas.microsoft.com/office/drawing/2017/decorative" val="1"/>
+              </a:ext>
+            </a:extLst>
+          </p:cNvPr>
           <p:cNvSpPr/>
           <p:nvPr/>
         </p:nvSpPr>
@@ -19606,7 +20218,13 @@
       </p:sp>
       <p:sp>
         <p:nvSpPr>
-          <p:cNvPr id="31" name="LM 2.5"/>
+          <p:cNvPr id="31" name="LM 2.5" descr="">
+            <a:extLst>
+              <a:ext uri="{C183D7F6-B498-43B3-948B-1728B52AA6E4}">
+                <adec:decorative xmlns:adec="http://schemas.microsoft.com/office/drawing/2017/decorative" val="1"/>
+              </a:ext>
+            </a:extLst>
+          </p:cNvPr>
           <p:cNvSpPr/>
           <p:nvPr/>
         </p:nvSpPr>
@@ -19695,7 +20313,7 @@
         <a:graphic>
           <a:graphicData uri="http://schemas.openxmlformats.org/drawingml/2006/table">
             <a:tbl>
-              <a:tblPr/>
+              <a:tblPr firstRow="1" bandRow="1"/>
               <a:tblGrid>
                 <a:gridCol w="2103120"/>
                 <a:gridCol w="4480560"/>
@@ -20425,7 +21043,13 @@
       </p:sp>
       <p:sp>
         <p:nvSpPr>
-          <p:cNvPr id="3" name="Credentials card"/>
+          <p:cNvPr id="3" name="Credentials card" descr="">
+            <a:extLst>
+              <a:ext uri="{C183D7F6-B498-43B3-948B-1728B52AA6E4}">
+                <adec:decorative xmlns:adec="http://schemas.microsoft.com/office/drawing/2017/decorative" val="1"/>
+              </a:ext>
+            </a:extLst>
+          </p:cNvPr>
           <p:cNvSpPr/>
           <p:nvPr/>
         </p:nvSpPr>
@@ -20459,7 +21083,13 @@
       </p:sp>
       <p:sp>
         <p:nvSpPr>
-          <p:cNvPr id="4" name="Icon FaIdCard"/>
+          <p:cNvPr id="4" name="Icon FaIdCard" descr="">
+            <a:extLst>
+              <a:ext uri="{C183D7F6-B498-43B3-948B-1728B52AA6E4}">
+                <adec:decorative xmlns:adec="http://schemas.microsoft.com/office/drawing/2017/decorative" val="1"/>
+              </a:ext>
+            </a:extLst>
+          </p:cNvPr>
           <p:cNvSpPr/>
           <p:nvPr/>
         </p:nvSpPr>
@@ -20484,7 +21114,13 @@
       </p:sp>
       <p:pic>
         <p:nvPicPr>
-          <p:cNvPr id="5" name="Image 0" descr="C:\Users\whale\git\uiao\inbox\SSA-Interview\build\icons\FaIdCard.png">    </p:cNvPr>
+          <p:cNvPr id="5" name="Image 0" descr="">
+            <a:extLst>
+              <a:ext uri="{C183D7F6-B498-43B3-948B-1728B52AA6E4}">
+                <adec:decorative xmlns:adec="http://schemas.microsoft.com/office/drawing/2017/decorative" val="1"/>
+              </a:ext>
+            </a:extLst>
+          </p:cNvPr>
           <p:cNvPicPr>
             <a:picLocks noChangeAspect="1"/>
           </p:cNvPicPr>
@@ -20623,7 +21259,13 @@
       </p:sp>
       <p:sp>
         <p:nvSpPr>
-          <p:cNvPr id="8" name="Assurance card"/>
+          <p:cNvPr id="8" name="Assurance card" descr="">
+            <a:extLst>
+              <a:ext uri="{C183D7F6-B498-43B3-948B-1728B52AA6E4}">
+                <adec:decorative xmlns:adec="http://schemas.microsoft.com/office/drawing/2017/decorative" val="1"/>
+              </a:ext>
+            </a:extLst>
+          </p:cNvPr>
           <p:cNvSpPr/>
           <p:nvPr/>
         </p:nvSpPr>
@@ -20657,7 +21299,13 @@
       </p:sp>
       <p:sp>
         <p:nvSpPr>
-          <p:cNvPr id="9" name="Icon FaFingerprint"/>
+          <p:cNvPr id="9" name="Icon FaFingerprint" descr="">
+            <a:extLst>
+              <a:ext uri="{C183D7F6-B498-43B3-948B-1728B52AA6E4}">
+                <adec:decorative xmlns:adec="http://schemas.microsoft.com/office/drawing/2017/decorative" val="1"/>
+              </a:ext>
+            </a:extLst>
+          </p:cNvPr>
           <p:cNvSpPr/>
           <p:nvPr/>
         </p:nvSpPr>
@@ -20682,7 +21330,13 @@
       </p:sp>
       <p:pic>
         <p:nvPicPr>
-          <p:cNvPr id="10" name="Image 1" descr="C:\Users\whale\git\uiao\inbox\SSA-Interview\build\icons\FaFingerprint.png">    </p:cNvPr>
+          <p:cNvPr id="10" name="Image 1" descr="">
+            <a:extLst>
+              <a:ext uri="{C183D7F6-B498-43B3-948B-1728B52AA6E4}">
+                <adec:decorative xmlns:adec="http://schemas.microsoft.com/office/drawing/2017/decorative" val="1"/>
+              </a:ext>
+            </a:extLst>
+          </p:cNvPr>
           <p:cNvPicPr>
             <a:picLocks noChangeAspect="1"/>
           </p:cNvPicPr>
@@ -20821,7 +21475,13 @@
       </p:sp>
       <p:sp>
         <p:nvSpPr>
-          <p:cNvPr id="13" name="Access card"/>
+          <p:cNvPr id="13" name="Access card" descr="">
+            <a:extLst>
+              <a:ext uri="{C183D7F6-B498-43B3-948B-1728B52AA6E4}">
+                <adec:decorative xmlns:adec="http://schemas.microsoft.com/office/drawing/2017/decorative" val="1"/>
+              </a:ext>
+            </a:extLst>
+          </p:cNvPr>
           <p:cNvSpPr/>
           <p:nvPr/>
         </p:nvSpPr>
@@ -20855,7 +21515,13 @@
       </p:sp>
       <p:sp>
         <p:nvSpPr>
-          <p:cNvPr id="14" name="Icon FaKey"/>
+          <p:cNvPr id="14" name="Icon FaKey" descr="">
+            <a:extLst>
+              <a:ext uri="{C183D7F6-B498-43B3-948B-1728B52AA6E4}">
+                <adec:decorative xmlns:adec="http://schemas.microsoft.com/office/drawing/2017/decorative" val="1"/>
+              </a:ext>
+            </a:extLst>
+          </p:cNvPr>
           <p:cNvSpPr/>
           <p:nvPr/>
         </p:nvSpPr>
@@ -20880,7 +21546,13 @@
       </p:sp>
       <p:pic>
         <p:nvPicPr>
-          <p:cNvPr id="15" name="Image 2" descr="C:\Users\whale\git\uiao\inbox\SSA-Interview\build\icons\FaKey.png">    </p:cNvPr>
+          <p:cNvPr id="15" name="Image 2" descr="">
+            <a:extLst>
+              <a:ext uri="{C183D7F6-B498-43B3-948B-1728B52AA6E4}">
+                <adec:decorative xmlns:adec="http://schemas.microsoft.com/office/drawing/2017/decorative" val="1"/>
+              </a:ext>
+            </a:extLst>
+          </p:cNvPr>
           <p:cNvPicPr>
             <a:picLocks noChangeAspect="1"/>
           </p:cNvPicPr>
@@ -21019,7 +21691,13 @@
       </p:sp>
       <p:sp>
         <p:nvSpPr>
-          <p:cNvPr id="18" name="ICAM takeaway"/>
+          <p:cNvPr id="18" name="ICAM takeaway" descr="">
+            <a:extLst>
+              <a:ext uri="{C183D7F6-B498-43B3-948B-1728B52AA6E4}">
+                <adec:decorative xmlns:adec="http://schemas.microsoft.com/office/drawing/2017/decorative" val="1"/>
+              </a:ext>
+            </a:extLst>
+          </p:cNvPr>
           <p:cNvSpPr/>
           <p:nvPr/>
         </p:nvSpPr>
@@ -21211,7 +21889,13 @@
       </p:sp>
       <p:sp>
         <p:nvSpPr>
-          <p:cNvPr id="3" name="Privacy 1"/>
+          <p:cNvPr id="3" name="Privacy 1" descr="">
+            <a:extLst>
+              <a:ext uri="{C183D7F6-B498-43B3-948B-1728B52AA6E4}">
+                <adec:decorative xmlns:adec="http://schemas.microsoft.com/office/drawing/2017/decorative" val="1"/>
+              </a:ext>
+            </a:extLst>
+          </p:cNvPr>
           <p:cNvSpPr/>
           <p:nvPr/>
         </p:nvSpPr>
@@ -21245,7 +21929,13 @@
       </p:sp>
       <p:sp>
         <p:nvSpPr>
-          <p:cNvPr id="4" name="Icon FaScaleBalanced"/>
+          <p:cNvPr id="4" name="Icon FaScaleBalanced" descr="">
+            <a:extLst>
+              <a:ext uri="{C183D7F6-B498-43B3-948B-1728B52AA6E4}">
+                <adec:decorative xmlns:adec="http://schemas.microsoft.com/office/drawing/2017/decorative" val="1"/>
+              </a:ext>
+            </a:extLst>
+          </p:cNvPr>
           <p:cNvSpPr/>
           <p:nvPr/>
         </p:nvSpPr>
@@ -21270,7 +21960,13 @@
       </p:sp>
       <p:pic>
         <p:nvPicPr>
-          <p:cNvPr id="5" name="Image 0" descr="C:\Users\whale\git\uiao\inbox\SSA-Interview\build\icons\FaScaleBalanced.png">    </p:cNvPr>
+          <p:cNvPr id="5" name="Image 0" descr="">
+            <a:extLst>
+              <a:ext uri="{C183D7F6-B498-43B3-948B-1728B52AA6E4}">
+                <adec:decorative xmlns:adec="http://schemas.microsoft.com/office/drawing/2017/decorative" val="1"/>
+              </a:ext>
+            </a:extLst>
+          </p:cNvPr>
           <p:cNvPicPr>
             <a:picLocks noChangeAspect="1"/>
           </p:cNvPicPr>
@@ -21353,7 +22049,13 @@
       </p:sp>
       <p:sp>
         <p:nvSpPr>
-          <p:cNvPr id="7" name="Privacy 2"/>
+          <p:cNvPr id="7" name="Privacy 2" descr="">
+            <a:extLst>
+              <a:ext uri="{C183D7F6-B498-43B3-948B-1728B52AA6E4}">
+                <adec:decorative xmlns:adec="http://schemas.microsoft.com/office/drawing/2017/decorative" val="1"/>
+              </a:ext>
+            </a:extLst>
+          </p:cNvPr>
           <p:cNvSpPr/>
           <p:nvPr/>
         </p:nvSpPr>
@@ -21387,7 +22089,13 @@
       </p:sp>
       <p:sp>
         <p:nvSpPr>
-          <p:cNvPr id="8" name="Icon FaFilter"/>
+          <p:cNvPr id="8" name="Icon FaFilter" descr="">
+            <a:extLst>
+              <a:ext uri="{C183D7F6-B498-43B3-948B-1728B52AA6E4}">
+                <adec:decorative xmlns:adec="http://schemas.microsoft.com/office/drawing/2017/decorative" val="1"/>
+              </a:ext>
+            </a:extLst>
+          </p:cNvPr>
           <p:cNvSpPr/>
           <p:nvPr/>
         </p:nvSpPr>
@@ -21412,7 +22120,13 @@
       </p:sp>
       <p:pic>
         <p:nvPicPr>
-          <p:cNvPr id="9" name="Image 1" descr="C:\Users\whale\git\uiao\inbox\SSA-Interview\build\icons\FaFilter.png">    </p:cNvPr>
+          <p:cNvPr id="9" name="Image 1" descr="">
+            <a:extLst>
+              <a:ext uri="{C183D7F6-B498-43B3-948B-1728B52AA6E4}">
+                <adec:decorative xmlns:adec="http://schemas.microsoft.com/office/drawing/2017/decorative" val="1"/>
+              </a:ext>
+            </a:extLst>
+          </p:cNvPr>
           <p:cNvPicPr>
             <a:picLocks noChangeAspect="1"/>
           </p:cNvPicPr>
@@ -21495,7 +22209,13 @@
       </p:sp>
       <p:sp>
         <p:nvSpPr>
-          <p:cNvPr id="11" name="Privacy 3"/>
+          <p:cNvPr id="11" name="Privacy 3" descr="">
+            <a:extLst>
+              <a:ext uri="{C183D7F6-B498-43B3-948B-1728B52AA6E4}">
+                <adec:decorative xmlns:adec="http://schemas.microsoft.com/office/drawing/2017/decorative" val="1"/>
+              </a:ext>
+            </a:extLst>
+          </p:cNvPr>
           <p:cNvSpPr/>
           <p:nvPr/>
         </p:nvSpPr>
@@ -21529,7 +22249,13 @@
       </p:sp>
       <p:sp>
         <p:nvSpPr>
-          <p:cNvPr id="12" name="Icon FaFileShield"/>
+          <p:cNvPr id="12" name="Icon FaFileShield" descr="">
+            <a:extLst>
+              <a:ext uri="{C183D7F6-B498-43B3-948B-1728B52AA6E4}">
+                <adec:decorative xmlns:adec="http://schemas.microsoft.com/office/drawing/2017/decorative" val="1"/>
+              </a:ext>
+            </a:extLst>
+          </p:cNvPr>
           <p:cNvSpPr/>
           <p:nvPr/>
         </p:nvSpPr>
@@ -21554,7 +22280,13 @@
       </p:sp>
       <p:pic>
         <p:nvPicPr>
-          <p:cNvPr id="13" name="Image 2" descr="C:\Users\whale\git\uiao\inbox\SSA-Interview\build\icons\FaFileShield.png">    </p:cNvPr>
+          <p:cNvPr id="13" name="Image 2" descr="">
+            <a:extLst>
+              <a:ext uri="{C183D7F6-B498-43B3-948B-1728B52AA6E4}">
+                <adec:decorative xmlns:adec="http://schemas.microsoft.com/office/drawing/2017/decorative" val="1"/>
+              </a:ext>
+            </a:extLst>
+          </p:cNvPr>
           <p:cNvPicPr>
             <a:picLocks noChangeAspect="1"/>
           </p:cNvPicPr>
@@ -21637,7 +22369,13 @@
       </p:sp>
       <p:sp>
         <p:nvSpPr>
-          <p:cNvPr id="15" name="Privacy 4"/>
+          <p:cNvPr id="15" name="Privacy 4" descr="">
+            <a:extLst>
+              <a:ext uri="{C183D7F6-B498-43B3-948B-1728B52AA6E4}">
+                <adec:decorative xmlns:adec="http://schemas.microsoft.com/office/drawing/2017/decorative" val="1"/>
+              </a:ext>
+            </a:extLst>
+          </p:cNvPr>
           <p:cNvSpPr/>
           <p:nvPr/>
         </p:nvSpPr>
@@ -21671,7 +22409,13 @@
       </p:sp>
       <p:sp>
         <p:nvSpPr>
-          <p:cNvPr id="16" name="Icon FaLock"/>
+          <p:cNvPr id="16" name="Icon FaLock" descr="">
+            <a:extLst>
+              <a:ext uri="{C183D7F6-B498-43B3-948B-1728B52AA6E4}">
+                <adec:decorative xmlns:adec="http://schemas.microsoft.com/office/drawing/2017/decorative" val="1"/>
+              </a:ext>
+            </a:extLst>
+          </p:cNvPr>
           <p:cNvSpPr/>
           <p:nvPr/>
         </p:nvSpPr>
@@ -21696,7 +22440,13 @@
       </p:sp>
       <p:pic>
         <p:nvPicPr>
-          <p:cNvPr id="17" name="Image 3" descr="C:\Users\whale\git\uiao\inbox\SSA-Interview\build\icons\FaLock.png">    </p:cNvPr>
+          <p:cNvPr id="17" name="Image 3" descr="">
+            <a:extLst>
+              <a:ext uri="{C183D7F6-B498-43B3-948B-1728B52AA6E4}">
+                <adec:decorative xmlns:adec="http://schemas.microsoft.com/office/drawing/2017/decorative" val="1"/>
+              </a:ext>
+            </a:extLst>
+          </p:cNvPr>
           <p:cNvPicPr>
             <a:picLocks noChangeAspect="1"/>
           </p:cNvPicPr>
@@ -21779,7 +22529,13 @@
       </p:sp>
       <p:sp>
         <p:nvSpPr>
-          <p:cNvPr id="19" name="Privacy takeaway"/>
+          <p:cNvPr id="19" name="Privacy takeaway" descr="">
+            <a:extLst>
+              <a:ext uri="{C183D7F6-B498-43B3-948B-1728B52AA6E4}">
+                <adec:decorative xmlns:adec="http://schemas.microsoft.com/office/drawing/2017/decorative" val="1"/>
+              </a:ext>
+            </a:extLst>
+          </p:cNvPr>
           <p:cNvSpPr/>
           <p:nvPr/>
         </p:nvSpPr>
@@ -21971,7 +22727,13 @@
       </p:sp>
       <p:sp>
         <p:nvSpPr>
-          <p:cNvPr id="3" name="Gov 1"/>
+          <p:cNvPr id="3" name="Gov 1" descr="">
+            <a:extLst>
+              <a:ext uri="{C183D7F6-B498-43B3-948B-1728B52AA6E4}">
+                <adec:decorative xmlns:adec="http://schemas.microsoft.com/office/drawing/2017/decorative" val="1"/>
+              </a:ext>
+            </a:extLst>
+          </p:cNvPr>
           <p:cNvSpPr/>
           <p:nvPr/>
         </p:nvSpPr>
@@ -22005,7 +22767,13 @@
       </p:sp>
       <p:sp>
         <p:nvSpPr>
-          <p:cNvPr id="4" name="Icon FaSitemap"/>
+          <p:cNvPr id="4" name="Icon FaSitemap" descr="">
+            <a:extLst>
+              <a:ext uri="{C183D7F6-B498-43B3-948B-1728B52AA6E4}">
+                <adec:decorative xmlns:adec="http://schemas.microsoft.com/office/drawing/2017/decorative" val="1"/>
+              </a:ext>
+            </a:extLst>
+          </p:cNvPr>
           <p:cNvSpPr/>
           <p:nvPr/>
         </p:nvSpPr>
@@ -22030,7 +22798,13 @@
       </p:sp>
       <p:pic>
         <p:nvPicPr>
-          <p:cNvPr id="5" name="Image 0" descr="C:\Users\whale\git\uiao\inbox\SSA-Interview\build\icons\FaSitemap.png">    </p:cNvPr>
+          <p:cNvPr id="5" name="Image 0" descr="">
+            <a:extLst>
+              <a:ext uri="{C183D7F6-B498-43B3-948B-1728B52AA6E4}">
+                <adec:decorative xmlns:adec="http://schemas.microsoft.com/office/drawing/2017/decorative" val="1"/>
+              </a:ext>
+            </a:extLst>
+          </p:cNvPr>
           <p:cNvPicPr>
             <a:picLocks noChangeAspect="1"/>
           </p:cNvPicPr>
@@ -22110,7 +22884,13 @@
       </p:sp>
       <p:sp>
         <p:nvSpPr>
-          <p:cNvPr id="7" name="Gov 2"/>
+          <p:cNvPr id="7" name="Gov 2" descr="">
+            <a:extLst>
+              <a:ext uri="{C183D7F6-B498-43B3-948B-1728B52AA6E4}">
+                <adec:decorative xmlns:adec="http://schemas.microsoft.com/office/drawing/2017/decorative" val="1"/>
+              </a:ext>
+            </a:extLst>
+          </p:cNvPr>
           <p:cNvSpPr/>
           <p:nvPr/>
         </p:nvSpPr>
@@ -22144,7 +22924,13 @@
       </p:sp>
       <p:sp>
         <p:nvSpPr>
-          <p:cNvPr id="8" name="Icon FaUserShield"/>
+          <p:cNvPr id="8" name="Icon FaUserShield" descr="">
+            <a:extLst>
+              <a:ext uri="{C183D7F6-B498-43B3-948B-1728B52AA6E4}">
+                <adec:decorative xmlns:adec="http://schemas.microsoft.com/office/drawing/2017/decorative" val="1"/>
+              </a:ext>
+            </a:extLst>
+          </p:cNvPr>
           <p:cNvSpPr/>
           <p:nvPr/>
         </p:nvSpPr>
@@ -22169,7 +22955,13 @@
       </p:sp>
       <p:pic>
         <p:nvPicPr>
-          <p:cNvPr id="9" name="Image 1" descr="C:\Users\whale\git\uiao\inbox\SSA-Interview\build\icons\FaUserShield.png">    </p:cNvPr>
+          <p:cNvPr id="9" name="Image 1" descr="">
+            <a:extLst>
+              <a:ext uri="{C183D7F6-B498-43B3-948B-1728B52AA6E4}">
+                <adec:decorative xmlns:adec="http://schemas.microsoft.com/office/drawing/2017/decorative" val="1"/>
+              </a:ext>
+            </a:extLst>
+          </p:cNvPr>
           <p:cNvPicPr>
             <a:picLocks noChangeAspect="1"/>
           </p:cNvPicPr>
@@ -22249,7 +23041,13 @@
       </p:sp>
       <p:sp>
         <p:nvSpPr>
-          <p:cNvPr id="11" name="Gov 3"/>
+          <p:cNvPr id="11" name="Gov 3" descr="">
+            <a:extLst>
+              <a:ext uri="{C183D7F6-B498-43B3-948B-1728B52AA6E4}">
+                <adec:decorative xmlns:adec="http://schemas.microsoft.com/office/drawing/2017/decorative" val="1"/>
+              </a:ext>
+            </a:extLst>
+          </p:cNvPr>
           <p:cNvSpPr/>
           <p:nvPr/>
         </p:nvSpPr>
@@ -22283,7 +23081,13 @@
       </p:sp>
       <p:sp>
         <p:nvSpPr>
-          <p:cNvPr id="12" name="Icon FaClipboardCheck"/>
+          <p:cNvPr id="12" name="Icon FaClipboardCheck" descr="">
+            <a:extLst>
+              <a:ext uri="{C183D7F6-B498-43B3-948B-1728B52AA6E4}">
+                <adec:decorative xmlns:adec="http://schemas.microsoft.com/office/drawing/2017/decorative" val="1"/>
+              </a:ext>
+            </a:extLst>
+          </p:cNvPr>
           <p:cNvSpPr/>
           <p:nvPr/>
         </p:nvSpPr>
@@ -22308,7 +23112,13 @@
       </p:sp>
       <p:pic>
         <p:nvPicPr>
-          <p:cNvPr id="13" name="Image 2" descr="C:\Users\whale\git\uiao\inbox\SSA-Interview\build\icons\FaClipboardCheck.png">    </p:cNvPr>
+          <p:cNvPr id="13" name="Image 2" descr="">
+            <a:extLst>
+              <a:ext uri="{C183D7F6-B498-43B3-948B-1728B52AA6E4}">
+                <adec:decorative xmlns:adec="http://schemas.microsoft.com/office/drawing/2017/decorative" val="1"/>
+              </a:ext>
+            </a:extLst>
+          </p:cNvPr>
           <p:cNvPicPr>
             <a:picLocks noChangeAspect="1"/>
           </p:cNvPicPr>
@@ -22388,7 +23198,13 @@
       </p:sp>
       <p:sp>
         <p:nvSpPr>
-          <p:cNvPr id="15" name="Gov 4"/>
+          <p:cNvPr id="15" name="Gov 4" descr="">
+            <a:extLst>
+              <a:ext uri="{C183D7F6-B498-43B3-948B-1728B52AA6E4}">
+                <adec:decorative xmlns:adec="http://schemas.microsoft.com/office/drawing/2017/decorative" val="1"/>
+              </a:ext>
+            </a:extLst>
+          </p:cNvPr>
           <p:cNvSpPr/>
           <p:nvPr/>
         </p:nvSpPr>
@@ -22422,7 +23238,13 @@
       </p:sp>
       <p:sp>
         <p:nvSpPr>
-          <p:cNvPr id="16" name="Icon FaPlugCircleXmark"/>
+          <p:cNvPr id="16" name="Icon FaPlugCircleXmark" descr="">
+            <a:extLst>
+              <a:ext uri="{C183D7F6-B498-43B3-948B-1728B52AA6E4}">
+                <adec:decorative xmlns:adec="http://schemas.microsoft.com/office/drawing/2017/decorative" val="1"/>
+              </a:ext>
+            </a:extLst>
+          </p:cNvPr>
           <p:cNvSpPr/>
           <p:nvPr/>
         </p:nvSpPr>
@@ -22447,7 +23269,13 @@
       </p:sp>
       <p:pic>
         <p:nvPicPr>
-          <p:cNvPr id="17" name="Image 3" descr="C:\Users\whale\git\uiao\inbox\SSA-Interview\build\icons\FaPlugCircleXmark.png">    </p:cNvPr>
+          <p:cNvPr id="17" name="Image 3" descr="">
+            <a:extLst>
+              <a:ext uri="{C183D7F6-B498-43B3-948B-1728B52AA6E4}">
+                <adec:decorative xmlns:adec="http://schemas.microsoft.com/office/drawing/2017/decorative" val="1"/>
+              </a:ext>
+            </a:extLst>
+          </p:cNvPr>
           <p:cNvPicPr>
             <a:picLocks noChangeAspect="1"/>
           </p:cNvPicPr>
@@ -22527,7 +23355,13 @@
       </p:sp>
       <p:sp>
         <p:nvSpPr>
-          <p:cNvPr id="19" name="Gov 5"/>
+          <p:cNvPr id="19" name="Gov 5" descr="">
+            <a:extLst>
+              <a:ext uri="{C183D7F6-B498-43B3-948B-1728B52AA6E4}">
+                <adec:decorative xmlns:adec="http://schemas.microsoft.com/office/drawing/2017/decorative" val="1"/>
+              </a:ext>
+            </a:extLst>
+          </p:cNvPr>
           <p:cNvSpPr/>
           <p:nvPr/>
         </p:nvSpPr>
@@ -22561,7 +23395,13 @@
       </p:sp>
       <p:sp>
         <p:nvSpPr>
-          <p:cNvPr id="20" name="Icon FaListCheck"/>
+          <p:cNvPr id="20" name="Icon FaListCheck" descr="">
+            <a:extLst>
+              <a:ext uri="{C183D7F6-B498-43B3-948B-1728B52AA6E4}">
+                <adec:decorative xmlns:adec="http://schemas.microsoft.com/office/drawing/2017/decorative" val="1"/>
+              </a:ext>
+            </a:extLst>
+          </p:cNvPr>
           <p:cNvSpPr/>
           <p:nvPr/>
         </p:nvSpPr>
@@ -22586,7 +23426,13 @@
       </p:sp>
       <p:pic>
         <p:nvPicPr>
-          <p:cNvPr id="21" name="Image 4" descr="C:\Users\whale\git\uiao\inbox\SSA-Interview\build\icons\FaListCheck.png">    </p:cNvPr>
+          <p:cNvPr id="21" name="Image 4" descr="">
+            <a:extLst>
+              <a:ext uri="{C183D7F6-B498-43B3-948B-1728B52AA6E4}">
+                <adec:decorative xmlns:adec="http://schemas.microsoft.com/office/drawing/2017/decorative" val="1"/>
+              </a:ext>
+            </a:extLst>
+          </p:cNvPr>
           <p:cNvPicPr>
             <a:picLocks noChangeAspect="1"/>
           </p:cNvPicPr>
@@ -22666,7 +23512,13 @@
       </p:sp>
       <p:sp>
         <p:nvSpPr>
-          <p:cNvPr id="23" name="Gov 6"/>
+          <p:cNvPr id="23" name="Gov 6" descr="">
+            <a:extLst>
+              <a:ext uri="{C183D7F6-B498-43B3-948B-1728B52AA6E4}">
+                <adec:decorative xmlns:adec="http://schemas.microsoft.com/office/drawing/2017/decorative" val="1"/>
+              </a:ext>
+            </a:extLst>
+          </p:cNvPr>
           <p:cNvSpPr/>
           <p:nvPr/>
         </p:nvSpPr>
@@ -22700,7 +23552,13 @@
       </p:sp>
       <p:sp>
         <p:nvSpPr>
-          <p:cNvPr id="24" name="Icon FaTriangleExclamation"/>
+          <p:cNvPr id="24" name="Icon FaTriangleExclamation" descr="">
+            <a:extLst>
+              <a:ext uri="{C183D7F6-B498-43B3-948B-1728B52AA6E4}">
+                <adec:decorative xmlns:adec="http://schemas.microsoft.com/office/drawing/2017/decorative" val="1"/>
+              </a:ext>
+            </a:extLst>
+          </p:cNvPr>
           <p:cNvSpPr/>
           <p:nvPr/>
         </p:nvSpPr>
@@ -22725,7 +23583,13 @@
       </p:sp>
       <p:pic>
         <p:nvPicPr>
-          <p:cNvPr id="25" name="Image 5" descr="C:\Users\whale\git\uiao\inbox\SSA-Interview\build\icons\FaTriangleExclamation.png">    </p:cNvPr>
+          <p:cNvPr id="25" name="Image 5" descr="">
+            <a:extLst>
+              <a:ext uri="{C183D7F6-B498-43B3-948B-1728B52AA6E4}">
+                <adec:decorative xmlns:adec="http://schemas.microsoft.com/office/drawing/2017/decorative" val="1"/>
+              </a:ext>
+            </a:extLst>
+          </p:cNvPr>
           <p:cNvPicPr>
             <a:picLocks noChangeAspect="1"/>
           </p:cNvPicPr>
@@ -22805,7 +23669,13 @@
       </p:sp>
       <p:sp>
         <p:nvSpPr>
-          <p:cNvPr id="27" name="Gov 7"/>
+          <p:cNvPr id="27" name="Gov 7" descr="">
+            <a:extLst>
+              <a:ext uri="{C183D7F6-B498-43B3-948B-1728B52AA6E4}">
+                <adec:decorative xmlns:adec="http://schemas.microsoft.com/office/drawing/2017/decorative" val="1"/>
+              </a:ext>
+            </a:extLst>
+          </p:cNvPr>
           <p:cNvSpPr/>
           <p:nvPr/>
         </p:nvSpPr>
@@ -22839,7 +23709,13 @@
       </p:sp>
       <p:sp>
         <p:nvSpPr>
-          <p:cNvPr id="28" name="Icon FaChartLine"/>
+          <p:cNvPr id="28" name="Icon FaChartLine" descr="">
+            <a:extLst>
+              <a:ext uri="{C183D7F6-B498-43B3-948B-1728B52AA6E4}">
+                <adec:decorative xmlns:adec="http://schemas.microsoft.com/office/drawing/2017/decorative" val="1"/>
+              </a:ext>
+            </a:extLst>
+          </p:cNvPr>
           <p:cNvSpPr/>
           <p:nvPr/>
         </p:nvSpPr>
@@ -22864,7 +23740,13 @@
       </p:sp>
       <p:pic>
         <p:nvPicPr>
-          <p:cNvPr id="29" name="Image 6" descr="C:\Users\whale\git\uiao\inbox\SSA-Interview\build\icons\FaChartLine.png">    </p:cNvPr>
+          <p:cNvPr id="29" name="Image 6" descr="">
+            <a:extLst>
+              <a:ext uri="{C183D7F6-B498-43B3-948B-1728B52AA6E4}">
+                <adec:decorative xmlns:adec="http://schemas.microsoft.com/office/drawing/2017/decorative" val="1"/>
+              </a:ext>
+            </a:extLst>
+          </p:cNvPr>
           <p:cNvPicPr>
             <a:picLocks noChangeAspect="1"/>
           </p:cNvPicPr>
@@ -22944,7 +23826,13 @@
       </p:sp>
       <p:sp>
         <p:nvSpPr>
-          <p:cNvPr id="31" name="Gov 8"/>
+          <p:cNvPr id="31" name="Gov 8" descr="">
+            <a:extLst>
+              <a:ext uri="{C183D7F6-B498-43B3-948B-1728B52AA6E4}">
+                <adec:decorative xmlns:adec="http://schemas.microsoft.com/office/drawing/2017/decorative" val="1"/>
+              </a:ext>
+            </a:extLst>
+          </p:cNvPr>
           <p:cNvSpPr/>
           <p:nvPr/>
         </p:nvSpPr>
@@ -22978,7 +23866,13 @@
       </p:sp>
       <p:sp>
         <p:nvSpPr>
-          <p:cNvPr id="32" name="Icon FaCodeBranch"/>
+          <p:cNvPr id="32" name="Icon FaCodeBranch" descr="">
+            <a:extLst>
+              <a:ext uri="{C183D7F6-B498-43B3-948B-1728B52AA6E4}">
+                <adec:decorative xmlns:adec="http://schemas.microsoft.com/office/drawing/2017/decorative" val="1"/>
+              </a:ext>
+            </a:extLst>
+          </p:cNvPr>
           <p:cNvSpPr/>
           <p:nvPr/>
         </p:nvSpPr>
@@ -23003,7 +23897,13 @@
       </p:sp>
       <p:pic>
         <p:nvPicPr>
-          <p:cNvPr id="33" name="Image 7" descr="C:\Users\whale\git\uiao\inbox\SSA-Interview\build\icons\FaCodeBranch.png">    </p:cNvPr>
+          <p:cNvPr id="33" name="Image 7" descr="">
+            <a:extLst>
+              <a:ext uri="{C183D7F6-B498-43B3-948B-1728B52AA6E4}">
+                <adec:decorative xmlns:adec="http://schemas.microsoft.com/office/drawing/2017/decorative" val="1"/>
+              </a:ext>
+            </a:extLst>
+          </p:cNvPr>
           <p:cNvPicPr>
             <a:picLocks noChangeAspect="1"/>
           </p:cNvPicPr>
@@ -23230,7 +24130,13 @@
       </p:sp>
       <p:sp>
         <p:nvSpPr>
-          <p:cNvPr id="3" name="Cross col 1"/>
+          <p:cNvPr id="3" name="Cross col 1" descr="">
+            <a:extLst>
+              <a:ext uri="{C183D7F6-B498-43B3-948B-1728B52AA6E4}">
+                <adec:decorative xmlns:adec="http://schemas.microsoft.com/office/drawing/2017/decorative" val="1"/>
+              </a:ext>
+            </a:extLst>
+          </p:cNvPr>
           <p:cNvSpPr/>
           <p:nvPr/>
         </p:nvSpPr>
@@ -23300,7 +24206,13 @@
       </p:sp>
       <p:sp>
         <p:nvSpPr>
-          <p:cNvPr id="5" name="Icon FaBuildingColumns"/>
+          <p:cNvPr id="5" name="Icon FaBuildingColumns" descr="">
+            <a:extLst>
+              <a:ext uri="{C183D7F6-B498-43B3-948B-1728B52AA6E4}">
+                <adec:decorative xmlns:adec="http://schemas.microsoft.com/office/drawing/2017/decorative" val="1"/>
+              </a:ext>
+            </a:extLst>
+          </p:cNvPr>
           <p:cNvSpPr/>
           <p:nvPr/>
         </p:nvSpPr>
@@ -23325,7 +24237,13 @@
       </p:sp>
       <p:pic>
         <p:nvPicPr>
-          <p:cNvPr id="6" name="Image 0" descr="C:\Users\whale\git\uiao\inbox\SSA-Interview\build\icons\FaBuildingColumns.png">    </p:cNvPr>
+          <p:cNvPr id="6" name="Image 0" descr="">
+            <a:extLst>
+              <a:ext uri="{C183D7F6-B498-43B3-948B-1728B52AA6E4}">
+                <adec:decorative xmlns:adec="http://schemas.microsoft.com/office/drawing/2017/decorative" val="1"/>
+              </a:ext>
+            </a:extLst>
+          </p:cNvPr>
           <p:cNvPicPr>
             <a:picLocks noChangeAspect="1"/>
           </p:cNvPicPr>
@@ -23405,7 +24323,13 @@
       </p:sp>
       <p:sp>
         <p:nvSpPr>
-          <p:cNvPr id="8" name="Icon FaRightLeft"/>
+          <p:cNvPr id="8" name="Icon FaRightLeft" descr="">
+            <a:extLst>
+              <a:ext uri="{C183D7F6-B498-43B3-948B-1728B52AA6E4}">
+                <adec:decorative xmlns:adec="http://schemas.microsoft.com/office/drawing/2017/decorative" val="1"/>
+              </a:ext>
+            </a:extLst>
+          </p:cNvPr>
           <p:cNvSpPr/>
           <p:nvPr/>
         </p:nvSpPr>
@@ -23430,7 +24354,13 @@
       </p:sp>
       <p:pic>
         <p:nvPicPr>
-          <p:cNvPr id="9" name="Image 1" descr="C:\Users\whale\git\uiao\inbox\SSA-Interview\build\icons\FaRightLeft.png">    </p:cNvPr>
+          <p:cNvPr id="9" name="Image 1" descr="">
+            <a:extLst>
+              <a:ext uri="{C183D7F6-B498-43B3-948B-1728B52AA6E4}">
+                <adec:decorative xmlns:adec="http://schemas.microsoft.com/office/drawing/2017/decorative" val="1"/>
+              </a:ext>
+            </a:extLst>
+          </p:cNvPr>
           <p:cNvPicPr>
             <a:picLocks noChangeAspect="1"/>
           </p:cNvPicPr>
@@ -23510,7 +24440,13 @@
       </p:sp>
       <p:sp>
         <p:nvSpPr>
-          <p:cNvPr id="11" name="Icon FaChartLine"/>
+          <p:cNvPr id="11" name="Icon FaChartLine" descr="">
+            <a:extLst>
+              <a:ext uri="{C183D7F6-B498-43B3-948B-1728B52AA6E4}">
+                <adec:decorative xmlns:adec="http://schemas.microsoft.com/office/drawing/2017/decorative" val="1"/>
+              </a:ext>
+            </a:extLst>
+          </p:cNvPr>
           <p:cNvSpPr/>
           <p:nvPr/>
         </p:nvSpPr>
@@ -23535,7 +24471,13 @@
       </p:sp>
       <p:pic>
         <p:nvPicPr>
-          <p:cNvPr id="12" name="Image 2" descr="C:\Users\whale\git\uiao\inbox\SSA-Interview\build\icons\FaChartLine.png">    </p:cNvPr>
+          <p:cNvPr id="12" name="Image 2" descr="">
+            <a:extLst>
+              <a:ext uri="{C183D7F6-B498-43B3-948B-1728B52AA6E4}">
+                <adec:decorative xmlns:adec="http://schemas.microsoft.com/office/drawing/2017/decorative" val="1"/>
+              </a:ext>
+            </a:extLst>
+          </p:cNvPr>
           <p:cNvPicPr>
             <a:picLocks noChangeAspect="1"/>
           </p:cNvPicPr>
@@ -23615,7 +24557,13 @@
       </p:sp>
       <p:sp>
         <p:nvSpPr>
-          <p:cNvPr id="14" name="Cross col 2"/>
+          <p:cNvPr id="14" name="Cross col 2" descr="">
+            <a:extLst>
+              <a:ext uri="{C183D7F6-B498-43B3-948B-1728B52AA6E4}">
+                <adec:decorative xmlns:adec="http://schemas.microsoft.com/office/drawing/2017/decorative" val="1"/>
+              </a:ext>
+            </a:extLst>
+          </p:cNvPr>
           <p:cNvSpPr/>
           <p:nvPr/>
         </p:nvSpPr>
@@ -23685,7 +24633,13 @@
       </p:sp>
       <p:sp>
         <p:nvSpPr>
-          <p:cNvPr id="16" name="Icon FaPeopleArrows"/>
+          <p:cNvPr id="16" name="Icon FaPeopleArrows" descr="">
+            <a:extLst>
+              <a:ext uri="{C183D7F6-B498-43B3-948B-1728B52AA6E4}">
+                <adec:decorative xmlns:adec="http://schemas.microsoft.com/office/drawing/2017/decorative" val="1"/>
+              </a:ext>
+            </a:extLst>
+          </p:cNvPr>
           <p:cNvSpPr/>
           <p:nvPr/>
         </p:nvSpPr>
@@ -23710,7 +24664,13 @@
       </p:sp>
       <p:pic>
         <p:nvPicPr>
-          <p:cNvPr id="17" name="Image 3" descr="C:\Users\whale\git\uiao\inbox\SSA-Interview\build\icons\FaPeopleArrows.png">    </p:cNvPr>
+          <p:cNvPr id="17" name="Image 3" descr="">
+            <a:extLst>
+              <a:ext uri="{C183D7F6-B498-43B3-948B-1728B52AA6E4}">
+                <adec:decorative xmlns:adec="http://schemas.microsoft.com/office/drawing/2017/decorative" val="1"/>
+              </a:ext>
+            </a:extLst>
+          </p:cNvPr>
           <p:cNvPicPr>
             <a:picLocks noChangeAspect="1"/>
           </p:cNvPicPr>
@@ -23790,7 +24750,13 @@
       </p:sp>
       <p:sp>
         <p:nvSpPr>
-          <p:cNvPr id="19" name="Icon FaScaleBalanced"/>
+          <p:cNvPr id="19" name="Icon FaScaleBalanced" descr="">
+            <a:extLst>
+              <a:ext uri="{C183D7F6-B498-43B3-948B-1728B52AA6E4}">
+                <adec:decorative xmlns:adec="http://schemas.microsoft.com/office/drawing/2017/decorative" val="1"/>
+              </a:ext>
+            </a:extLst>
+          </p:cNvPr>
           <p:cNvSpPr/>
           <p:nvPr/>
         </p:nvSpPr>
@@ -23815,7 +24781,13 @@
       </p:sp>
       <p:pic>
         <p:nvPicPr>
-          <p:cNvPr id="20" name="Image 4" descr="C:\Users\whale\git\uiao\inbox\SSA-Interview\build\icons\FaScaleBalanced.png">    </p:cNvPr>
+          <p:cNvPr id="20" name="Image 4" descr="">
+            <a:extLst>
+              <a:ext uri="{C183D7F6-B498-43B3-948B-1728B52AA6E4}">
+                <adec:decorative xmlns:adec="http://schemas.microsoft.com/office/drawing/2017/decorative" val="1"/>
+              </a:ext>
+            </a:extLst>
+          </p:cNvPr>
           <p:cNvPicPr>
             <a:picLocks noChangeAspect="1"/>
           </p:cNvPicPr>
@@ -23895,7 +24867,13 @@
       </p:sp>
       <p:sp>
         <p:nvSpPr>
-          <p:cNvPr id="22" name="Icon FaUsersGear"/>
+          <p:cNvPr id="22" name="Icon FaUsersGear" descr="">
+            <a:extLst>
+              <a:ext uri="{C183D7F6-B498-43B3-948B-1728B52AA6E4}">
+                <adec:decorative xmlns:adec="http://schemas.microsoft.com/office/drawing/2017/decorative" val="1"/>
+              </a:ext>
+            </a:extLst>
+          </p:cNvPr>
           <p:cNvSpPr/>
           <p:nvPr/>
         </p:nvSpPr>
@@ -23920,7 +24898,13 @@
       </p:sp>
       <p:pic>
         <p:nvPicPr>
-          <p:cNvPr id="23" name="Image 5" descr="C:\Users\whale\git\uiao\inbox\SSA-Interview\build\icons\FaUsersGear.png">    </p:cNvPr>
+          <p:cNvPr id="23" name="Image 5" descr="">
+            <a:extLst>
+              <a:ext uri="{C183D7F6-B498-43B3-948B-1728B52AA6E4}">
+                <adec:decorative xmlns:adec="http://schemas.microsoft.com/office/drawing/2017/decorative" val="1"/>
+              </a:ext>
+            </a:extLst>
+          </p:cNvPr>
           <p:cNvPicPr>
             <a:picLocks noChangeAspect="1"/>
           </p:cNvPicPr>
@@ -24000,7 +24984,13 @@
       </p:sp>
       <p:sp>
         <p:nvSpPr>
-          <p:cNvPr id="25" name="Cross banner"/>
+          <p:cNvPr id="25" name="Cross banner" descr="">
+            <a:extLst>
+              <a:ext uri="{C183D7F6-B498-43B3-948B-1728B52AA6E4}">
+                <adec:decorative xmlns:adec="http://schemas.microsoft.com/office/drawing/2017/decorative" val="1"/>
+              </a:ext>
+            </a:extLst>
+          </p:cNvPr>
           <p:cNvSpPr/>
           <p:nvPr/>
         </p:nvSpPr>
@@ -24192,7 +25182,13 @@
       </p:sp>
       <p:sp>
         <p:nvSpPr>
-          <p:cNvPr id="3" name="Shape 1"/>
+          <p:cNvPr id="3" name="Shape 1" descr="">
+            <a:extLst>
+              <a:ext uri="{C183D7F6-B498-43B3-948B-1728B52AA6E4}">
+                <adec:decorative xmlns:adec="http://schemas.microsoft.com/office/drawing/2017/decorative" val="1"/>
+              </a:ext>
+            </a:extLst>
+          </p:cNvPr>
           <p:cNvSpPr/>
           <p:nvPr/>
         </p:nvSpPr>
@@ -24215,7 +25211,13 @@
       </p:sp>
       <p:sp>
         <p:nvSpPr>
-          <p:cNvPr id="4" name="Roadmap dot 1"/>
+          <p:cNvPr id="4" name="Roadmap dot 1" descr="">
+            <a:extLst>
+              <a:ext uri="{C183D7F6-B498-43B3-948B-1728B52AA6E4}">
+                <adec:decorative xmlns:adec="http://schemas.microsoft.com/office/drawing/2017/decorative" val="1"/>
+              </a:ext>
+            </a:extLst>
+          </p:cNvPr>
           <p:cNvSpPr/>
           <p:nvPr/>
         </p:nvSpPr>
@@ -24332,7 +25334,13 @@
       </p:sp>
       <p:sp>
         <p:nvSpPr>
-          <p:cNvPr id="7" name="Roadmap dot 2"/>
+          <p:cNvPr id="7" name="Roadmap dot 2" descr="">
+            <a:extLst>
+              <a:ext uri="{C183D7F6-B498-43B3-948B-1728B52AA6E4}">
+                <adec:decorative xmlns:adec="http://schemas.microsoft.com/office/drawing/2017/decorative" val="1"/>
+              </a:ext>
+            </a:extLst>
+          </p:cNvPr>
           <p:cNvSpPr/>
           <p:nvPr/>
         </p:nvSpPr>
@@ -24449,7 +25457,13 @@
       </p:sp>
       <p:sp>
         <p:nvSpPr>
-          <p:cNvPr id="10" name="Roadmap dot 3"/>
+          <p:cNvPr id="10" name="Roadmap dot 3" descr="">
+            <a:extLst>
+              <a:ext uri="{C183D7F6-B498-43B3-948B-1728B52AA6E4}">
+                <adec:decorative xmlns:adec="http://schemas.microsoft.com/office/drawing/2017/decorative" val="1"/>
+              </a:ext>
+            </a:extLst>
+          </p:cNvPr>
           <p:cNvSpPr/>
           <p:nvPr/>
         </p:nvSpPr>
@@ -24566,7 +25580,13 @@
       </p:sp>
       <p:sp>
         <p:nvSpPr>
-          <p:cNvPr id="13" name="Roadmap dot 4"/>
+          <p:cNvPr id="13" name="Roadmap dot 4" descr="">
+            <a:extLst>
+              <a:ext uri="{C183D7F6-B498-43B3-948B-1728B52AA6E4}">
+                <adec:decorative xmlns:adec="http://schemas.microsoft.com/office/drawing/2017/decorative" val="1"/>
+              </a:ext>
+            </a:extLst>
+          </p:cNvPr>
           <p:cNvSpPr/>
           <p:nvPr/>
         </p:nvSpPr>
@@ -24683,7 +25703,13 @@
       </p:sp>
       <p:sp>
         <p:nvSpPr>
-          <p:cNvPr id="16" name="Roadmap dot 5"/>
+          <p:cNvPr id="16" name="Roadmap dot 5" descr="">
+            <a:extLst>
+              <a:ext uri="{C183D7F6-B498-43B3-948B-1728B52AA6E4}">
+                <adec:decorative xmlns:adec="http://schemas.microsoft.com/office/drawing/2017/decorative" val="1"/>
+              </a:ext>
+            </a:extLst>
+          </p:cNvPr>
           <p:cNvSpPr/>
           <p:nvPr/>
         </p:nvSpPr>
@@ -24800,7 +25826,13 @@
       </p:sp>
       <p:sp>
         <p:nvSpPr>
-          <p:cNvPr id="19" name="Ask"/>
+          <p:cNvPr id="19" name="Ask" descr="">
+            <a:extLst>
+              <a:ext uri="{C183D7F6-B498-43B3-948B-1728B52AA6E4}">
+                <adec:decorative xmlns:adec="http://schemas.microsoft.com/office/drawing/2017/decorative" val="1"/>
+              </a:ext>
+            </a:extLst>
+          </p:cNvPr>
           <p:cNvSpPr/>
           <p:nvPr/>
         </p:nvSpPr>
@@ -24834,7 +25866,13 @@
       </p:sp>
       <p:sp>
         <p:nvSpPr>
-          <p:cNvPr id="20" name="Icon FaLightbulb"/>
+          <p:cNvPr id="20" name="Icon FaLightbulb" descr="">
+            <a:extLst>
+              <a:ext uri="{C183D7F6-B498-43B3-948B-1728B52AA6E4}">
+                <adec:decorative xmlns:adec="http://schemas.microsoft.com/office/drawing/2017/decorative" val="1"/>
+              </a:ext>
+            </a:extLst>
+          </p:cNvPr>
           <p:cNvSpPr/>
           <p:nvPr/>
         </p:nvSpPr>
@@ -24859,7 +25897,13 @@
       </p:sp>
       <p:pic>
         <p:nvPicPr>
-          <p:cNvPr id="21" name="Image 0" descr="C:\Users\whale\git\uiao\inbox\SSA-Interview\build\icons\FaLightbulb.png">    </p:cNvPr>
+          <p:cNvPr id="21" name="Image 0" descr="">
+            <a:extLst>
+              <a:ext uri="{C183D7F6-B498-43B3-948B-1728B52AA6E4}">
+                <adec:decorative xmlns:adec="http://schemas.microsoft.com/office/drawing/2017/decorative" val="1"/>
+              </a:ext>
+            </a:extLst>
+          </p:cNvPr>
           <p:cNvPicPr>
             <a:picLocks noChangeAspect="1"/>
           </p:cNvPicPr>
@@ -24930,7 +25974,13 @@
       </p:sp>
       <p:sp>
         <p:nvSpPr>
-          <p:cNvPr id="23" name="EDA contribution"/>
+          <p:cNvPr id="23" name="EDA contribution" descr="">
+            <a:extLst>
+              <a:ext uri="{C183D7F6-B498-43B3-948B-1728B52AA6E4}">
+                <adec:decorative xmlns:adec="http://schemas.microsoft.com/office/drawing/2017/decorative" val="1"/>
+              </a:ext>
+            </a:extLst>
+          </p:cNvPr>
           <p:cNvSpPr/>
           <p:nvPr/>
         </p:nvSpPr>
@@ -25122,7 +26172,13 @@
       </p:sp>
       <p:sp>
         <p:nvSpPr>
-          <p:cNvPr id="3" name="Tag What"/>
+          <p:cNvPr id="3" name="Tag What" descr="">
+            <a:extLst>
+              <a:ext uri="{C183D7F6-B498-43B3-948B-1728B52AA6E4}">
+                <adec:decorative xmlns:adec="http://schemas.microsoft.com/office/drawing/2017/decorative" val="1"/>
+              </a:ext>
+            </a:extLst>
+          </p:cNvPr>
           <p:cNvSpPr/>
           <p:nvPr/>
         </p:nvSpPr>
@@ -25204,7 +26260,7 @@
         <a:graphic>
           <a:graphicData uri="http://schemas.openxmlformats.org/drawingml/2006/table">
             <a:tbl>
-              <a:tblPr/>
+              <a:tblPr firstRow="1" bandRow="1"/>
               <a:tblGrid>
                 <a:gridCol w="3429000"/>
                 <a:gridCol w="1600200"/>
@@ -27353,7 +28409,13 @@
       </p:graphicFrame>
       <p:sp>
         <p:nvSpPr>
-          <p:cNvPr id="6" name="Judgment"/>
+          <p:cNvPr id="6" name="Judgment" descr="">
+            <a:extLst>
+              <a:ext uri="{C183D7F6-B498-43B3-948B-1728B52AA6E4}">
+                <adec:decorative xmlns:adec="http://schemas.microsoft.com/office/drawing/2017/decorative" val="1"/>
+              </a:ext>
+            </a:extLst>
+          </p:cNvPr>
           <p:cNvSpPr/>
           <p:nvPr/>
         </p:nvSpPr>
@@ -27387,7 +28449,13 @@
       </p:sp>
       <p:sp>
         <p:nvSpPr>
-          <p:cNvPr id="7" name="Icon FaScaleBalanced"/>
+          <p:cNvPr id="7" name="Icon FaScaleBalanced" descr="">
+            <a:extLst>
+              <a:ext uri="{C183D7F6-B498-43B3-948B-1728B52AA6E4}">
+                <adec:decorative xmlns:adec="http://schemas.microsoft.com/office/drawing/2017/decorative" val="1"/>
+              </a:ext>
+            </a:extLst>
+          </p:cNvPr>
           <p:cNvSpPr/>
           <p:nvPr/>
         </p:nvSpPr>
@@ -27412,7 +28480,13 @@
       </p:sp>
       <p:pic>
         <p:nvPicPr>
-          <p:cNvPr id="8" name="Image 0" descr="C:\Users\whale\git\uiao\inbox\SSA-Interview\build\icons\FaScaleBalanced.png">    </p:cNvPr>
+          <p:cNvPr id="8" name="Image 0" descr="">
+            <a:extLst>
+              <a:ext uri="{C183D7F6-B498-43B3-948B-1728B52AA6E4}">
+                <adec:decorative xmlns:adec="http://schemas.microsoft.com/office/drawing/2017/decorative" val="1"/>
+              </a:ext>
+            </a:extLst>
+          </p:cNvPr>
           <p:cNvPicPr>
             <a:picLocks noChangeAspect="1"/>
           </p:cNvPicPr>
@@ -27594,7 +28668,13 @@
       </p:sp>
       <p:sp>
         <p:nvSpPr>
-          <p:cNvPr id="3" name="Tag What"/>
+          <p:cNvPr id="3" name="Tag What" descr="">
+            <a:extLst>
+              <a:ext uri="{C183D7F6-B498-43B3-948B-1728B52AA6E4}">
+                <adec:decorative xmlns:adec="http://schemas.microsoft.com/office/drawing/2017/decorative" val="1"/>
+              </a:ext>
+            </a:extLst>
+          </p:cNvPr>
           <p:cNvSpPr/>
           <p:nvPr/>
         </p:nvSpPr>
@@ -27657,7 +28737,13 @@
       </p:sp>
       <p:sp>
         <p:nvSpPr>
-          <p:cNvPr id="5" name="Reason 1"/>
+          <p:cNvPr id="5" name="Reason 1" descr="">
+            <a:extLst>
+              <a:ext uri="{C183D7F6-B498-43B3-948B-1728B52AA6E4}">
+                <adec:decorative xmlns:adec="http://schemas.microsoft.com/office/drawing/2017/decorative" val="1"/>
+              </a:ext>
+            </a:extLst>
+          </p:cNvPr>
           <p:cNvSpPr/>
           <p:nvPr/>
         </p:nvSpPr>
@@ -27691,7 +28777,13 @@
       </p:sp>
       <p:sp>
         <p:nvSpPr>
-          <p:cNvPr id="6" name="Icon FaUsersGear"/>
+          <p:cNvPr id="6" name="Icon FaUsersGear" descr="">
+            <a:extLst>
+              <a:ext uri="{C183D7F6-B498-43B3-948B-1728B52AA6E4}">
+                <adec:decorative xmlns:adec="http://schemas.microsoft.com/office/drawing/2017/decorative" val="1"/>
+              </a:ext>
+            </a:extLst>
+          </p:cNvPr>
           <p:cNvSpPr/>
           <p:nvPr/>
         </p:nvSpPr>
@@ -27716,7 +28808,13 @@
       </p:sp>
       <p:pic>
         <p:nvPicPr>
-          <p:cNvPr id="7" name="Image 0" descr="C:\Users\whale\git\uiao\inbox\SSA-Interview\build\icons\FaUsersGear.png">    </p:cNvPr>
+          <p:cNvPr id="7" name="Image 0" descr="">
+            <a:extLst>
+              <a:ext uri="{C183D7F6-B498-43B3-948B-1728B52AA6E4}">
+                <adec:decorative xmlns:adec="http://schemas.microsoft.com/office/drawing/2017/decorative" val="1"/>
+              </a:ext>
+            </a:extLst>
+          </p:cNvPr>
           <p:cNvPicPr>
             <a:picLocks noChangeAspect="1"/>
           </p:cNvPicPr>
@@ -27799,7 +28897,13 @@
       </p:sp>
       <p:sp>
         <p:nvSpPr>
-          <p:cNvPr id="9" name="Reason 2"/>
+          <p:cNvPr id="9" name="Reason 2" descr="">
+            <a:extLst>
+              <a:ext uri="{C183D7F6-B498-43B3-948B-1728B52AA6E4}">
+                <adec:decorative xmlns:adec="http://schemas.microsoft.com/office/drawing/2017/decorative" val="1"/>
+              </a:ext>
+            </a:extLst>
+          </p:cNvPr>
           <p:cNvSpPr/>
           <p:nvPr/>
         </p:nvSpPr>
@@ -27833,7 +28937,13 @@
       </p:sp>
       <p:sp>
         <p:nvSpPr>
-          <p:cNvPr id="10" name="Icon FaChartLine"/>
+          <p:cNvPr id="10" name="Icon FaChartLine" descr="">
+            <a:extLst>
+              <a:ext uri="{C183D7F6-B498-43B3-948B-1728B52AA6E4}">
+                <adec:decorative xmlns:adec="http://schemas.microsoft.com/office/drawing/2017/decorative" val="1"/>
+              </a:ext>
+            </a:extLst>
+          </p:cNvPr>
           <p:cNvSpPr/>
           <p:nvPr/>
         </p:nvSpPr>
@@ -27858,7 +28968,13 @@
       </p:sp>
       <p:pic>
         <p:nvPicPr>
-          <p:cNvPr id="11" name="Image 1" descr="C:\Users\whale\git\uiao\inbox\SSA-Interview\build\icons\FaChartLine.png">    </p:cNvPr>
+          <p:cNvPr id="11" name="Image 1" descr="">
+            <a:extLst>
+              <a:ext uri="{C183D7F6-B498-43B3-948B-1728B52AA6E4}">
+                <adec:decorative xmlns:adec="http://schemas.microsoft.com/office/drawing/2017/decorative" val="1"/>
+              </a:ext>
+            </a:extLst>
+          </p:cNvPr>
           <p:cNvPicPr>
             <a:picLocks noChangeAspect="1"/>
           </p:cNvPicPr>
@@ -27941,7 +29057,13 @@
       </p:sp>
       <p:sp>
         <p:nvSpPr>
-          <p:cNvPr id="13" name="Reason 3"/>
+          <p:cNvPr id="13" name="Reason 3" descr="">
+            <a:extLst>
+              <a:ext uri="{C183D7F6-B498-43B3-948B-1728B52AA6E4}">
+                <adec:decorative xmlns:adec="http://schemas.microsoft.com/office/drawing/2017/decorative" val="1"/>
+              </a:ext>
+            </a:extLst>
+          </p:cNvPr>
           <p:cNvSpPr/>
           <p:nvPr/>
         </p:nvSpPr>
@@ -27975,7 +29097,13 @@
       </p:sp>
       <p:sp>
         <p:nvSpPr>
-          <p:cNvPr id="14" name="Icon FaShieldHalved"/>
+          <p:cNvPr id="14" name="Icon FaShieldHalved" descr="">
+            <a:extLst>
+              <a:ext uri="{C183D7F6-B498-43B3-948B-1728B52AA6E4}">
+                <adec:decorative xmlns:adec="http://schemas.microsoft.com/office/drawing/2017/decorative" val="1"/>
+              </a:ext>
+            </a:extLst>
+          </p:cNvPr>
           <p:cNvSpPr/>
           <p:nvPr/>
         </p:nvSpPr>
@@ -28000,7 +29128,13 @@
       </p:sp>
       <p:pic>
         <p:nvPicPr>
-          <p:cNvPr id="15" name="Image 2" descr="C:\Users\whale\git\uiao\inbox\SSA-Interview\build\icons\FaShieldHalved.png">    </p:cNvPr>
+          <p:cNvPr id="15" name="Image 2" descr="">
+            <a:extLst>
+              <a:ext uri="{C183D7F6-B498-43B3-948B-1728B52AA6E4}">
+                <adec:decorative xmlns:adec="http://schemas.microsoft.com/office/drawing/2017/decorative" val="1"/>
+              </a:ext>
+            </a:extLst>
+          </p:cNvPr>
           <p:cNvPicPr>
             <a:picLocks noChangeAspect="1"/>
           </p:cNvPicPr>
@@ -28083,7 +29217,13 @@
       </p:sp>
       <p:sp>
         <p:nvSpPr>
-          <p:cNvPr id="17" name="Reason 4"/>
+          <p:cNvPr id="17" name="Reason 4" descr="">
+            <a:extLst>
+              <a:ext uri="{C183D7F6-B498-43B3-948B-1728B52AA6E4}">
+                <adec:decorative xmlns:adec="http://schemas.microsoft.com/office/drawing/2017/decorative" val="1"/>
+              </a:ext>
+            </a:extLst>
+          </p:cNvPr>
           <p:cNvSpPr/>
           <p:nvPr/>
         </p:nvSpPr>
@@ -28117,7 +29257,13 @@
       </p:sp>
       <p:sp>
         <p:nvSpPr>
-          <p:cNvPr id="18" name="Icon FaArrowsRotate"/>
+          <p:cNvPr id="18" name="Icon FaArrowsRotate" descr="">
+            <a:extLst>
+              <a:ext uri="{C183D7F6-B498-43B3-948B-1728B52AA6E4}">
+                <adec:decorative xmlns:adec="http://schemas.microsoft.com/office/drawing/2017/decorative" val="1"/>
+              </a:ext>
+            </a:extLst>
+          </p:cNvPr>
           <p:cNvSpPr/>
           <p:nvPr/>
         </p:nvSpPr>
@@ -28142,7 +29288,13 @@
       </p:sp>
       <p:pic>
         <p:nvPicPr>
-          <p:cNvPr id="19" name="Image 3" descr="C:\Users\whale\git\uiao\inbox\SSA-Interview\build\icons\FaArrowsRotate.png">    </p:cNvPr>
+          <p:cNvPr id="19" name="Image 3" descr="">
+            <a:extLst>
+              <a:ext uri="{C183D7F6-B498-43B3-948B-1728B52AA6E4}">
+                <adec:decorative xmlns:adec="http://schemas.microsoft.com/office/drawing/2017/decorative" val="1"/>
+              </a:ext>
+            </a:extLst>
+          </p:cNvPr>
           <p:cNvPicPr>
             <a:picLocks noChangeAspect="1"/>
           </p:cNvPicPr>
@@ -28225,7 +29377,13 @@
       </p:sp>
       <p:sp>
         <p:nvSpPr>
-          <p:cNvPr id="21" name="Limits"/>
+          <p:cNvPr id="21" name="Limits" descr="">
+            <a:extLst>
+              <a:ext uri="{C183D7F6-B498-43B3-948B-1728B52AA6E4}">
+                <adec:decorative xmlns:adec="http://schemas.microsoft.com/office/drawing/2017/decorative" val="1"/>
+              </a:ext>
+            </a:extLst>
+          </p:cNvPr>
           <p:cNvSpPr/>
           <p:nvPr/>
         </p:nvSpPr>
@@ -28306,7 +29464,13 @@
       </p:sp>
       <p:sp>
         <p:nvSpPr>
-          <p:cNvPr id="23" name="Upside"/>
+          <p:cNvPr id="23" name="Upside" descr="">
+            <a:extLst>
+              <a:ext uri="{C183D7F6-B498-43B3-948B-1728B52AA6E4}">
+                <adec:decorative xmlns:adec="http://schemas.microsoft.com/office/drawing/2017/decorative" val="1"/>
+              </a:ext>
+            </a:extLst>
+          </p:cNvPr>
           <p:cNvSpPr/>
           <p:nvPr/>
         </p:nvSpPr>
@@ -28498,7 +29662,13 @@
       </p:sp>
       <p:sp>
         <p:nvSpPr>
-          <p:cNvPr id="3" name="Tag Who"/>
+          <p:cNvPr id="3" name="Tag Who" descr="">
+            <a:extLst>
+              <a:ext uri="{C183D7F6-B498-43B3-948B-1728B52AA6E4}">
+                <adec:decorative xmlns:adec="http://schemas.microsoft.com/office/drawing/2017/decorative" val="1"/>
+              </a:ext>
+            </a:extLst>
+          </p:cNvPr>
           <p:cNvSpPr/>
           <p:nvPr/>
         </p:nvSpPr>
@@ -28561,7 +29731,13 @@
       </p:sp>
       <p:sp>
         <p:nvSpPr>
-          <p:cNvPr id="5" name="Who col 1"/>
+          <p:cNvPr id="5" name="Who col 1" descr="">
+            <a:extLst>
+              <a:ext uri="{C183D7F6-B498-43B3-948B-1728B52AA6E4}">
+                <adec:decorative xmlns:adec="http://schemas.microsoft.com/office/drawing/2017/decorative" val="1"/>
+              </a:ext>
+            </a:extLst>
+          </p:cNvPr>
           <p:cNvSpPr/>
           <p:nvPr/>
         </p:nvSpPr>
@@ -28595,7 +29771,13 @@
       </p:sp>
       <p:sp>
         <p:nvSpPr>
-          <p:cNvPr id="6" name="Icon FaBuildingColumns"/>
+          <p:cNvPr id="6" name="Icon FaBuildingColumns" descr="">
+            <a:extLst>
+              <a:ext uri="{C183D7F6-B498-43B3-948B-1728B52AA6E4}">
+                <adec:decorative xmlns:adec="http://schemas.microsoft.com/office/drawing/2017/decorative" val="1"/>
+              </a:ext>
+            </a:extLst>
+          </p:cNvPr>
           <p:cNvSpPr/>
           <p:nvPr/>
         </p:nvSpPr>
@@ -28620,7 +29802,13 @@
       </p:sp>
       <p:pic>
         <p:nvPicPr>
-          <p:cNvPr id="7" name="Image 0" descr="C:\Users\whale\git\uiao\inbox\SSA-Interview\build\icons\FaBuildingColumns.png">    </p:cNvPr>
+          <p:cNvPr id="7" name="Image 0" descr="">
+            <a:extLst>
+              <a:ext uri="{C183D7F6-B498-43B3-948B-1728B52AA6E4}">
+                <adec:decorative xmlns:adec="http://schemas.microsoft.com/office/drawing/2017/decorative" val="1"/>
+              </a:ext>
+            </a:extLst>
+          </p:cNvPr>
           <p:cNvPicPr>
             <a:picLocks noChangeAspect="1"/>
           </p:cNvPicPr>
@@ -28773,7 +29961,13 @@
       </p:sp>
       <p:sp>
         <p:nvSpPr>
-          <p:cNvPr id="10" name="Who col 2"/>
+          <p:cNvPr id="10" name="Who col 2" descr="">
+            <a:extLst>
+              <a:ext uri="{C183D7F6-B498-43B3-948B-1728B52AA6E4}">
+                <adec:decorative xmlns:adec="http://schemas.microsoft.com/office/drawing/2017/decorative" val="1"/>
+              </a:ext>
+            </a:extLst>
+          </p:cNvPr>
           <p:cNvSpPr/>
           <p:nvPr/>
         </p:nvSpPr>
@@ -28807,7 +30001,13 @@
       </p:sp>
       <p:sp>
         <p:nvSpPr>
-          <p:cNvPr id="11" name="Icon FaUsersGear"/>
+          <p:cNvPr id="11" name="Icon FaUsersGear" descr="">
+            <a:extLst>
+              <a:ext uri="{C183D7F6-B498-43B3-948B-1728B52AA6E4}">
+                <adec:decorative xmlns:adec="http://schemas.microsoft.com/office/drawing/2017/decorative" val="1"/>
+              </a:ext>
+            </a:extLst>
+          </p:cNvPr>
           <p:cNvSpPr/>
           <p:nvPr/>
         </p:nvSpPr>
@@ -28832,7 +30032,13 @@
       </p:sp>
       <p:pic>
         <p:nvPicPr>
-          <p:cNvPr id="12" name="Image 1" descr="C:\Users\whale\git\uiao\inbox\SSA-Interview\build\icons\FaUsersGear.png">    </p:cNvPr>
+          <p:cNvPr id="12" name="Image 1" descr="">
+            <a:extLst>
+              <a:ext uri="{C183D7F6-B498-43B3-948B-1728B52AA6E4}">
+                <adec:decorative xmlns:adec="http://schemas.microsoft.com/office/drawing/2017/decorative" val="1"/>
+              </a:ext>
+            </a:extLst>
+          </p:cNvPr>
           <p:cNvPicPr>
             <a:picLocks noChangeAspect="1"/>
           </p:cNvPicPr>
@@ -29019,7 +30225,13 @@
       </p:sp>
       <p:sp>
         <p:nvSpPr>
-          <p:cNvPr id="15" name="Who col 3"/>
+          <p:cNvPr id="15" name="Who col 3" descr="">
+            <a:extLst>
+              <a:ext uri="{C183D7F6-B498-43B3-948B-1728B52AA6E4}">
+                <adec:decorative xmlns:adec="http://schemas.microsoft.com/office/drawing/2017/decorative" val="1"/>
+              </a:ext>
+            </a:extLst>
+          </p:cNvPr>
           <p:cNvSpPr/>
           <p:nvPr/>
         </p:nvSpPr>
@@ -29053,7 +30265,13 @@
       </p:sp>
       <p:sp>
         <p:nvSpPr>
-          <p:cNvPr id="16" name="Icon FaShieldHalved"/>
+          <p:cNvPr id="16" name="Icon FaShieldHalved" descr="">
+            <a:extLst>
+              <a:ext uri="{C183D7F6-B498-43B3-948B-1728B52AA6E4}">
+                <adec:decorative xmlns:adec="http://schemas.microsoft.com/office/drawing/2017/decorative" val="1"/>
+              </a:ext>
+            </a:extLst>
+          </p:cNvPr>
           <p:cNvSpPr/>
           <p:nvPr/>
         </p:nvSpPr>
@@ -29078,7 +30296,13 @@
       </p:sp>
       <p:pic>
         <p:nvPicPr>
-          <p:cNvPr id="17" name="Image 2" descr="C:\Users\whale\git\uiao\inbox\SSA-Interview\build\icons\FaShieldHalved.png">    </p:cNvPr>
+          <p:cNvPr id="17" name="Image 2" descr="">
+            <a:extLst>
+              <a:ext uri="{C183D7F6-B498-43B3-948B-1728B52AA6E4}">
+                <adec:decorative xmlns:adec="http://schemas.microsoft.com/office/drawing/2017/decorative" val="1"/>
+              </a:ext>
+            </a:extLst>
+          </p:cNvPr>
           <p:cNvPicPr>
             <a:picLocks noChangeAspect="1"/>
           </p:cNvPicPr>
@@ -29265,7 +30489,13 @@
       </p:sp>
       <p:sp>
         <p:nvSpPr>
-          <p:cNvPr id="20" name="My role"/>
+          <p:cNvPr id="20" name="My role" descr="">
+            <a:extLst>
+              <a:ext uri="{C183D7F6-B498-43B3-948B-1728B52AA6E4}">
+                <adec:decorative xmlns:adec="http://schemas.microsoft.com/office/drawing/2017/decorative" val="1"/>
+              </a:ext>
+            </a:extLst>
+          </p:cNvPr>
           <p:cNvSpPr/>
           <p:nvPr/>
         </p:nvSpPr>
@@ -29299,7 +30529,13 @@
       </p:sp>
       <p:sp>
         <p:nvSpPr>
-          <p:cNvPr id="21" name="Icon FaSitemap"/>
+          <p:cNvPr id="21" name="Icon FaSitemap" descr="">
+            <a:extLst>
+              <a:ext uri="{C183D7F6-B498-43B3-948B-1728B52AA6E4}">
+                <adec:decorative xmlns:adec="http://schemas.microsoft.com/office/drawing/2017/decorative" val="1"/>
+              </a:ext>
+            </a:extLst>
+          </p:cNvPr>
           <p:cNvSpPr/>
           <p:nvPr/>
         </p:nvSpPr>
@@ -29324,7 +30560,13 @@
       </p:sp>
       <p:pic>
         <p:nvPicPr>
-          <p:cNvPr id="22" name="Image 3" descr="C:\Users\whale\git\uiao\inbox\SSA-Interview\build\icons\FaSitemap.png">    </p:cNvPr>
+          <p:cNvPr id="22" name="Image 3" descr="">
+            <a:extLst>
+              <a:ext uri="{C183D7F6-B498-43B3-948B-1728B52AA6E4}">
+                <adec:decorative xmlns:adec="http://schemas.microsoft.com/office/drawing/2017/decorative" val="1"/>
+              </a:ext>
+            </a:extLst>
+          </p:cNvPr>
           <p:cNvPicPr>
             <a:picLocks noChangeAspect="1"/>
           </p:cNvPicPr>
@@ -29506,7 +30748,13 @@
       </p:sp>
       <p:sp>
         <p:nvSpPr>
-          <p:cNvPr id="3" name="Tag How"/>
+          <p:cNvPr id="3" name="Tag How" descr="">
+            <a:extLst>
+              <a:ext uri="{C183D7F6-B498-43B3-948B-1728B52AA6E4}">
+                <adec:decorative xmlns:adec="http://schemas.microsoft.com/office/drawing/2017/decorative" val="1"/>
+              </a:ext>
+            </a:extLst>
+          </p:cNvPr>
           <p:cNvSpPr/>
           <p:nvPr/>
         </p:nvSpPr>
@@ -29605,7 +30853,13 @@
       </p:sp>
       <p:sp>
         <p:nvSpPr>
-          <p:cNvPr id="6" name="Entity Person"/>
+          <p:cNvPr id="6" name="Entity Person" descr="">
+            <a:extLst>
+              <a:ext uri="{C183D7F6-B498-43B3-948B-1728B52AA6E4}">
+                <adec:decorative xmlns:adec="http://schemas.microsoft.com/office/drawing/2017/decorative" val="1"/>
+              </a:ext>
+            </a:extLst>
+          </p:cNvPr>
           <p:cNvSpPr/>
           <p:nvPr/>
         </p:nvSpPr>
@@ -29701,7 +30955,13 @@
       </p:sp>
       <p:sp>
         <p:nvSpPr>
-          <p:cNvPr id="8" name="Entity Identifier"/>
+          <p:cNvPr id="8" name="Entity Identifier" descr="">
+            <a:extLst>
+              <a:ext uri="{C183D7F6-B498-43B3-948B-1728B52AA6E4}">
+                <adec:decorative xmlns:adec="http://schemas.microsoft.com/office/drawing/2017/decorative" val="1"/>
+              </a:ext>
+            </a:extLst>
+          </p:cNvPr>
           <p:cNvSpPr/>
           <p:nvPr/>
         </p:nvSpPr>
@@ -29805,7 +31065,13 @@
       </p:sp>
       <p:sp>
         <p:nvSpPr>
-          <p:cNvPr id="10" name="Entity Affiliation"/>
+          <p:cNvPr id="10" name="Entity Affiliation" descr="">
+            <a:extLst>
+              <a:ext uri="{C183D7F6-B498-43B3-948B-1728B52AA6E4}">
+                <adec:decorative xmlns:adec="http://schemas.microsoft.com/office/drawing/2017/decorative" val="1"/>
+              </a:ext>
+            </a:extLst>
+          </p:cNvPr>
           <p:cNvSpPr/>
           <p:nvPr/>
         </p:nvSpPr>
@@ -29909,7 +31175,13 @@
       </p:sp>
       <p:sp>
         <p:nvSpPr>
-          <p:cNvPr id="12" name="Entity Account"/>
+          <p:cNvPr id="12" name="Entity Account" descr="">
+            <a:extLst>
+              <a:ext uri="{C183D7F6-B498-43B3-948B-1728B52AA6E4}">
+                <adec:decorative xmlns:adec="http://schemas.microsoft.com/office/drawing/2017/decorative" val="1"/>
+              </a:ext>
+            </a:extLst>
+          </p:cNvPr>
           <p:cNvSpPr/>
           <p:nvPr/>
         </p:nvSpPr>
@@ -30013,7 +31285,13 @@
       </p:sp>
       <p:sp>
         <p:nvSpPr>
-          <p:cNvPr id="14" name="Entity Assignment"/>
+          <p:cNvPr id="14" name="Entity Assignment" descr="">
+            <a:extLst>
+              <a:ext uri="{C183D7F6-B498-43B3-948B-1728B52AA6E4}">
+                <adec:decorative xmlns:adec="http://schemas.microsoft.com/office/drawing/2017/decorative" val="1"/>
+              </a:ext>
+            </a:extLst>
+          </p:cNvPr>
           <p:cNvSpPr/>
           <p:nvPr/>
         </p:nvSpPr>
@@ -30117,7 +31395,13 @@
       </p:sp>
       <p:sp>
         <p:nvSpPr>
-          <p:cNvPr id="16" name="Entity Org unit"/>
+          <p:cNvPr id="16" name="Entity Org unit" descr="">
+            <a:extLst>
+              <a:ext uri="{C183D7F6-B498-43B3-948B-1728B52AA6E4}">
+                <adec:decorative xmlns:adec="http://schemas.microsoft.com/office/drawing/2017/decorative" val="1"/>
+              </a:ext>
+            </a:extLst>
+          </p:cNvPr>
           <p:cNvSpPr/>
           <p:nvPr/>
         </p:nvSpPr>
@@ -30221,7 +31505,13 @@
       </p:sp>
       <p:sp>
         <p:nvSpPr>
-          <p:cNvPr id="18" name="Shape 16"/>
+          <p:cNvPr id="18" name="Shape 16" descr="">
+            <a:extLst>
+              <a:ext uri="{C183D7F6-B498-43B3-948B-1728B52AA6E4}">
+                <adec:decorative xmlns:adec="http://schemas.microsoft.com/office/drawing/2017/decorative" val="1"/>
+              </a:ext>
+            </a:extLst>
+          </p:cNvPr>
           <p:cNvSpPr/>
           <p:nvPr/>
         </p:nvSpPr>
@@ -30244,7 +31534,13 @@
       </p:sp>
       <p:sp>
         <p:nvSpPr>
-          <p:cNvPr id="19" name="Shape 17"/>
+          <p:cNvPr id="19" name="Shape 17" descr="">
+            <a:extLst>
+              <a:ext uri="{C183D7F6-B498-43B3-948B-1728B52AA6E4}">
+                <adec:decorative xmlns:adec="http://schemas.microsoft.com/office/drawing/2017/decorative" val="1"/>
+              </a:ext>
+            </a:extLst>
+          </p:cNvPr>
           <p:cNvSpPr/>
           <p:nvPr/>
         </p:nvSpPr>
@@ -30267,7 +31563,13 @@
       </p:sp>
       <p:sp>
         <p:nvSpPr>
-          <p:cNvPr id="20" name="Shape 18"/>
+          <p:cNvPr id="20" name="Shape 18" descr="">
+            <a:extLst>
+              <a:ext uri="{C183D7F6-B498-43B3-948B-1728B52AA6E4}">
+                <adec:decorative xmlns:adec="http://schemas.microsoft.com/office/drawing/2017/decorative" val="1"/>
+              </a:ext>
+            </a:extLst>
+          </p:cNvPr>
           <p:cNvSpPr/>
           <p:nvPr/>
         </p:nvSpPr>
@@ -30290,7 +31592,13 @@
       </p:sp>
       <p:sp>
         <p:nvSpPr>
-          <p:cNvPr id="21" name="Shape 19"/>
+          <p:cNvPr id="21" name="Shape 19" descr="">
+            <a:extLst>
+              <a:ext uri="{C183D7F6-B498-43B3-948B-1728B52AA6E4}">
+                <adec:decorative xmlns:adec="http://schemas.microsoft.com/office/drawing/2017/decorative" val="1"/>
+              </a:ext>
+            </a:extLst>
+          </p:cNvPr>
           <p:cNvSpPr/>
           <p:nvPr/>
         </p:nvSpPr>
@@ -30313,7 +31621,13 @@
       </p:sp>
       <p:sp>
         <p:nvSpPr>
-          <p:cNvPr id="22" name="Shape 20"/>
+          <p:cNvPr id="22" name="Shape 20" descr="">
+            <a:extLst>
+              <a:ext uri="{C183D7F6-B498-43B3-948B-1728B52AA6E4}">
+                <adec:decorative xmlns:adec="http://schemas.microsoft.com/office/drawing/2017/decorative" val="1"/>
+              </a:ext>
+            </a:extLst>
+          </p:cNvPr>
           <p:cNvSpPr/>
           <p:nvPr/>
         </p:nvSpPr>
@@ -30438,7 +31752,7 @@
         <a:graphic>
           <a:graphicData uri="http://schemas.openxmlformats.org/drawingml/2006/table">
             <a:tbl>
-              <a:tblPr/>
+              <a:tblPr firstRow="1" bandRow="1"/>
               <a:tblGrid>
                 <a:gridCol w="1463040"/>
                 <a:gridCol w="3657600"/>
@@ -31277,7 +32591,13 @@
       </p:graphicFrame>
       <p:sp>
         <p:nvSpPr>
-          <p:cNvPr id="26" name="Standards"/>
+          <p:cNvPr id="26" name="Standards" descr="">
+            <a:extLst>
+              <a:ext uri="{C183D7F6-B498-43B3-948B-1728B52AA6E4}">
+                <adec:decorative xmlns:adec="http://schemas.microsoft.com/office/drawing/2017/decorative" val="1"/>
+              </a:ext>
+            </a:extLst>
+          </p:cNvPr>
           <p:cNvSpPr/>
           <p:nvPr/>
         </p:nvSpPr>
@@ -31469,7 +32789,13 @@
       </p:sp>
       <p:sp>
         <p:nvSpPr>
-          <p:cNvPr id="3" name="Tag How"/>
+          <p:cNvPr id="3" name="Tag How" descr="">
+            <a:extLst>
+              <a:ext uri="{C183D7F6-B498-43B3-948B-1728B52AA6E4}">
+                <adec:decorative xmlns:adec="http://schemas.microsoft.com/office/drawing/2017/decorative" val="1"/>
+              </a:ext>
+            </a:extLst>
+          </p:cNvPr>
           <p:cNvSpPr/>
           <p:nvPr/>
         </p:nvSpPr>
@@ -31532,7 +32858,13 @@
       </p:sp>
       <p:sp>
         <p:nvSpPr>
-          <p:cNvPr id="5" name="How col 1"/>
+          <p:cNvPr id="5" name="How col 1" descr="">
+            <a:extLst>
+              <a:ext uri="{C183D7F6-B498-43B3-948B-1728B52AA6E4}">
+                <adec:decorative xmlns:adec="http://schemas.microsoft.com/office/drawing/2017/decorative" val="1"/>
+              </a:ext>
+            </a:extLst>
+          </p:cNvPr>
           <p:cNvSpPr/>
           <p:nvPr/>
         </p:nvSpPr>
@@ -31566,7 +32898,13 @@
       </p:sp>
       <p:sp>
         <p:nvSpPr>
-          <p:cNvPr id="6" name="Icon FaDatabase"/>
+          <p:cNvPr id="6" name="Icon FaDatabase" descr="">
+            <a:extLst>
+              <a:ext uri="{C183D7F6-B498-43B3-948B-1728B52AA6E4}">
+                <adec:decorative xmlns:adec="http://schemas.microsoft.com/office/drawing/2017/decorative" val="1"/>
+              </a:ext>
+            </a:extLst>
+          </p:cNvPr>
           <p:cNvSpPr/>
           <p:nvPr/>
         </p:nvSpPr>
@@ -31591,7 +32929,13 @@
       </p:sp>
       <p:pic>
         <p:nvPicPr>
-          <p:cNvPr id="7" name="Image 0" descr="C:\Users\whale\git\uiao\inbox\SSA-Interview\build\icons\FaDatabase.png">    </p:cNvPr>
+          <p:cNvPr id="7" name="Image 0" descr="">
+            <a:extLst>
+              <a:ext uri="{C183D7F6-B498-43B3-948B-1728B52AA6E4}">
+                <adec:decorative xmlns:adec="http://schemas.microsoft.com/office/drawing/2017/decorative" val="1"/>
+              </a:ext>
+            </a:extLst>
+          </p:cNvPr>
           <p:cNvPicPr>
             <a:picLocks noChangeAspect="1"/>
           </p:cNvPicPr>
@@ -31748,7 +33092,13 @@
       </p:sp>
       <p:sp>
         <p:nvSpPr>
-          <p:cNvPr id="10" name="How col 2"/>
+          <p:cNvPr id="10" name="How col 2" descr="">
+            <a:extLst>
+              <a:ext uri="{C183D7F6-B498-43B3-948B-1728B52AA6E4}">
+                <adec:decorative xmlns:adec="http://schemas.microsoft.com/office/drawing/2017/decorative" val="1"/>
+              </a:ext>
+            </a:extLst>
+          </p:cNvPr>
           <p:cNvSpPr/>
           <p:nvPr/>
         </p:nvSpPr>
@@ -31782,7 +33132,13 @@
       </p:sp>
       <p:sp>
         <p:nvSpPr>
-          <p:cNvPr id="11" name="Icon FaLock"/>
+          <p:cNvPr id="11" name="Icon FaLock" descr="">
+            <a:extLst>
+              <a:ext uri="{C183D7F6-B498-43B3-948B-1728B52AA6E4}">
+                <adec:decorative xmlns:adec="http://schemas.microsoft.com/office/drawing/2017/decorative" val="1"/>
+              </a:ext>
+            </a:extLst>
+          </p:cNvPr>
           <p:cNvSpPr/>
           <p:nvPr/>
         </p:nvSpPr>
@@ -31807,7 +33163,13 @@
       </p:sp>
       <p:pic>
         <p:nvPicPr>
-          <p:cNvPr id="12" name="Image 1" descr="C:\Users\whale\git\uiao\inbox\SSA-Interview\build\icons\FaLock.png">    </p:cNvPr>
+          <p:cNvPr id="12" name="Image 1" descr="">
+            <a:extLst>
+              <a:ext uri="{C183D7F6-B498-43B3-948B-1728B52AA6E4}">
+                <adec:decorative xmlns:adec="http://schemas.microsoft.com/office/drawing/2017/decorative" val="1"/>
+              </a:ext>
+            </a:extLst>
+          </p:cNvPr>
           <p:cNvPicPr>
             <a:picLocks noChangeAspect="1"/>
           </p:cNvPicPr>
@@ -31946,7 +33308,13 @@
       </p:sp>
       <p:sp>
         <p:nvSpPr>
-          <p:cNvPr id="15" name="How col 3"/>
+          <p:cNvPr id="15" name="How col 3" descr="">
+            <a:extLst>
+              <a:ext uri="{C183D7F6-B498-43B3-948B-1728B52AA6E4}">
+                <adec:decorative xmlns:adec="http://schemas.microsoft.com/office/drawing/2017/decorative" val="1"/>
+              </a:ext>
+            </a:extLst>
+          </p:cNvPr>
           <p:cNvSpPr/>
           <p:nvPr/>
         </p:nvSpPr>
@@ -31980,7 +33348,13 @@
       </p:sp>
       <p:sp>
         <p:nvSpPr>
-          <p:cNvPr id="16" name="Icon FaRoute"/>
+          <p:cNvPr id="16" name="Icon FaRoute" descr="">
+            <a:extLst>
+              <a:ext uri="{C183D7F6-B498-43B3-948B-1728B52AA6E4}">
+                <adec:decorative xmlns:adec="http://schemas.microsoft.com/office/drawing/2017/decorative" val="1"/>
+              </a:ext>
+            </a:extLst>
+          </p:cNvPr>
           <p:cNvSpPr/>
           <p:nvPr/>
         </p:nvSpPr>
@@ -32005,7 +33379,13 @@
       </p:sp>
       <p:pic>
         <p:nvPicPr>
-          <p:cNvPr id="17" name="Image 2" descr="C:\Users\whale\git\uiao\inbox\SSA-Interview\build\icons\FaRoute.png">    </p:cNvPr>
+          <p:cNvPr id="17" name="Image 2" descr="">
+            <a:extLst>
+              <a:ext uri="{C183D7F6-B498-43B3-948B-1728B52AA6E4}">
+                <adec:decorative xmlns:adec="http://schemas.microsoft.com/office/drawing/2017/decorative" val="1"/>
+              </a:ext>
+            </a:extLst>
+          </p:cNvPr>
           <p:cNvPicPr>
             <a:picLocks noChangeAspect="1"/>
           </p:cNvPicPr>
@@ -32198,7 +33578,13 @@
       </p:sp>
       <p:sp>
         <p:nvSpPr>
-          <p:cNvPr id="21" name="Stack 1"/>
+          <p:cNvPr id="21" name="Stack 1" descr="">
+            <a:extLst>
+              <a:ext uri="{C183D7F6-B498-43B3-948B-1728B52AA6E4}">
+                <adec:decorative xmlns:adec="http://schemas.microsoft.com/office/drawing/2017/decorative" val="1"/>
+              </a:ext>
+            </a:extLst>
+          </p:cNvPr>
           <p:cNvSpPr/>
           <p:nvPr/>
         </p:nvSpPr>
@@ -32268,7 +33654,13 @@
       </p:sp>
       <p:sp>
         <p:nvSpPr>
-          <p:cNvPr id="23" name="Shape 18"/>
+          <p:cNvPr id="23" name="Shape 18" descr="">
+            <a:extLst>
+              <a:ext uri="{C183D7F6-B498-43B3-948B-1728B52AA6E4}">
+                <adec:decorative xmlns:adec="http://schemas.microsoft.com/office/drawing/2017/decorative" val="1"/>
+              </a:ext>
+            </a:extLst>
+          </p:cNvPr>
           <p:cNvSpPr/>
           <p:nvPr/>
         </p:nvSpPr>
@@ -32292,7 +33684,13 @@
       </p:sp>
       <p:sp>
         <p:nvSpPr>
-          <p:cNvPr id="24" name="Stack 2"/>
+          <p:cNvPr id="24" name="Stack 2" descr="">
+            <a:extLst>
+              <a:ext uri="{C183D7F6-B498-43B3-948B-1728B52AA6E4}">
+                <adec:decorative xmlns:adec="http://schemas.microsoft.com/office/drawing/2017/decorative" val="1"/>
+              </a:ext>
+            </a:extLst>
+          </p:cNvPr>
           <p:cNvSpPr/>
           <p:nvPr/>
         </p:nvSpPr>
@@ -32362,7 +33760,13 @@
       </p:sp>
       <p:sp>
         <p:nvSpPr>
-          <p:cNvPr id="26" name="Shape 21"/>
+          <p:cNvPr id="26" name="Shape 21" descr="">
+            <a:extLst>
+              <a:ext uri="{C183D7F6-B498-43B3-948B-1728B52AA6E4}">
+                <adec:decorative xmlns:adec="http://schemas.microsoft.com/office/drawing/2017/decorative" val="1"/>
+              </a:ext>
+            </a:extLst>
+          </p:cNvPr>
           <p:cNvSpPr/>
           <p:nvPr/>
         </p:nvSpPr>
@@ -32386,7 +33790,13 @@
       </p:sp>
       <p:sp>
         <p:nvSpPr>
-          <p:cNvPr id="27" name="Stack 3"/>
+          <p:cNvPr id="27" name="Stack 3" descr="">
+            <a:extLst>
+              <a:ext uri="{C183D7F6-B498-43B3-948B-1728B52AA6E4}">
+                <adec:decorative xmlns:adec="http://schemas.microsoft.com/office/drawing/2017/decorative" val="1"/>
+              </a:ext>
+            </a:extLst>
+          </p:cNvPr>
           <p:cNvSpPr/>
           <p:nvPr/>
         </p:nvSpPr>
@@ -32456,7 +33866,13 @@
       </p:sp>
       <p:sp>
         <p:nvSpPr>
-          <p:cNvPr id="29" name="Shape 24"/>
+          <p:cNvPr id="29" name="Shape 24" descr="">
+            <a:extLst>
+              <a:ext uri="{C183D7F6-B498-43B3-948B-1728B52AA6E4}">
+                <adec:decorative xmlns:adec="http://schemas.microsoft.com/office/drawing/2017/decorative" val="1"/>
+              </a:ext>
+            </a:extLst>
+          </p:cNvPr>
           <p:cNvSpPr/>
           <p:nvPr/>
         </p:nvSpPr>
@@ -32480,7 +33896,13 @@
       </p:sp>
       <p:sp>
         <p:nvSpPr>
-          <p:cNvPr id="30" name="Stack 4"/>
+          <p:cNvPr id="30" name="Stack 4" descr="">
+            <a:extLst>
+              <a:ext uri="{C183D7F6-B498-43B3-948B-1728B52AA6E4}">
+                <adec:decorative xmlns:adec="http://schemas.microsoft.com/office/drawing/2017/decorative" val="1"/>
+              </a:ext>
+            </a:extLst>
+          </p:cNvPr>
           <p:cNvSpPr/>
           <p:nvPr/>
         </p:nvSpPr>
@@ -32661,7 +34083,13 @@
       </p:sp>
       <p:sp>
         <p:nvSpPr>
-          <p:cNvPr id="3" name="Tag How"/>
+          <p:cNvPr id="3" name="Tag How" descr="">
+            <a:extLst>
+              <a:ext uri="{C183D7F6-B498-43B3-948B-1728B52AA6E4}">
+                <adec:decorative xmlns:adec="http://schemas.microsoft.com/office/drawing/2017/decorative" val="1"/>
+              </a:ext>
+            </a:extLst>
+          </p:cNvPr>
           <p:cNvSpPr/>
           <p:nvPr/>
         </p:nvSpPr>
@@ -32760,7 +34188,13 @@
       </p:sp>
       <p:sp>
         <p:nvSpPr>
-          <p:cNvPr id="6" name="Measure 1"/>
+          <p:cNvPr id="6" name="Measure 1" descr="">
+            <a:extLst>
+              <a:ext uri="{C183D7F6-B498-43B3-948B-1728B52AA6E4}">
+                <adec:decorative xmlns:adec="http://schemas.microsoft.com/office/drawing/2017/decorative" val="1"/>
+              </a:ext>
+            </a:extLst>
+          </p:cNvPr>
           <p:cNvSpPr/>
           <p:nvPr/>
         </p:nvSpPr>
@@ -32794,7 +34228,13 @@
       </p:sp>
       <p:sp>
         <p:nvSpPr>
-          <p:cNvPr id="7" name="Icon FaUserXmark"/>
+          <p:cNvPr id="7" name="Icon FaUserXmark" descr="">
+            <a:extLst>
+              <a:ext uri="{C183D7F6-B498-43B3-948B-1728B52AA6E4}">
+                <adec:decorative xmlns:adec="http://schemas.microsoft.com/office/drawing/2017/decorative" val="1"/>
+              </a:ext>
+            </a:extLst>
+          </p:cNvPr>
           <p:cNvSpPr/>
           <p:nvPr/>
         </p:nvSpPr>
@@ -32819,7 +34259,13 @@
       </p:sp>
       <p:pic>
         <p:nvPicPr>
-          <p:cNvPr id="8" name="Image 0" descr="C:\Users\whale\git\uiao\inbox\SSA-Interview\build\icons\FaUserXmark.png">    </p:cNvPr>
+          <p:cNvPr id="8" name="Image 0" descr="">
+            <a:extLst>
+              <a:ext uri="{C183D7F6-B498-43B3-948B-1728B52AA6E4}">
+                <adec:decorative xmlns:adec="http://schemas.microsoft.com/office/drawing/2017/decorative" val="1"/>
+              </a:ext>
+            </a:extLst>
+          </p:cNvPr>
           <p:cNvPicPr>
             <a:picLocks noChangeAspect="1"/>
           </p:cNvPicPr>
@@ -32893,7 +34339,13 @@
       </p:sp>
       <p:sp>
         <p:nvSpPr>
-          <p:cNvPr id="10" name="Measure 2"/>
+          <p:cNvPr id="10" name="Measure 2" descr="">
+            <a:extLst>
+              <a:ext uri="{C183D7F6-B498-43B3-948B-1728B52AA6E4}">
+                <adec:decorative xmlns:adec="http://schemas.microsoft.com/office/drawing/2017/decorative" val="1"/>
+              </a:ext>
+            </a:extLst>
+          </p:cNvPr>
           <p:cNvSpPr/>
           <p:nvPr/>
         </p:nvSpPr>
@@ -32927,7 +34379,13 @@
       </p:sp>
       <p:sp>
         <p:nvSpPr>
-          <p:cNvPr id="11" name="Icon FaIdCard"/>
+          <p:cNvPr id="11" name="Icon FaIdCard" descr="">
+            <a:extLst>
+              <a:ext uri="{C183D7F6-B498-43B3-948B-1728B52AA6E4}">
+                <adec:decorative xmlns:adec="http://schemas.microsoft.com/office/drawing/2017/decorative" val="1"/>
+              </a:ext>
+            </a:extLst>
+          </p:cNvPr>
           <p:cNvSpPr/>
           <p:nvPr/>
         </p:nvSpPr>
@@ -32952,7 +34410,13 @@
       </p:sp>
       <p:pic>
         <p:nvPicPr>
-          <p:cNvPr id="12" name="Image 1" descr="C:\Users\whale\git\uiao\inbox\SSA-Interview\build\icons\FaIdCard.png">    </p:cNvPr>
+          <p:cNvPr id="12" name="Image 1" descr="">
+            <a:extLst>
+              <a:ext uri="{C183D7F6-B498-43B3-948B-1728B52AA6E4}">
+                <adec:decorative xmlns:adec="http://schemas.microsoft.com/office/drawing/2017/decorative" val="1"/>
+              </a:ext>
+            </a:extLst>
+          </p:cNvPr>
           <p:cNvPicPr>
             <a:picLocks noChangeAspect="1"/>
           </p:cNvPicPr>
@@ -33026,7 +34490,13 @@
       </p:sp>
       <p:sp>
         <p:nvSpPr>
-          <p:cNvPr id="14" name="Measure 3"/>
+          <p:cNvPr id="14" name="Measure 3" descr="">
+            <a:extLst>
+              <a:ext uri="{C183D7F6-B498-43B3-948B-1728B52AA6E4}">
+                <adec:decorative xmlns:adec="http://schemas.microsoft.com/office/drawing/2017/decorative" val="1"/>
+              </a:ext>
+            </a:extLst>
+          </p:cNvPr>
           <p:cNvSpPr/>
           <p:nvPr/>
         </p:nvSpPr>
@@ -33060,7 +34530,13 @@
       </p:sp>
       <p:sp>
         <p:nvSpPr>
-          <p:cNvPr id="15" name="Icon FaFingerprint"/>
+          <p:cNvPr id="15" name="Icon FaFingerprint" descr="">
+            <a:extLst>
+              <a:ext uri="{C183D7F6-B498-43B3-948B-1728B52AA6E4}">
+                <adec:decorative xmlns:adec="http://schemas.microsoft.com/office/drawing/2017/decorative" val="1"/>
+              </a:ext>
+            </a:extLst>
+          </p:cNvPr>
           <p:cNvSpPr/>
           <p:nvPr/>
         </p:nvSpPr>
@@ -33085,7 +34561,13 @@
       </p:sp>
       <p:pic>
         <p:nvPicPr>
-          <p:cNvPr id="16" name="Image 2" descr="C:\Users\whale\git\uiao\inbox\SSA-Interview\build\icons\FaFingerprint.png">    </p:cNvPr>
+          <p:cNvPr id="16" name="Image 2" descr="">
+            <a:extLst>
+              <a:ext uri="{C183D7F6-B498-43B3-948B-1728B52AA6E4}">
+                <adec:decorative xmlns:adec="http://schemas.microsoft.com/office/drawing/2017/decorative" val="1"/>
+              </a:ext>
+            </a:extLst>
+          </p:cNvPr>
           <p:cNvPicPr>
             <a:picLocks noChangeAspect="1"/>
           </p:cNvPicPr>
@@ -33159,7 +34641,13 @@
       </p:sp>
       <p:sp>
         <p:nvSpPr>
-          <p:cNvPr id="18" name="Measure 4"/>
+          <p:cNvPr id="18" name="Measure 4" descr="">
+            <a:extLst>
+              <a:ext uri="{C183D7F6-B498-43B3-948B-1728B52AA6E4}">
+                <adec:decorative xmlns:adec="http://schemas.microsoft.com/office/drawing/2017/decorative" val="1"/>
+              </a:ext>
+            </a:extLst>
+          </p:cNvPr>
           <p:cNvSpPr/>
           <p:nvPr/>
         </p:nvSpPr>
@@ -33193,7 +34681,13 @@
       </p:sp>
       <p:sp>
         <p:nvSpPr>
-          <p:cNvPr id="19" name="Icon FaUserClock"/>
+          <p:cNvPr id="19" name="Icon FaUserClock" descr="">
+            <a:extLst>
+              <a:ext uri="{C183D7F6-B498-43B3-948B-1728B52AA6E4}">
+                <adec:decorative xmlns:adec="http://schemas.microsoft.com/office/drawing/2017/decorative" val="1"/>
+              </a:ext>
+            </a:extLst>
+          </p:cNvPr>
           <p:cNvSpPr/>
           <p:nvPr/>
         </p:nvSpPr>
@@ -33218,7 +34712,13 @@
       </p:sp>
       <p:pic>
         <p:nvPicPr>
-          <p:cNvPr id="20" name="Image 3" descr="C:\Users\whale\git\uiao\inbox\SSA-Interview\build\icons\FaUserClock.png">    </p:cNvPr>
+          <p:cNvPr id="20" name="Image 3" descr="">
+            <a:extLst>
+              <a:ext uri="{C183D7F6-B498-43B3-948B-1728B52AA6E4}">
+                <adec:decorative xmlns:adec="http://schemas.microsoft.com/office/drawing/2017/decorative" val="1"/>
+              </a:ext>
+            </a:extLst>
+          </p:cNvPr>
           <p:cNvPicPr>
             <a:picLocks noChangeAspect="1"/>
           </p:cNvPicPr>
@@ -33292,7 +34792,13 @@
       </p:sp>
       <p:sp>
         <p:nvSpPr>
-          <p:cNvPr id="22" name="Measure 5"/>
+          <p:cNvPr id="22" name="Measure 5" descr="">
+            <a:extLst>
+              <a:ext uri="{C183D7F6-B498-43B3-948B-1728B52AA6E4}">
+                <adec:decorative xmlns:adec="http://schemas.microsoft.com/office/drawing/2017/decorative" val="1"/>
+              </a:ext>
+            </a:extLst>
+          </p:cNvPr>
           <p:cNvSpPr/>
           <p:nvPr/>
         </p:nvSpPr>
@@ -33326,7 +34832,13 @@
       </p:sp>
       <p:sp>
         <p:nvSpPr>
-          <p:cNvPr id="23" name="Icon FaAddressBook"/>
+          <p:cNvPr id="23" name="Icon FaAddressBook" descr="">
+            <a:extLst>
+              <a:ext uri="{C183D7F6-B498-43B3-948B-1728B52AA6E4}">
+                <adec:decorative xmlns:adec="http://schemas.microsoft.com/office/drawing/2017/decorative" val="1"/>
+              </a:ext>
+            </a:extLst>
+          </p:cNvPr>
           <p:cNvSpPr/>
           <p:nvPr/>
         </p:nvSpPr>
@@ -33351,7 +34863,13 @@
       </p:sp>
       <p:pic>
         <p:nvPicPr>
-          <p:cNvPr id="24" name="Image 4" descr="C:\Users\whale\git\uiao\inbox\SSA-Interview\build\icons\FaAddressBook.png">    </p:cNvPr>
+          <p:cNvPr id="24" name="Image 4" descr="">
+            <a:extLst>
+              <a:ext uri="{C183D7F6-B498-43B3-948B-1728B52AA6E4}">
+                <adec:decorative xmlns:adec="http://schemas.microsoft.com/office/drawing/2017/decorative" val="1"/>
+              </a:ext>
+            </a:extLst>
+          </p:cNvPr>
           <p:cNvPicPr>
             <a:picLocks noChangeAspect="1"/>
           </p:cNvPicPr>
@@ -33425,7 +34943,13 @@
       </p:sp>
       <p:sp>
         <p:nvSpPr>
-          <p:cNvPr id="26" name="Measure 6"/>
+          <p:cNvPr id="26" name="Measure 6" descr="">
+            <a:extLst>
+              <a:ext uri="{C183D7F6-B498-43B3-948B-1728B52AA6E4}">
+                <adec:decorative xmlns:adec="http://schemas.microsoft.com/office/drawing/2017/decorative" val="1"/>
+              </a:ext>
+            </a:extLst>
+          </p:cNvPr>
           <p:cNvSpPr/>
           <p:nvPr/>
         </p:nvSpPr>
@@ -33459,7 +34983,13 @@
       </p:sp>
       <p:sp>
         <p:nvSpPr>
-          <p:cNvPr id="27" name="Icon FaTriangleExclamation"/>
+          <p:cNvPr id="27" name="Icon FaTriangleExclamation" descr="">
+            <a:extLst>
+              <a:ext uri="{C183D7F6-B498-43B3-948B-1728B52AA6E4}">
+                <adec:decorative xmlns:adec="http://schemas.microsoft.com/office/drawing/2017/decorative" val="1"/>
+              </a:ext>
+            </a:extLst>
+          </p:cNvPr>
           <p:cNvSpPr/>
           <p:nvPr/>
         </p:nvSpPr>
@@ -33484,7 +35014,13 @@
       </p:sp>
       <p:pic>
         <p:nvPicPr>
-          <p:cNvPr id="28" name="Image 5" descr="C:\Users\whale\git\uiao\inbox\SSA-Interview\build\icons\FaTriangleExclamation.png">    </p:cNvPr>
+          <p:cNvPr id="28" name="Image 5" descr="">
+            <a:extLst>
+              <a:ext uri="{C183D7F6-B498-43B3-948B-1728B52AA6E4}">
+                <adec:decorative xmlns:adec="http://schemas.microsoft.com/office/drawing/2017/decorative" val="1"/>
+              </a:ext>
+            </a:extLst>
+          </p:cNvPr>
           <p:cNvPicPr>
             <a:picLocks noChangeAspect="1"/>
           </p:cNvPicPr>
@@ -33558,7 +35094,13 @@
       </p:sp>
       <p:sp>
         <p:nvSpPr>
-          <p:cNvPr id="30" name="Ask box"/>
+          <p:cNvPr id="30" name="Ask box" descr="">
+            <a:extLst>
+              <a:ext uri="{C183D7F6-B498-43B3-948B-1728B52AA6E4}">
+                <adec:decorative xmlns:adec="http://schemas.microsoft.com/office/drawing/2017/decorative" val="1"/>
+              </a:ext>
+            </a:extLst>
+          </p:cNvPr>
           <p:cNvSpPr/>
           <p:nvPr/>
         </p:nvSpPr>
@@ -33592,7 +35134,13 @@
       </p:sp>
       <p:sp>
         <p:nvSpPr>
-          <p:cNvPr id="31" name="Icon FaLightbulb"/>
+          <p:cNvPr id="31" name="Icon FaLightbulb" descr="">
+            <a:extLst>
+              <a:ext uri="{C183D7F6-B498-43B3-948B-1728B52AA6E4}">
+                <adec:decorative xmlns:adec="http://schemas.microsoft.com/office/drawing/2017/decorative" val="1"/>
+              </a:ext>
+            </a:extLst>
+          </p:cNvPr>
           <p:cNvSpPr/>
           <p:nvPr/>
         </p:nvSpPr>
@@ -33617,7 +35165,13 @@
       </p:sp>
       <p:pic>
         <p:nvPicPr>
-          <p:cNvPr id="32" name="Image 6" descr="C:\Users\whale\git\uiao\inbox\SSA-Interview\build\icons\FaLightbulb.png">    </p:cNvPr>
+          <p:cNvPr id="32" name="Image 6" descr="">
+            <a:extLst>
+              <a:ext uri="{C183D7F6-B498-43B3-948B-1728B52AA6E4}">
+                <adec:decorative xmlns:adec="http://schemas.microsoft.com/office/drawing/2017/decorative" val="1"/>
+              </a:ext>
+            </a:extLst>
+          </p:cNvPr>
           <p:cNvPicPr>
             <a:picLocks noChangeAspect="1"/>
           </p:cNvPicPr>
@@ -33907,7 +35461,13 @@
       </p:sp>
       <p:sp>
         <p:nvSpPr>
-          <p:cNvPr id="3" name="Teaser 1"/>
+          <p:cNvPr id="3" name="Teaser 1" descr="">
+            <a:extLst>
+              <a:ext uri="{C183D7F6-B498-43B3-948B-1728B52AA6E4}">
+                <adec:decorative xmlns:adec="http://schemas.microsoft.com/office/drawing/2017/decorative" val="1"/>
+              </a:ext>
+            </a:extLst>
+          </p:cNvPr>
           <p:cNvSpPr/>
           <p:nvPr/>
         </p:nvSpPr>
@@ -33941,7 +35501,13 @@
       </p:sp>
       <p:sp>
         <p:nvSpPr>
-          <p:cNvPr id="4" name="Icon FaCloudArrowUp"/>
+          <p:cNvPr id="4" name="Icon FaCloudArrowUp" descr="">
+            <a:extLst>
+              <a:ext uri="{C183D7F6-B498-43B3-948B-1728B52AA6E4}">
+                <adec:decorative xmlns:adec="http://schemas.microsoft.com/office/drawing/2017/decorative" val="1"/>
+              </a:ext>
+            </a:extLst>
+          </p:cNvPr>
           <p:cNvSpPr/>
           <p:nvPr/>
         </p:nvSpPr>
@@ -33966,7 +35532,13 @@
       </p:sp>
       <p:pic>
         <p:nvPicPr>
-          <p:cNvPr id="5" name="Image 0" descr="C:\Users\whale\git\uiao\inbox\SSA-Interview\build\icons\FaCloudArrowUp.png">    </p:cNvPr>
+          <p:cNvPr id="5" name="Image 0" descr="">
+            <a:extLst>
+              <a:ext uri="{C183D7F6-B498-43B3-948B-1728B52AA6E4}">
+                <adec:decorative xmlns:adec="http://schemas.microsoft.com/office/drawing/2017/decorative" val="1"/>
+              </a:ext>
+            </a:extLst>
+          </p:cNvPr>
           <p:cNvPicPr>
             <a:picLocks noChangeAspect="1"/>
           </p:cNvPicPr>
@@ -34046,7 +35618,13 @@
       </p:sp>
       <p:sp>
         <p:nvSpPr>
-          <p:cNvPr id="7" name="Teaser 2"/>
+          <p:cNvPr id="7" name="Teaser 2" descr="">
+            <a:extLst>
+              <a:ext uri="{C183D7F6-B498-43B3-948B-1728B52AA6E4}">
+                <adec:decorative xmlns:adec="http://schemas.microsoft.com/office/drawing/2017/decorative" val="1"/>
+              </a:ext>
+            </a:extLst>
+          </p:cNvPr>
           <p:cNvSpPr/>
           <p:nvPr/>
         </p:nvSpPr>
@@ -34080,7 +35658,13 @@
       </p:sp>
       <p:sp>
         <p:nvSpPr>
-          <p:cNvPr id="8" name="Icon FaGlobe"/>
+          <p:cNvPr id="8" name="Icon FaGlobe" descr="">
+            <a:extLst>
+              <a:ext uri="{C183D7F6-B498-43B3-948B-1728B52AA6E4}">
+                <adec:decorative xmlns:adec="http://schemas.microsoft.com/office/drawing/2017/decorative" val="1"/>
+              </a:ext>
+            </a:extLst>
+          </p:cNvPr>
           <p:cNvSpPr/>
           <p:nvPr/>
         </p:nvSpPr>
@@ -34105,7 +35689,13 @@
       </p:sp>
       <p:pic>
         <p:nvPicPr>
-          <p:cNvPr id="9" name="Image 1" descr="C:\Users\whale\git\uiao\inbox\SSA-Interview\build\icons\FaGlobe.png">    </p:cNvPr>
+          <p:cNvPr id="9" name="Image 1" descr="">
+            <a:extLst>
+              <a:ext uri="{C183D7F6-B498-43B3-948B-1728B52AA6E4}">
+                <adec:decorative xmlns:adec="http://schemas.microsoft.com/office/drawing/2017/decorative" val="1"/>
+              </a:ext>
+            </a:extLst>
+          </p:cNvPr>
           <p:cNvPicPr>
             <a:picLocks noChangeAspect="1"/>
           </p:cNvPicPr>
@@ -34185,7 +35775,13 @@
       </p:sp>
       <p:sp>
         <p:nvSpPr>
-          <p:cNvPr id="11" name="Teaser 3"/>
+          <p:cNvPr id="11" name="Teaser 3" descr="">
+            <a:extLst>
+              <a:ext uri="{C183D7F6-B498-43B3-948B-1728B52AA6E4}">
+                <adec:decorative xmlns:adec="http://schemas.microsoft.com/office/drawing/2017/decorative" val="1"/>
+              </a:ext>
+            </a:extLst>
+          </p:cNvPr>
           <p:cNvSpPr/>
           <p:nvPr/>
         </p:nvSpPr>
@@ -34219,7 +35815,13 @@
       </p:sp>
       <p:sp>
         <p:nvSpPr>
-          <p:cNvPr id="12" name="Icon FaBuilding"/>
+          <p:cNvPr id="12" name="Icon FaBuilding" descr="">
+            <a:extLst>
+              <a:ext uri="{C183D7F6-B498-43B3-948B-1728B52AA6E4}">
+                <adec:decorative xmlns:adec="http://schemas.microsoft.com/office/drawing/2017/decorative" val="1"/>
+              </a:ext>
+            </a:extLst>
+          </p:cNvPr>
           <p:cNvSpPr/>
           <p:nvPr/>
         </p:nvSpPr>
@@ -34244,7 +35846,13 @@
       </p:sp>
       <p:pic>
         <p:nvPicPr>
-          <p:cNvPr id="13" name="Image 2" descr="C:\Users\whale\git\uiao\inbox\SSA-Interview\build\icons\FaBuilding.png">    </p:cNvPr>
+          <p:cNvPr id="13" name="Image 2" descr="">
+            <a:extLst>
+              <a:ext uri="{C183D7F6-B498-43B3-948B-1728B52AA6E4}">
+                <adec:decorative xmlns:adec="http://schemas.microsoft.com/office/drawing/2017/decorative" val="1"/>
+              </a:ext>
+            </a:extLst>
+          </p:cNvPr>
           <p:cNvPicPr>
             <a:picLocks noChangeAspect="1"/>
           </p:cNvPicPr>
@@ -34324,7 +35932,13 @@
       </p:sp>
       <p:sp>
         <p:nvSpPr>
-          <p:cNvPr id="15" name="Teaser 4"/>
+          <p:cNvPr id="15" name="Teaser 4" descr="">
+            <a:extLst>
+              <a:ext uri="{C183D7F6-B498-43B3-948B-1728B52AA6E4}">
+                <adec:decorative xmlns:adec="http://schemas.microsoft.com/office/drawing/2017/decorative" val="1"/>
+              </a:ext>
+            </a:extLst>
+          </p:cNvPr>
           <p:cNvSpPr/>
           <p:nvPr/>
         </p:nvSpPr>
@@ -34358,7 +35972,13 @@
       </p:sp>
       <p:sp>
         <p:nvSpPr>
-          <p:cNvPr id="16" name="Icon FaRoute"/>
+          <p:cNvPr id="16" name="Icon FaRoute" descr="">
+            <a:extLst>
+              <a:ext uri="{C183D7F6-B498-43B3-948B-1728B52AA6E4}">
+                <adec:decorative xmlns:adec="http://schemas.microsoft.com/office/drawing/2017/decorative" val="1"/>
+              </a:ext>
+            </a:extLst>
+          </p:cNvPr>
           <p:cNvSpPr/>
           <p:nvPr/>
         </p:nvSpPr>
@@ -34383,7 +36003,13 @@
       </p:sp>
       <p:pic>
         <p:nvPicPr>
-          <p:cNvPr id="17" name="Image 3" descr="C:\Users\whale\git\uiao\inbox\SSA-Interview\build\icons\FaRoute.png">    </p:cNvPr>
+          <p:cNvPr id="17" name="Image 3" descr="">
+            <a:extLst>
+              <a:ext uri="{C183D7F6-B498-43B3-948B-1728B52AA6E4}">
+                <adec:decorative xmlns:adec="http://schemas.microsoft.com/office/drawing/2017/decorative" val="1"/>
+              </a:ext>
+            </a:extLst>
+          </p:cNvPr>
           <p:cNvPicPr>
             <a:picLocks noChangeAspect="1"/>
           </p:cNvPicPr>
@@ -34463,7 +36089,13 @@
       </p:sp>
       <p:sp>
         <p:nvSpPr>
-          <p:cNvPr id="19" name="Teaser 5"/>
+          <p:cNvPr id="19" name="Teaser 5" descr="">
+            <a:extLst>
+              <a:ext uri="{C183D7F6-B498-43B3-948B-1728B52AA6E4}">
+                <adec:decorative xmlns:adec="http://schemas.microsoft.com/office/drawing/2017/decorative" val="1"/>
+              </a:ext>
+            </a:extLst>
+          </p:cNvPr>
           <p:cNvSpPr/>
           <p:nvPr/>
         </p:nvSpPr>
@@ -34497,7 +36129,13 @@
       </p:sp>
       <p:sp>
         <p:nvSpPr>
-          <p:cNvPr id="20" name="Icon FaServer"/>
+          <p:cNvPr id="20" name="Icon FaServer" descr="">
+            <a:extLst>
+              <a:ext uri="{C183D7F6-B498-43B3-948B-1728B52AA6E4}">
+                <adec:decorative xmlns:adec="http://schemas.microsoft.com/office/drawing/2017/decorative" val="1"/>
+              </a:ext>
+            </a:extLst>
+          </p:cNvPr>
           <p:cNvSpPr/>
           <p:nvPr/>
         </p:nvSpPr>
@@ -34522,7 +36160,13 @@
       </p:sp>
       <p:pic>
         <p:nvPicPr>
-          <p:cNvPr id="21" name="Image 4" descr="C:\Users\whale\git\uiao\inbox\SSA-Interview\build\icons\FaServer.png">    </p:cNvPr>
+          <p:cNvPr id="21" name="Image 4" descr="">
+            <a:extLst>
+              <a:ext uri="{C183D7F6-B498-43B3-948B-1728B52AA6E4}">
+                <adec:decorative xmlns:adec="http://schemas.microsoft.com/office/drawing/2017/decorative" val="1"/>
+              </a:ext>
+            </a:extLst>
+          </p:cNvPr>
           <p:cNvPicPr>
             <a:picLocks noChangeAspect="1"/>
           </p:cNvPicPr>
@@ -34602,7 +36246,13 @@
       </p:sp>
       <p:sp>
         <p:nvSpPr>
-          <p:cNvPr id="23" name="Teaser 6"/>
+          <p:cNvPr id="23" name="Teaser 6" descr="">
+            <a:extLst>
+              <a:ext uri="{C183D7F6-B498-43B3-948B-1728B52AA6E4}">
+                <adec:decorative xmlns:adec="http://schemas.microsoft.com/office/drawing/2017/decorative" val="1"/>
+              </a:ext>
+            </a:extLst>
+          </p:cNvPr>
           <p:cNvSpPr/>
           <p:nvPr/>
         </p:nvSpPr>
@@ -34636,7 +36286,13 @@
       </p:sp>
       <p:sp>
         <p:nvSpPr>
-          <p:cNvPr id="24" name="Icon FaDatabase"/>
+          <p:cNvPr id="24" name="Icon FaDatabase" descr="">
+            <a:extLst>
+              <a:ext uri="{C183D7F6-B498-43B3-948B-1728B52AA6E4}">
+                <adec:decorative xmlns:adec="http://schemas.microsoft.com/office/drawing/2017/decorative" val="1"/>
+              </a:ext>
+            </a:extLst>
+          </p:cNvPr>
           <p:cNvSpPr/>
           <p:nvPr/>
         </p:nvSpPr>
@@ -34661,7 +36317,13 @@
       </p:sp>
       <p:pic>
         <p:nvPicPr>
-          <p:cNvPr id="25" name="Image 5" descr="C:\Users\whale\git\uiao\inbox\SSA-Interview\build\icons\FaDatabase.png">    </p:cNvPr>
+          <p:cNvPr id="25" name="Image 5" descr="">
+            <a:extLst>
+              <a:ext uri="{C183D7F6-B498-43B3-948B-1728B52AA6E4}">
+                <adec:decorative xmlns:adec="http://schemas.microsoft.com/office/drawing/2017/decorative" val="1"/>
+              </a:ext>
+            </a:extLst>
+          </p:cNvPr>
           <p:cNvPicPr>
             <a:picLocks noChangeAspect="1"/>
           </p:cNvPicPr>
@@ -34741,7 +36403,13 @@
       </p:sp>
       <p:sp>
         <p:nvSpPr>
-          <p:cNvPr id="27" name="Teaser 7"/>
+          <p:cNvPr id="27" name="Teaser 7" descr="">
+            <a:extLst>
+              <a:ext uri="{C183D7F6-B498-43B3-948B-1728B52AA6E4}">
+                <adec:decorative xmlns:adec="http://schemas.microsoft.com/office/drawing/2017/decorative" val="1"/>
+              </a:ext>
+            </a:extLst>
+          </p:cNvPr>
           <p:cNvSpPr/>
           <p:nvPr/>
         </p:nvSpPr>
@@ -34775,7 +36443,13 @@
       </p:sp>
       <p:sp>
         <p:nvSpPr>
-          <p:cNvPr id="28" name="Icon FaLaptop"/>
+          <p:cNvPr id="28" name="Icon FaLaptop" descr="">
+            <a:extLst>
+              <a:ext uri="{C183D7F6-B498-43B3-948B-1728B52AA6E4}">
+                <adec:decorative xmlns:adec="http://schemas.microsoft.com/office/drawing/2017/decorative" val="1"/>
+              </a:ext>
+            </a:extLst>
+          </p:cNvPr>
           <p:cNvSpPr/>
           <p:nvPr/>
         </p:nvSpPr>
@@ -34800,7 +36474,13 @@
       </p:sp>
       <p:pic>
         <p:nvPicPr>
-          <p:cNvPr id="29" name="Image 6" descr="C:\Users\whale\git\uiao\inbox\SSA-Interview\build\icons\FaLaptop.png">    </p:cNvPr>
+          <p:cNvPr id="29" name="Image 6" descr="">
+            <a:extLst>
+              <a:ext uri="{C183D7F6-B498-43B3-948B-1728B52AA6E4}">
+                <adec:decorative xmlns:adec="http://schemas.microsoft.com/office/drawing/2017/decorative" val="1"/>
+              </a:ext>
+            </a:extLst>
+          </p:cNvPr>
           <p:cNvPicPr>
             <a:picLocks noChangeAspect="1"/>
           </p:cNvPicPr>
@@ -34880,7 +36560,13 @@
       </p:sp>
       <p:sp>
         <p:nvSpPr>
-          <p:cNvPr id="31" name="Teaser 8"/>
+          <p:cNvPr id="31" name="Teaser 8" descr="">
+            <a:extLst>
+              <a:ext uri="{C183D7F6-B498-43B3-948B-1728B52AA6E4}">
+                <adec:decorative xmlns:adec="http://schemas.microsoft.com/office/drawing/2017/decorative" val="1"/>
+              </a:ext>
+            </a:extLst>
+          </p:cNvPr>
           <p:cNvSpPr/>
           <p:nvPr/>
         </p:nvSpPr>
@@ -34914,7 +36600,13 @@
       </p:sp>
       <p:sp>
         <p:nvSpPr>
-          <p:cNvPr id="32" name="Icon FaShieldHalved"/>
+          <p:cNvPr id="32" name="Icon FaShieldHalved" descr="">
+            <a:extLst>
+              <a:ext uri="{C183D7F6-B498-43B3-948B-1728B52AA6E4}">
+                <adec:decorative xmlns:adec="http://schemas.microsoft.com/office/drawing/2017/decorative" val="1"/>
+              </a:ext>
+            </a:extLst>
+          </p:cNvPr>
           <p:cNvSpPr/>
           <p:nvPr/>
         </p:nvSpPr>
@@ -34939,7 +36631,13 @@
       </p:sp>
       <p:pic>
         <p:nvPicPr>
-          <p:cNvPr id="33" name="Image 7" descr="C:\Users\whale\git\uiao\inbox\SSA-Interview\build\icons\FaShieldHalved.png">    </p:cNvPr>
+          <p:cNvPr id="33" name="Image 7" descr="">
+            <a:extLst>
+              <a:ext uri="{C183D7F6-B498-43B3-948B-1728B52AA6E4}">
+                <adec:decorative xmlns:adec="http://schemas.microsoft.com/office/drawing/2017/decorative" val="1"/>
+              </a:ext>
+            </a:extLst>
+          </p:cNvPr>
           <p:cNvPicPr>
             <a:picLocks noChangeAspect="1"/>
           </p:cNvPicPr>
@@ -35019,7 +36717,13 @@
       </p:sp>
       <p:sp>
         <p:nvSpPr>
-          <p:cNvPr id="35" name="Teaser companions"/>
+          <p:cNvPr id="35" name="Teaser companions" descr="">
+            <a:extLst>
+              <a:ext uri="{C183D7F6-B498-43B3-948B-1728B52AA6E4}">
+                <adec:decorative xmlns:adec="http://schemas.microsoft.com/office/drawing/2017/decorative" val="1"/>
+              </a:ext>
+            </a:extLst>
+          </p:cNvPr>
           <p:cNvSpPr/>
           <p:nvPr/>
         </p:nvSpPr>
@@ -35133,7 +36837,13 @@
       </p:sp>
       <p:sp>
         <p:nvSpPr>
-          <p:cNvPr id="37" name="Teaser footer"/>
+          <p:cNvPr id="37" name="Teaser footer" descr="">
+            <a:extLst>
+              <a:ext uri="{C183D7F6-B498-43B3-948B-1728B52AA6E4}">
+                <adec:decorative xmlns:adec="http://schemas.microsoft.com/office/drawing/2017/decorative" val="1"/>
+              </a:ext>
+            </a:extLst>
+          </p:cNvPr>
           <p:cNvSpPr/>
           <p:nvPr/>
         </p:nvSpPr>
